--- a/nus_lecture_rfm_agent.pptx
+++ b/nus_lecture_rfm_agent.pptx
@@ -43,6 +43,7 @@
     <p:sldId id="291" r:id="rId43"/>
     <p:sldId id="292" r:id="rId44"/>
     <p:sldId id="293" r:id="rId45"/>
+    <p:sldId id="294" r:id="rId46"/>
   </p:sldIdLst>
   <p:sldSz cx="12191695" cy="6858000" type="screen4x3"/>
   <p:notesSz cx="6858000" cy="9144000"/>
@@ -609,6 +610,76 @@
           <a:lstStyle/>
           <a:p>
             <a:r>
+              <a:t>Run: streamlit run app.py — use sample dataset first; if internet allows, re-run with the Claude strategist toggle on.</a:t>
+            </a:r>
+          </a:p>
+        </p:txBody>
+      </p:sp>
+      <p:sp>
+        <p:nvSpPr>
+          <p:cNvPr id="4" name="Slide Number Placeholder 3"/>
+          <p:cNvSpPr>
+            <a:spLocks noGrp="1"/>
+          </p:cNvSpPr>
+          <p:nvPr>
+            <p:ph type="sldNum" idx="5" sz="quarter"/>
+          </p:nvPr>
+        </p:nvSpPr>
+        <p:spPr/>
+      </p:sp>
+    </p:spTree>
+  </p:cSld>
+  <p:clrMapOvr>
+    <a:masterClrMapping/>
+  </p:clrMapOvr>
+</p:notes>
+</file>
+
+<file path=ppt/notesSlides/notesSlide11.xml><?xml version="1.0" encoding="utf-8"?>
+<p:notes xmlns:a="http://schemas.openxmlformats.org/drawingml/2006/main" xmlns:p="http://schemas.openxmlformats.org/presentationml/2006/main" xmlns:r="http://schemas.openxmlformats.org/officeDocument/2006/relationships">
+  <p:cSld>
+    <p:spTree>
+      <p:nvGrpSpPr>
+        <p:cNvPr id="1" name=""/>
+        <p:cNvGrpSpPr/>
+        <p:nvPr/>
+      </p:nvGrpSpPr>
+      <p:grpSpPr>
+        <a:xfrm>
+          <a:off x="0" y="0"/>
+          <a:ext cx="0" cy="0"/>
+          <a:chOff x="0" y="0"/>
+          <a:chExt cx="0" cy="0"/>
+        </a:xfrm>
+      </p:grpSpPr>
+      <p:sp>
+        <p:nvSpPr>
+          <p:cNvPr id="2" name="Slide Image Placeholder 1"/>
+          <p:cNvSpPr>
+            <a:spLocks noGrp="1"/>
+          </p:cNvSpPr>
+          <p:nvPr>
+            <p:ph type="sldImg" idx="2"/>
+          </p:nvPr>
+        </p:nvSpPr>
+        <p:spPr/>
+      </p:sp>
+      <p:sp>
+        <p:nvSpPr>
+          <p:cNvPr id="3" name="Notes Placeholder 2"/>
+          <p:cNvSpPr>
+            <a:spLocks noGrp="1"/>
+          </p:cNvSpPr>
+          <p:nvPr>
+            <p:ph type="body" idx="3" sz="quarter"/>
+          </p:nvPr>
+        </p:nvSpPr>
+        <p:spPr/>
+        <p:txBody>
+          <a:bodyPr/>
+          <a:lstStyle/>
+          <a:p>
+            <a:r>
               <a:t>If the live demo fails, this slide carries the story.</a:t>
             </a:r>
           </a:p>
@@ -749,7 +820,7 @@
           <a:lstStyle/>
           <a:p>
             <a:r>
-              <a:t>Ask the class: who has unsubscribed from a brand's emails this month? Why?</a:t>
+              <a:t>Set expectations: everything in the next 2 hours is a faithful miniature of real production analytics work — same dirty data, same repetition pressure, same need for an actionable report.</a:t>
             </a:r>
           </a:p>
         </p:txBody>
@@ -819,7 +890,7 @@
           <a:lstStyle/>
           <a:p>
             <a:r>
-              <a:t>Quick check: a customer who bought yesterday, once ever, for $900 — what does their profile look like? (R5, F1, M5)</a:t>
+              <a:t>Ask the class: who has unsubscribed from a brand's emails this month? Why?</a:t>
             </a:r>
           </a:p>
         </p:txBody>
@@ -889,7 +960,7 @@
           <a:lstStyle/>
           <a:p>
             <a:r>
-              <a:t>This is the 'classic Chinese e-commerce CRM' simplification of the full 11-segment RFM grid — four groups are enough to act on.</a:t>
+              <a:t>Quick check: a customer who bought yesterday, once ever, for $900 — what does their profile look like? (R5, F1, M5)</a:t>
             </a:r>
           </a:p>
         </p:txBody>
@@ -959,7 +1030,7 @@
           <a:lstStyle/>
           <a:p>
             <a:r>
-              <a:t>Reveal answers one by one; ask WHY for each. #3 is the interesting one — high historical value but going cold.</a:t>
+              <a:t>This is the 'classic Chinese e-commerce CRM' simplification of the full 11-segment RFM grid — four groups are enough to act on.</a:t>
             </a:r>
           </a:p>
         </p:txBody>
@@ -1029,7 +1100,7 @@
           <a:lstStyle/>
           <a:p>
             <a:r>
-              <a:t>5 minutes of discussion. Q4 foreshadows the automation argument: segments drift, so the analysis must be repeated — perfect job for an agent.</a:t>
+              <a:t>Reveal answers one by one; ask WHY for each. #3 is the interesting one — high historical value but going cold.</a:t>
             </a:r>
           </a:p>
         </p:txBody>
@@ -1099,7 +1170,7 @@
           <a:lstStyle/>
           <a:p>
             <a:r>
-              <a:t>De-hype moment: most production 'agents' are 80% deterministic pipeline + 20% LLM at the judgement/wording layer.</a:t>
+              <a:t>5 minutes of discussion. Q4 foreshadows the automation argument: segments drift, so the analysis must be repeated — perfect job for an agent.</a:t>
             </a:r>
           </a:p>
         </p:txBody>
@@ -1169,7 +1240,7 @@
           <a:lstStyle/>
           <a:p>
             <a:r>
-              <a:t>Run: streamlit run app.py — use sample dataset first; if internet allows, re-run with the Claude strategist toggle on.</a:t>
+              <a:t>De-hype moment: most production 'agents' are 80% deterministic pipeline + 20% LLM at the judgement/wording layer.</a:t>
             </a:r>
           </a:p>
         </p:txBody>
@@ -4287,7 +4358,7 @@
               </a:defRPr>
             </a:pPr>
             <a:r>
-              <a:t>TikTok Engineer (AI Agents) · PhD Student, NTU Singapore</a:t>
+              <a:t>Software Engineer @ TikTok (AI) · Part-time PhD Student, NTU Singapore</a:t>
             </a:r>
           </a:p>
         </p:txBody>
@@ -4391,6 +4462,552 @@
               </a:defRPr>
             </a:pPr>
             <a:r>
+              <a:t>R · F · M — three questions about every customer</a:t>
+            </a:r>
+          </a:p>
+        </p:txBody>
+      </p:sp>
+      <p:graphicFrame>
+        <p:nvGraphicFramePr>
+          <p:cNvPr id="4" name="Table 3"/>
+          <p:cNvGraphicFramePr>
+            <a:graphicFrameLocks noGrp="1"/>
+          </p:cNvGraphicFramePr>
+          <p:nvPr/>
+        </p:nvGraphicFramePr>
+        <p:xfrm>
+          <a:off x="640080" y="1554480"/>
+          <a:ext cx="10972800" cy="3108960"/>
+        </p:xfrm>
+        <a:graphic>
+          <a:graphicData uri="http://schemas.openxmlformats.org/drawingml/2006/table">
+            <a:tbl>
+              <a:tblPr firstRow="1" bandRow="1">
+                <a:tableStyleId>{5C22544A-7EE6-4342-B048-85BDC9FD1C3A}</a:tableStyleId>
+              </a:tblPr>
+              <a:tblGrid>
+                <a:gridCol w="2743200"/>
+                <a:gridCol w="2743200"/>
+                <a:gridCol w="2743200"/>
+                <a:gridCol w="2743200"/>
+              </a:tblGrid>
+              <a:tr h="777240">
+                <a:tc>
+                  <a:txBody>
+                    <a:bodyPr/>
+                    <a:lstStyle/>
+                    <a:p>
+                      <a:pPr>
+                        <a:defRPr sz="1600" b="1">
+                          <a:solidFill>
+                            <a:srgbClr val="FFFFFF"/>
+                          </a:solidFill>
+                        </a:defRPr>
+                      </a:pPr>
+                      <a:r>
+                        <a:t>Letter</a:t>
+                      </a:r>
+                    </a:p>
+                  </a:txBody>
+                  <a:tcPr>
+                    <a:solidFill>
+                      <a:srgbClr val="1F3864"/>
+                    </a:solidFill>
+                  </a:tcPr>
+                </a:tc>
+                <a:tc>
+                  <a:txBody>
+                    <a:bodyPr/>
+                    <a:lstStyle/>
+                    <a:p>
+                      <a:pPr>
+                        <a:defRPr sz="1600" b="1">
+                          <a:solidFill>
+                            <a:srgbClr val="FFFFFF"/>
+                          </a:solidFill>
+                        </a:defRPr>
+                      </a:pPr>
+                      <a:r>
+                        <a:t>Question</a:t>
+                      </a:r>
+                    </a:p>
+                  </a:txBody>
+                  <a:tcPr>
+                    <a:solidFill>
+                      <a:srgbClr val="1F3864"/>
+                    </a:solidFill>
+                  </a:tcPr>
+                </a:tc>
+                <a:tc>
+                  <a:txBody>
+                    <a:bodyPr/>
+                    <a:lstStyle/>
+                    <a:p>
+                      <a:pPr>
+                        <a:defRPr sz="1600" b="1">
+                          <a:solidFill>
+                            <a:srgbClr val="FFFFFF"/>
+                          </a:solidFill>
+                        </a:defRPr>
+                      </a:pPr>
+                      <a:r>
+                        <a:t>Metric</a:t>
+                      </a:r>
+                    </a:p>
+                  </a:txBody>
+                  <a:tcPr>
+                    <a:solidFill>
+                      <a:srgbClr val="1F3864"/>
+                    </a:solidFill>
+                  </a:tcPr>
+                </a:tc>
+                <a:tc>
+                  <a:txBody>
+                    <a:bodyPr/>
+                    <a:lstStyle/>
+                    <a:p>
+                      <a:pPr>
+                        <a:defRPr sz="1600" b="1">
+                          <a:solidFill>
+                            <a:srgbClr val="FFFFFF"/>
+                          </a:solidFill>
+                        </a:defRPr>
+                      </a:pPr>
+                      <a:r>
+                        <a:t>Intuition</a:t>
+                      </a:r>
+                    </a:p>
+                  </a:txBody>
+                  <a:tcPr>
+                    <a:solidFill>
+                      <a:srgbClr val="1F3864"/>
+                    </a:solidFill>
+                  </a:tcPr>
+                </a:tc>
+              </a:tr>
+              <a:tr h="777240">
+                <a:tc>
+                  <a:txBody>
+                    <a:bodyPr/>
+                    <a:lstStyle/>
+                    <a:p>
+                      <a:pPr>
+                        <a:defRPr sz="1600">
+                          <a:solidFill>
+                            <a:srgbClr val="1F3864"/>
+                          </a:solidFill>
+                        </a:defRPr>
+                      </a:pPr>
+                      <a:r>
+                        <a:t>Recency</a:t>
+                      </a:r>
+                    </a:p>
+                  </a:txBody>
+                  <a:tcPr>
+                    <a:solidFill>
+                      <a:srgbClr val="F2F5F9"/>
+                    </a:solidFill>
+                  </a:tcPr>
+                </a:tc>
+                <a:tc>
+                  <a:txBody>
+                    <a:bodyPr/>
+                    <a:lstStyle/>
+                    <a:p>
+                      <a:pPr>
+                        <a:defRPr sz="1600">
+                          <a:solidFill>
+                            <a:srgbClr val="1F3864"/>
+                          </a:solidFill>
+                        </a:defRPr>
+                      </a:pPr>
+                      <a:r>
+                        <a:t>How recently did they buy?</a:t>
+                      </a:r>
+                    </a:p>
+                  </a:txBody>
+                  <a:tcPr>
+                    <a:solidFill>
+                      <a:srgbClr val="F2F5F9"/>
+                    </a:solidFill>
+                  </a:tcPr>
+                </a:tc>
+                <a:tc>
+                  <a:txBody>
+                    <a:bodyPr/>
+                    <a:lstStyle/>
+                    <a:p>
+                      <a:pPr>
+                        <a:defRPr sz="1600">
+                          <a:solidFill>
+                            <a:srgbClr val="1F3864"/>
+                          </a:solidFill>
+                        </a:defRPr>
+                      </a:pPr>
+                      <a:r>
+                        <a:t>Days since last purchase</a:t>
+                      </a:r>
+                    </a:p>
+                  </a:txBody>
+                  <a:tcPr>
+                    <a:solidFill>
+                      <a:srgbClr val="F2F5F9"/>
+                    </a:solidFill>
+                  </a:tcPr>
+                </a:tc>
+                <a:tc>
+                  <a:txBody>
+                    <a:bodyPr/>
+                    <a:lstStyle/>
+                    <a:p>
+                      <a:pPr>
+                        <a:defRPr sz="1600">
+                          <a:solidFill>
+                            <a:srgbClr val="1F3864"/>
+                          </a:solidFill>
+                        </a:defRPr>
+                      </a:pPr>
+                      <a:r>
+                        <a:t>Recent buyers respond best</a:t>
+                      </a:r>
+                    </a:p>
+                  </a:txBody>
+                  <a:tcPr>
+                    <a:solidFill>
+                      <a:srgbClr val="F2F5F9"/>
+                    </a:solidFill>
+                  </a:tcPr>
+                </a:tc>
+              </a:tr>
+              <a:tr h="777240">
+                <a:tc>
+                  <a:txBody>
+                    <a:bodyPr/>
+                    <a:lstStyle/>
+                    <a:p>
+                      <a:pPr>
+                        <a:defRPr sz="1600">
+                          <a:solidFill>
+                            <a:srgbClr val="1F3864"/>
+                          </a:solidFill>
+                        </a:defRPr>
+                      </a:pPr>
+                      <a:r>
+                        <a:t>Frequency</a:t>
+                      </a:r>
+                    </a:p>
+                  </a:txBody>
+                  <a:tcPr>
+                    <a:solidFill>
+                      <a:srgbClr val="FFFFFF"/>
+                    </a:solidFill>
+                  </a:tcPr>
+                </a:tc>
+                <a:tc>
+                  <a:txBody>
+                    <a:bodyPr/>
+                    <a:lstStyle/>
+                    <a:p>
+                      <a:pPr>
+                        <a:defRPr sz="1600">
+                          <a:solidFill>
+                            <a:srgbClr val="1F3864"/>
+                          </a:solidFill>
+                        </a:defRPr>
+                      </a:pPr>
+                      <a:r>
+                        <a:t>How often do they buy?</a:t>
+                      </a:r>
+                    </a:p>
+                  </a:txBody>
+                  <a:tcPr>
+                    <a:solidFill>
+                      <a:srgbClr val="FFFFFF"/>
+                    </a:solidFill>
+                  </a:tcPr>
+                </a:tc>
+                <a:tc>
+                  <a:txBody>
+                    <a:bodyPr/>
+                    <a:lstStyle/>
+                    <a:p>
+                      <a:pPr>
+                        <a:defRPr sz="1600">
+                          <a:solidFill>
+                            <a:srgbClr val="1F3864"/>
+                          </a:solidFill>
+                        </a:defRPr>
+                      </a:pPr>
+                      <a:r>
+                        <a:t>Number of orders</a:t>
+                      </a:r>
+                    </a:p>
+                  </a:txBody>
+                  <a:tcPr>
+                    <a:solidFill>
+                      <a:srgbClr val="FFFFFF"/>
+                    </a:solidFill>
+                  </a:tcPr>
+                </a:tc>
+                <a:tc>
+                  <a:txBody>
+                    <a:bodyPr/>
+                    <a:lstStyle/>
+                    <a:p>
+                      <a:pPr>
+                        <a:defRPr sz="1600">
+                          <a:solidFill>
+                            <a:srgbClr val="1F3864"/>
+                          </a:solidFill>
+                        </a:defRPr>
+                      </a:pPr>
+                      <a:r>
+                        <a:t>Habit predicts future buying</a:t>
+                      </a:r>
+                    </a:p>
+                  </a:txBody>
+                  <a:tcPr>
+                    <a:solidFill>
+                      <a:srgbClr val="FFFFFF"/>
+                    </a:solidFill>
+                  </a:tcPr>
+                </a:tc>
+              </a:tr>
+              <a:tr h="777240">
+                <a:tc>
+                  <a:txBody>
+                    <a:bodyPr/>
+                    <a:lstStyle/>
+                    <a:p>
+                      <a:pPr>
+                        <a:defRPr sz="1600">
+                          <a:solidFill>
+                            <a:srgbClr val="1F3864"/>
+                          </a:solidFill>
+                        </a:defRPr>
+                      </a:pPr>
+                      <a:r>
+                        <a:t>Monetary</a:t>
+                      </a:r>
+                    </a:p>
+                  </a:txBody>
+                  <a:tcPr>
+                    <a:solidFill>
+                      <a:srgbClr val="F2F5F9"/>
+                    </a:solidFill>
+                  </a:tcPr>
+                </a:tc>
+                <a:tc>
+                  <a:txBody>
+                    <a:bodyPr/>
+                    <a:lstStyle/>
+                    <a:p>
+                      <a:pPr>
+                        <a:defRPr sz="1600">
+                          <a:solidFill>
+                            <a:srgbClr val="1F3864"/>
+                          </a:solidFill>
+                        </a:defRPr>
+                      </a:pPr>
+                      <a:r>
+                        <a:t>How much do they spend?</a:t>
+                      </a:r>
+                    </a:p>
+                  </a:txBody>
+                  <a:tcPr>
+                    <a:solidFill>
+                      <a:srgbClr val="F2F5F9"/>
+                    </a:solidFill>
+                  </a:tcPr>
+                </a:tc>
+                <a:tc>
+                  <a:txBody>
+                    <a:bodyPr/>
+                    <a:lstStyle/>
+                    <a:p>
+                      <a:pPr>
+                        <a:defRPr sz="1600">
+                          <a:solidFill>
+                            <a:srgbClr val="1F3864"/>
+                          </a:solidFill>
+                        </a:defRPr>
+                      </a:pPr>
+                      <a:r>
+                        <a:t>Total spend ($)</a:t>
+                      </a:r>
+                    </a:p>
+                  </a:txBody>
+                  <a:tcPr>
+                    <a:solidFill>
+                      <a:srgbClr val="F2F5F9"/>
+                    </a:solidFill>
+                  </a:tcPr>
+                </a:tc>
+                <a:tc>
+                  <a:txBody>
+                    <a:bodyPr/>
+                    <a:lstStyle/>
+                    <a:p>
+                      <a:pPr>
+                        <a:defRPr sz="1600">
+                          <a:solidFill>
+                            <a:srgbClr val="1F3864"/>
+                          </a:solidFill>
+                        </a:defRPr>
+                      </a:pPr>
+                      <a:r>
+                        <a:t>Past spend predicts future value</a:t>
+                      </a:r>
+                    </a:p>
+                  </a:txBody>
+                  <a:tcPr>
+                    <a:solidFill>
+                      <a:srgbClr val="F2F5F9"/>
+                    </a:solidFill>
+                  </a:tcPr>
+                </a:tc>
+              </a:tr>
+            </a:tbl>
+          </a:graphicData>
+        </a:graphic>
+      </p:graphicFrame>
+      <p:sp>
+        <p:nvSpPr>
+          <p:cNvPr id="5" name="TextBox 4"/>
+          <p:cNvSpPr txBox="1"/>
+          <p:nvPr/>
+        </p:nvSpPr>
+        <p:spPr>
+          <a:xfrm>
+            <a:off x="731520" y="4572000"/>
+            <a:ext cx="10698480" cy="4937760"/>
+          </a:xfrm>
+          <a:prstGeom prst="rect">
+            <a:avLst/>
+          </a:prstGeom>
+          <a:noFill/>
+        </p:spPr>
+        <p:txBody>
+          <a:bodyPr wrap="square">
+            <a:spAutoFit/>
+          </a:bodyPr>
+          <a:lstStyle/>
+          <a:p>
+            <a:pPr>
+              <a:spcAft>
+                <a:spcPts val="1000"/>
+              </a:spcAft>
+              <a:defRPr sz="1600">
+                <a:solidFill>
+                  <a:srgbClr val="1F3864"/>
+                </a:solidFill>
+              </a:defRPr>
+            </a:pPr>
+            <a:r>
+              <a:t>•  All three come straight from the transaction log — no surveys, no extra data collection needed</a:t>
+            </a:r>
+          </a:p>
+        </p:txBody>
+      </p:sp>
+    </p:spTree>
+  </p:cSld>
+  <p:clrMapOvr>
+    <a:masterClrMapping/>
+  </p:clrMapOvr>
+</p:sld>
+</file>
+
+<file path=ppt/slides/slide11.xml><?xml version="1.0" encoding="utf-8"?>
+<p:sld xmlns:a="http://schemas.openxmlformats.org/drawingml/2006/main" xmlns:p="http://schemas.openxmlformats.org/presentationml/2006/main" xmlns:r="http://schemas.openxmlformats.org/officeDocument/2006/relationships">
+  <p:cSld>
+    <p:bg>
+      <p:bgPr>
+        <a:solidFill>
+          <a:srgbClr val="FFFFFF"/>
+        </a:solidFill>
+        <a:effectLst/>
+      </p:bgPr>
+    </p:bg>
+    <p:spTree>
+      <p:nvGrpSpPr>
+        <p:cNvPr id="1" name=""/>
+        <p:cNvGrpSpPr/>
+        <p:nvPr/>
+      </p:nvGrpSpPr>
+      <p:grpSpPr/>
+      <p:sp>
+        <p:nvSpPr>
+          <p:cNvPr id="2" name="Rectangle 1"/>
+          <p:cNvSpPr/>
+          <p:nvPr/>
+        </p:nvSpPr>
+        <p:spPr>
+          <a:xfrm>
+            <a:off x="0" y="0"/>
+            <a:ext cx="12191695" cy="164592"/>
+          </a:xfrm>
+          <a:prstGeom prst="rect">
+            <a:avLst/>
+          </a:prstGeom>
+          <a:solidFill>
+            <a:srgbClr val="2E86AB"/>
+          </a:solidFill>
+          <a:ln>
+            <a:noFill/>
+          </a:ln>
+        </p:spPr>
+        <p:style>
+          <a:lnRef idx="1">
+            <a:schemeClr val="accent1"/>
+          </a:lnRef>
+          <a:fillRef idx="3">
+            <a:schemeClr val="accent1"/>
+          </a:fillRef>
+          <a:effectRef idx="2">
+            <a:schemeClr val="accent1"/>
+          </a:effectRef>
+          <a:fontRef idx="minor">
+            <a:schemeClr val="lt1"/>
+          </a:fontRef>
+        </p:style>
+        <p:txBody>
+          <a:bodyPr rtlCol="0" anchor="ctr"/>
+          <a:lstStyle/>
+          <a:p>
+            <a:pPr algn="ctr"/>
+          </a:p>
+        </p:txBody>
+      </p:sp>
+      <p:sp>
+        <p:nvSpPr>
+          <p:cNvPr id="3" name="TextBox 2"/>
+          <p:cNvSpPr txBox="1"/>
+          <p:nvPr/>
+        </p:nvSpPr>
+        <p:spPr>
+          <a:xfrm>
+            <a:off x="640080" y="411480"/>
+            <a:ext cx="10972800" cy="822960"/>
+          </a:xfrm>
+          <a:prstGeom prst="rect">
+            <a:avLst/>
+          </a:prstGeom>
+          <a:noFill/>
+        </p:spPr>
+        <p:txBody>
+          <a:bodyPr wrap="square">
+            <a:spAutoFit/>
+          </a:bodyPr>
+          <a:lstStyle/>
+          <a:p>
+            <a:pPr>
+              <a:defRPr sz="2800" b="1">
+                <a:solidFill>
+                  <a:srgbClr val="1F3864"/>
+                </a:solidFill>
+              </a:defRPr>
+            </a:pPr>
+            <a:r>
               <a:t>Why does such a simple model survive?</a:t>
             </a:r>
           </a:p>
@@ -4532,7 +5149,7 @@
 </p:sld>
 </file>
 
-<file path=ppt/slides/slide11.xml><?xml version="1.0" encoding="utf-8"?>
+<file path=ppt/slides/slide12.xml><?xml version="1.0" encoding="utf-8"?>
 <p:sld xmlns:a="http://schemas.openxmlformats.org/drawingml/2006/main" xmlns:p="http://schemas.openxmlformats.org/presentationml/2006/main" xmlns:r="http://schemas.openxmlformats.org/officeDocument/2006/relationships">
   <p:cSld>
     <p:bg>
@@ -5678,7 +6295,7 @@
 </p:sld>
 </file>
 
-<file path=ppt/slides/slide12.xml><?xml version="1.0" encoding="utf-8"?>
+<file path=ppt/slides/slide13.xml><?xml version="1.0" encoding="utf-8"?>
 <p:sld xmlns:a="http://schemas.openxmlformats.org/drawingml/2006/main" xmlns:p="http://schemas.openxmlformats.org/presentationml/2006/main" xmlns:r="http://schemas.openxmlformats.org/officeDocument/2006/relationships">
   <p:cSld>
     <p:bg>
@@ -5895,7 +6512,7 @@
 </p:sld>
 </file>
 
-<file path=ppt/slides/slide13.xml><?xml version="1.0" encoding="utf-8"?>
+<file path=ppt/slides/slide14.xml><?xml version="1.0" encoding="utf-8"?>
 <p:sld xmlns:a="http://schemas.openxmlformats.org/drawingml/2006/main" xmlns:p="http://schemas.openxmlformats.org/presentationml/2006/main" xmlns:r="http://schemas.openxmlformats.org/officeDocument/2006/relationships">
   <p:cSld>
     <p:bg>
@@ -6307,7 +6924,7 @@
 </p:sld>
 </file>
 
-<file path=ppt/slides/slide14.xml><?xml version="1.0" encoding="utf-8"?>
+<file path=ppt/slides/slide15.xml><?xml version="1.0" encoding="utf-8"?>
 <p:sld xmlns:a="http://schemas.openxmlformats.org/drawingml/2006/main" xmlns:p="http://schemas.openxmlformats.org/presentationml/2006/main" xmlns:r="http://schemas.openxmlformats.org/officeDocument/2006/relationships">
   <p:cSld>
     <p:bg>
@@ -7078,7 +7695,7 @@
 </p:sld>
 </file>
 
-<file path=ppt/slides/slide15.xml><?xml version="1.0" encoding="utf-8"?>
+<file path=ppt/slides/slide16.xml><?xml version="1.0" encoding="utf-8"?>
 <p:sld xmlns:a="http://schemas.openxmlformats.org/drawingml/2006/main" xmlns:p="http://schemas.openxmlformats.org/presentationml/2006/main" xmlns:r="http://schemas.openxmlformats.org/officeDocument/2006/relationships">
   <p:cSld>
     <p:bg>
@@ -7265,7 +7882,7 @@
 </p:sld>
 </file>
 
-<file path=ppt/slides/slide16.xml><?xml version="1.0" encoding="utf-8"?>
+<file path=ppt/slides/slide17.xml><?xml version="1.0" encoding="utf-8"?>
 <p:sld xmlns:a="http://schemas.openxmlformats.org/drawingml/2006/main" xmlns:p="http://schemas.openxmlformats.org/presentationml/2006/main" xmlns:r="http://schemas.openxmlformats.org/officeDocument/2006/relationships">
   <p:cSld>
     <p:bg>
@@ -7361,7 +7978,7 @@
 </p:sld>
 </file>
 
-<file path=ppt/slides/slide17.xml><?xml version="1.0" encoding="utf-8"?>
+<file path=ppt/slides/slide18.xml><?xml version="1.0" encoding="utf-8"?>
 <p:sld xmlns:a="http://schemas.openxmlformats.org/drawingml/2006/main" xmlns:p="http://schemas.openxmlformats.org/presentationml/2006/main" xmlns:r="http://schemas.openxmlformats.org/officeDocument/2006/relationships">
   <p:cSld>
     <p:bg>
@@ -7593,7 +8210,7 @@
 </p:sld>
 </file>
 
-<file path=ppt/slides/slide18.xml><?xml version="1.0" encoding="utf-8"?>
+<file path=ppt/slides/slide19.xml><?xml version="1.0" encoding="utf-8"?>
 <p:sld xmlns:a="http://schemas.openxmlformats.org/drawingml/2006/main" xmlns:p="http://schemas.openxmlformats.org/presentationml/2006/main" xmlns:r="http://schemas.openxmlformats.org/officeDocument/2006/relationships">
   <p:cSld>
     <p:bg>
@@ -7825,7 +8442,7 @@
 </p:sld>
 </file>
 
-<file path=ppt/slides/slide19.xml><?xml version="1.0" encoding="utf-8"?>
+<file path=ppt/slides/slide2.xml><?xml version="1.0" encoding="utf-8"?>
 <p:sld xmlns:a="http://schemas.openxmlformats.org/drawingml/2006/main" xmlns:p="http://schemas.openxmlformats.org/presentationml/2006/main" xmlns:r="http://schemas.openxmlformats.org/officeDocument/2006/relationships">
   <p:cSld>
     <p:bg>
@@ -7916,6 +8533,253 @@
               </a:defRPr>
             </a:pPr>
             <a:r>
+              <a:t>About your lecturer</a:t>
+            </a:r>
+          </a:p>
+        </p:txBody>
+      </p:sp>
+      <p:sp>
+        <p:nvSpPr>
+          <p:cNvPr id="4" name="TextBox 3"/>
+          <p:cNvSpPr txBox="1"/>
+          <p:nvPr/>
+        </p:nvSpPr>
+        <p:spPr>
+          <a:xfrm>
+            <a:off x="731520" y="1463040"/>
+            <a:ext cx="10698480" cy="4937760"/>
+          </a:xfrm>
+          <a:prstGeom prst="rect">
+            <a:avLst/>
+          </a:prstGeom>
+          <a:noFill/>
+        </p:spPr>
+        <p:txBody>
+          <a:bodyPr wrap="square">
+            <a:spAutoFit/>
+          </a:bodyPr>
+          <a:lstStyle/>
+          <a:p>
+            <a:pPr>
+              <a:spcAft>
+                <a:spcPts val="1000"/>
+              </a:spcAft>
+              <a:defRPr sz="1800">
+                <a:solidFill>
+                  <a:srgbClr val="1F3864"/>
+                </a:solidFill>
+              </a:defRPr>
+            </a:pPr>
+            <a:r>
+              <a:t>•  Software engineer at TikTok — focused on AI development</a:t>
+            </a:r>
+          </a:p>
+          <a:p>
+            <a:pPr lvl="1">
+              <a:spcAft>
+                <a:spcPts val="500"/>
+              </a:spcAft>
+              <a:defRPr sz="1600">
+                <a:solidFill>
+                  <a:srgbClr val="5A5A5A"/>
+                </a:solidFill>
+              </a:defRPr>
+            </a:pPr>
+            <a:r>
+              <a:t>–  7+ years of industry experience</a:t>
+            </a:r>
+          </a:p>
+          <a:p>
+            <a:pPr lvl="1">
+              <a:spcAft>
+                <a:spcPts val="500"/>
+              </a:spcAft>
+              <a:defRPr sz="1600">
+                <a:solidFill>
+                  <a:srgbClr val="5A5A5A"/>
+                </a:solidFill>
+              </a:defRPr>
+            </a:pPr>
+            <a:r>
+              <a:t>–  Building AI agents that clean data, run analyses, and write reports autonomously</a:t>
+            </a:r>
+          </a:p>
+          <a:p>
+            <a:pPr>
+              <a:spcAft>
+                <a:spcPts val="1000"/>
+              </a:spcAft>
+              <a:defRPr sz="1800">
+                <a:solidFill>
+                  <a:srgbClr val="1F3864"/>
+                </a:solidFill>
+              </a:defRPr>
+            </a:pPr>
+            <a:r>
+              <a:t>•  Part-time PhD student at NTU Singapore</a:t>
+            </a:r>
+          </a:p>
+          <a:p>
+            <a:pPr lvl="1">
+              <a:spcAft>
+                <a:spcPts val="500"/>
+              </a:spcAft>
+              <a:defRPr sz="1600">
+                <a:solidFill>
+                  <a:srgbClr val="5A5A5A"/>
+                </a:solidFill>
+              </a:defRPr>
+            </a:pPr>
+            <a:r>
+              <a:t>–  Research interests: LLM-based agents and applied data analytics</a:t>
+            </a:r>
+          </a:p>
+          <a:p>
+            <a:pPr>
+              <a:spcAft>
+                <a:spcPts val="1000"/>
+              </a:spcAft>
+              <a:defRPr sz="1800">
+                <a:solidFill>
+                  <a:srgbClr val="1F3864"/>
+                </a:solidFill>
+              </a:defRPr>
+            </a:pPr>
+            <a:r>
+              <a:t>•  Why this lecture?</a:t>
+            </a:r>
+          </a:p>
+          <a:p>
+            <a:pPr lvl="1">
+              <a:spcAft>
+                <a:spcPts val="500"/>
+              </a:spcAft>
+              <a:defRPr sz="1600">
+                <a:solidFill>
+                  <a:srgbClr val="5A5A5A"/>
+                </a:solidFill>
+              </a:defRPr>
+            </a:pPr>
+            <a:r>
+              <a:t>–  RFM is the single most-used segmentation method in retail CRM</a:t>
+            </a:r>
+          </a:p>
+          <a:p>
+            <a:pPr lvl="1">
+              <a:spcAft>
+                <a:spcPts val="500"/>
+              </a:spcAft>
+              <a:defRPr sz="1600">
+                <a:solidFill>
+                  <a:srgbClr val="5A5A5A"/>
+                </a:solidFill>
+              </a:defRPr>
+            </a:pPr>
+            <a:r>
+              <a:t>–  It is also a perfect first 'AI agent' project — you can build everything you see today yourselves</a:t>
+            </a:r>
+          </a:p>
+        </p:txBody>
+      </p:sp>
+    </p:spTree>
+  </p:cSld>
+  <p:clrMapOvr>
+    <a:masterClrMapping/>
+  </p:clrMapOvr>
+</p:sld>
+</file>
+
+<file path=ppt/slides/slide20.xml><?xml version="1.0" encoding="utf-8"?>
+<p:sld xmlns:a="http://schemas.openxmlformats.org/drawingml/2006/main" xmlns:p="http://schemas.openxmlformats.org/presentationml/2006/main" xmlns:r="http://schemas.openxmlformats.org/officeDocument/2006/relationships">
+  <p:cSld>
+    <p:bg>
+      <p:bgPr>
+        <a:solidFill>
+          <a:srgbClr val="FFFFFF"/>
+        </a:solidFill>
+        <a:effectLst/>
+      </p:bgPr>
+    </p:bg>
+    <p:spTree>
+      <p:nvGrpSpPr>
+        <p:cNvPr id="1" name=""/>
+        <p:cNvGrpSpPr/>
+        <p:nvPr/>
+      </p:nvGrpSpPr>
+      <p:grpSpPr/>
+      <p:sp>
+        <p:nvSpPr>
+          <p:cNvPr id="2" name="Rectangle 1"/>
+          <p:cNvSpPr/>
+          <p:nvPr/>
+        </p:nvSpPr>
+        <p:spPr>
+          <a:xfrm>
+            <a:off x="0" y="0"/>
+            <a:ext cx="12191695" cy="164592"/>
+          </a:xfrm>
+          <a:prstGeom prst="rect">
+            <a:avLst/>
+          </a:prstGeom>
+          <a:solidFill>
+            <a:srgbClr val="2E86AB"/>
+          </a:solidFill>
+          <a:ln>
+            <a:noFill/>
+          </a:ln>
+        </p:spPr>
+        <p:style>
+          <a:lnRef idx="1">
+            <a:schemeClr val="accent1"/>
+          </a:lnRef>
+          <a:fillRef idx="3">
+            <a:schemeClr val="accent1"/>
+          </a:fillRef>
+          <a:effectRef idx="2">
+            <a:schemeClr val="accent1"/>
+          </a:effectRef>
+          <a:fontRef idx="minor">
+            <a:schemeClr val="lt1"/>
+          </a:fontRef>
+        </p:style>
+        <p:txBody>
+          <a:bodyPr rtlCol="0" anchor="ctr"/>
+          <a:lstStyle/>
+          <a:p>
+            <a:pPr algn="ctr"/>
+          </a:p>
+        </p:txBody>
+      </p:sp>
+      <p:sp>
+        <p:nvSpPr>
+          <p:cNvPr id="3" name="TextBox 2"/>
+          <p:cNvSpPr txBox="1"/>
+          <p:nvPr/>
+        </p:nvSpPr>
+        <p:spPr>
+          <a:xfrm>
+            <a:off x="640080" y="411480"/>
+            <a:ext cx="10972800" cy="822960"/>
+          </a:xfrm>
+          <a:prstGeom prst="rect">
+            <a:avLst/>
+          </a:prstGeom>
+          <a:noFill/>
+        </p:spPr>
+        <p:txBody>
+          <a:bodyPr wrap="square">
+            <a:spAutoFit/>
+          </a:bodyPr>
+          <a:lstStyle/>
+          <a:p>
+            <a:pPr>
+              <a:defRPr sz="2800" b="1">
+                <a:solidFill>
+                  <a:srgbClr val="1F3864"/>
+                </a:solidFill>
+              </a:defRPr>
+            </a:pPr>
+            <a:r>
               <a:t>Our agent: a 5-step pipeline</a:t>
             </a:r>
           </a:p>
@@ -8494,7 +9358,7 @@
 </p:sld>
 </file>
 
-<file path=ppt/slides/slide2.xml><?xml version="1.0" encoding="utf-8"?>
+<file path=ppt/slides/slide21.xml><?xml version="1.0" encoding="utf-8"?>
 <p:sld xmlns:a="http://schemas.openxmlformats.org/drawingml/2006/main" xmlns:p="http://schemas.openxmlformats.org/presentationml/2006/main" xmlns:r="http://schemas.openxmlformats.org/officeDocument/2006/relationships">
   <p:cSld>
     <p:bg>
@@ -8585,7 +9449,7 @@
               </a:defRPr>
             </a:pPr>
             <a:r>
-              <a:t>About your lecturer</a:t>
+              <a:t>Step 2 — automated data cleaning</a:t>
             </a:r>
           </a:p>
         </p:txBody>
@@ -8616,14 +9480,14 @@
               <a:spcAft>
                 <a:spcPts val="1000"/>
               </a:spcAft>
-              <a:defRPr sz="1800">
+              <a:defRPr sz="1700">
                 <a:solidFill>
                   <a:srgbClr val="1F3864"/>
                 </a:solidFill>
               </a:defRPr>
             </a:pPr>
             <a:r>
-              <a:t>•  Software engineer at TikTok — building AI agents for data analytics</a:t>
+              <a:t>•  Real transaction data is dirty. Our sample dataset (on purpose):</a:t>
             </a:r>
           </a:p>
           <a:p>
@@ -8631,14 +9495,29 @@
               <a:spcAft>
                 <a:spcPts val="500"/>
               </a:spcAft>
-              <a:defRPr sz="1600">
+              <a:defRPr sz="1500">
                 <a:solidFill>
                   <a:srgbClr val="5A5A5A"/>
                 </a:solidFill>
               </a:defRPr>
             </a:pPr>
             <a:r>
-              <a:t>–  Agents that clean data, run analyses, and write reports autonomously</a:t>
+              <a:t>–  duplicate rows · missing customer ids · 'not-a-date' values</a:t>
+            </a:r>
+          </a:p>
+          <a:p>
+            <a:pPr lvl="1">
+              <a:spcAft>
+                <a:spcPts val="500"/>
+              </a:spcAft>
+              <a:defRPr sz="1500">
+                <a:solidFill>
+                  <a:srgbClr val="5A5A5A"/>
+                </a:solidFill>
+              </a:defRPr>
+            </a:pPr>
+            <a:r>
+              <a:t>–  amounts like “$1,234.56” · refunds (negative) · $99,000 fat-fingers</a:t>
             </a:r>
           </a:p>
           <a:p>
@@ -8646,14 +9525,14 @@
               <a:spcAft>
                 <a:spcPts val="1000"/>
               </a:spcAft>
-              <a:defRPr sz="1800">
+              <a:defRPr sz="1700">
                 <a:solidFill>
                   <a:srgbClr val="1F3864"/>
                 </a:solidFill>
               </a:defRPr>
             </a:pPr>
             <a:r>
-              <a:t>•  PhD student at NTU Singapore</a:t>
+              <a:t>•  The cleaning agent applies ordered rules and logs each action:</a:t>
             </a:r>
           </a:p>
           <a:p>
@@ -8661,14 +9540,29 @@
               <a:spcAft>
                 <a:spcPts val="500"/>
               </a:spcAft>
-              <a:defRPr sz="1600">
+              <a:defRPr sz="1500">
                 <a:solidFill>
                   <a:srgbClr val="5A5A5A"/>
                 </a:solidFill>
               </a:defRPr>
             </a:pPr>
             <a:r>
-              <a:t>–  Research interests: LLM-based agents and applied data analytics</a:t>
+              <a:t>–  “Removed 55 exact duplicate rows”</a:t>
+            </a:r>
+          </a:p>
+          <a:p>
+            <a:pPr lvl="1">
+              <a:spcAft>
+                <a:spcPts val="500"/>
+              </a:spcAft>
+              <a:defRPr sz="1500">
+                <a:solidFill>
+                  <a:srgbClr val="5A5A5A"/>
+                </a:solidFill>
+              </a:defRPr>
+            </a:pPr>
+            <a:r>
+              <a:t>–  “Winsorised 27 extreme amounts above the 99.5th percentile”</a:t>
             </a:r>
           </a:p>
           <a:p>
@@ -8676,44 +9570,14 @@
               <a:spcAft>
                 <a:spcPts val="1000"/>
               </a:spcAft>
-              <a:defRPr sz="1800">
+              <a:defRPr sz="1700">
                 <a:solidFill>
                   <a:srgbClr val="1F3864"/>
                 </a:solidFill>
               </a:defRPr>
             </a:pPr>
             <a:r>
-              <a:t>•  Why this lecture?</a:t>
-            </a:r>
-          </a:p>
-          <a:p>
-            <a:pPr lvl="1">
-              <a:spcAft>
-                <a:spcPts val="500"/>
-              </a:spcAft>
-              <a:defRPr sz="1600">
-                <a:solidFill>
-                  <a:srgbClr val="5A5A5A"/>
-                </a:solidFill>
-              </a:defRPr>
-            </a:pPr>
-            <a:r>
-              <a:t>–  RFM is the single most-used segmentation method in retail CRM</a:t>
-            </a:r>
-          </a:p>
-          <a:p>
-            <a:pPr lvl="1">
-              <a:spcAft>
-                <a:spcPts val="500"/>
-              </a:spcAft>
-              <a:defRPr sz="1600">
-                <a:solidFill>
-                  <a:srgbClr val="5A5A5A"/>
-                </a:solidFill>
-              </a:defRPr>
-            </a:pPr>
-            <a:r>
-              <a:t>–  It is also a perfect first 'AI agent' project — you can build everything you see today yourselves</a:t>
+              <a:t>•  Why log? Trust. A black-box cleaner is a liability in business analytics</a:t>
             </a:r>
           </a:p>
         </p:txBody>
@@ -8726,7 +9590,7 @@
 </p:sld>
 </file>
 
-<file path=ppt/slides/slide20.xml><?xml version="1.0" encoding="utf-8"?>
+<file path=ppt/slides/slide22.xml><?xml version="1.0" encoding="utf-8"?>
 <p:sld xmlns:a="http://schemas.openxmlformats.org/drawingml/2006/main" xmlns:p="http://schemas.openxmlformats.org/presentationml/2006/main" xmlns:r="http://schemas.openxmlformats.org/officeDocument/2006/relationships">
   <p:cSld>
     <p:bg>
@@ -8817,7 +9681,7 @@
               </a:defRPr>
             </a:pPr>
             <a:r>
-              <a:t>Step 2 — automated data cleaning</a:t>
+              <a:t>Step 3 — the RFM engine (the code is short!)</a:t>
             </a:r>
           </a:p>
         </p:txBody>
@@ -8848,14 +9712,14 @@
               <a:spcAft>
                 <a:spcPts val="1000"/>
               </a:spcAft>
-              <a:defRPr sz="1700">
+              <a:defRPr sz="1800">
                 <a:solidFill>
                   <a:srgbClr val="1F3864"/>
                 </a:solidFill>
               </a:defRPr>
             </a:pPr>
             <a:r>
-              <a:t>•  Real transaction data is dirty. Our sample dataset (on purpose):</a:t>
+              <a:t>•  Three aggregations + two functions:</a:t>
             </a:r>
           </a:p>
           <a:p>
@@ -8863,14 +9727,14 @@
               <a:spcAft>
                 <a:spcPts val="500"/>
               </a:spcAft>
-              <a:defRPr sz="1500">
+              <a:defRPr sz="1600">
                 <a:solidFill>
                   <a:srgbClr val="5A5A5A"/>
                 </a:solidFill>
               </a:defRPr>
             </a:pPr>
             <a:r>
-              <a:t>–  duplicate rows · missing customer ids · 'not-a-date' values</a:t>
+              <a:t>–  rfm = df.groupby('customer_id').agg(recency, frequency, monetary)</a:t>
             </a:r>
           </a:p>
           <a:p>
@@ -8878,14 +9742,29 @@
               <a:spcAft>
                 <a:spcPts val="500"/>
               </a:spcAft>
-              <a:defRPr sz="1500">
+              <a:defRPr sz="1600">
                 <a:solidFill>
                   <a:srgbClr val="5A5A5A"/>
                 </a:solidFill>
               </a:defRPr>
             </a:pPr>
             <a:r>
-              <a:t>–  amounts like “$1,234.56” · refunds (negative) · $99,000 fat-fingers</a:t>
+              <a:t>–  score 1–5 by quintile:  pd.qcut(series, q=5)</a:t>
+            </a:r>
+          </a:p>
+          <a:p>
+            <a:pPr lvl="1">
+              <a:spcAft>
+                <a:spcPts val="500"/>
+              </a:spcAft>
+              <a:defRPr sz="1600">
+                <a:solidFill>
+                  <a:srgbClr val="5A5A5A"/>
+                </a:solidFill>
+              </a:defRPr>
+            </a:pPr>
+            <a:r>
+              <a:t>–  segment = compare R/F/M scores to their means</a:t>
             </a:r>
           </a:p>
           <a:p>
@@ -8893,44 +9772,14 @@
               <a:spcAft>
                 <a:spcPts val="1000"/>
               </a:spcAft>
-              <a:defRPr sz="1700">
+              <a:defRPr sz="1800">
                 <a:solidFill>
                   <a:srgbClr val="1F3864"/>
                 </a:solidFill>
               </a:defRPr>
             </a:pPr>
             <a:r>
-              <a:t>•  The cleaning agent applies ordered rules and logs each action:</a:t>
-            </a:r>
-          </a:p>
-          <a:p>
-            <a:pPr lvl="1">
-              <a:spcAft>
-                <a:spcPts val="500"/>
-              </a:spcAft>
-              <a:defRPr sz="1500">
-                <a:solidFill>
-                  <a:srgbClr val="5A5A5A"/>
-                </a:solidFill>
-              </a:defRPr>
-            </a:pPr>
-            <a:r>
-              <a:t>–  “Removed 55 exact duplicate rows”</a:t>
-            </a:r>
-          </a:p>
-          <a:p>
-            <a:pPr lvl="1">
-              <a:spcAft>
-                <a:spcPts val="500"/>
-              </a:spcAft>
-              <a:defRPr sz="1500">
-                <a:solidFill>
-                  <a:srgbClr val="5A5A5A"/>
-                </a:solidFill>
-              </a:defRPr>
-            </a:pPr>
-            <a:r>
-              <a:t>–  “Winsorised 27 extreme amounts above the 99.5th percentile”</a:t>
+              <a:t>•  ~60 lines of pandas — the analytics core is the EASY part</a:t>
             </a:r>
           </a:p>
           <a:p>
@@ -8938,14 +9787,14 @@
               <a:spcAft>
                 <a:spcPts val="1000"/>
               </a:spcAft>
-              <a:defRPr sz="1700">
+              <a:defRPr sz="1800">
                 <a:solidFill>
                   <a:srgbClr val="1F3864"/>
                 </a:solidFill>
               </a:defRPr>
             </a:pPr>
             <a:r>
-              <a:t>•  Why log? Trust. A black-box cleaner is a liability in business analytics</a:t>
+              <a:t>•  The value of the agent is everything around it: validation, cleaning, logging, narrative, repeatability</a:t>
             </a:r>
           </a:p>
         </p:txBody>
@@ -8958,224 +9807,7 @@
 </p:sld>
 </file>
 
-<file path=ppt/slides/slide21.xml><?xml version="1.0" encoding="utf-8"?>
-<p:sld xmlns:a="http://schemas.openxmlformats.org/drawingml/2006/main" xmlns:p="http://schemas.openxmlformats.org/presentationml/2006/main" xmlns:r="http://schemas.openxmlformats.org/officeDocument/2006/relationships">
-  <p:cSld>
-    <p:bg>
-      <p:bgPr>
-        <a:solidFill>
-          <a:srgbClr val="FFFFFF"/>
-        </a:solidFill>
-        <a:effectLst/>
-      </p:bgPr>
-    </p:bg>
-    <p:spTree>
-      <p:nvGrpSpPr>
-        <p:cNvPr id="1" name=""/>
-        <p:cNvGrpSpPr/>
-        <p:nvPr/>
-      </p:nvGrpSpPr>
-      <p:grpSpPr/>
-      <p:sp>
-        <p:nvSpPr>
-          <p:cNvPr id="2" name="Rectangle 1"/>
-          <p:cNvSpPr/>
-          <p:nvPr/>
-        </p:nvSpPr>
-        <p:spPr>
-          <a:xfrm>
-            <a:off x="0" y="0"/>
-            <a:ext cx="12191695" cy="164592"/>
-          </a:xfrm>
-          <a:prstGeom prst="rect">
-            <a:avLst/>
-          </a:prstGeom>
-          <a:solidFill>
-            <a:srgbClr val="2E86AB"/>
-          </a:solidFill>
-          <a:ln>
-            <a:noFill/>
-          </a:ln>
-        </p:spPr>
-        <p:style>
-          <a:lnRef idx="1">
-            <a:schemeClr val="accent1"/>
-          </a:lnRef>
-          <a:fillRef idx="3">
-            <a:schemeClr val="accent1"/>
-          </a:fillRef>
-          <a:effectRef idx="2">
-            <a:schemeClr val="accent1"/>
-          </a:effectRef>
-          <a:fontRef idx="minor">
-            <a:schemeClr val="lt1"/>
-          </a:fontRef>
-        </p:style>
-        <p:txBody>
-          <a:bodyPr rtlCol="0" anchor="ctr"/>
-          <a:lstStyle/>
-          <a:p>
-            <a:pPr algn="ctr"/>
-          </a:p>
-        </p:txBody>
-      </p:sp>
-      <p:sp>
-        <p:nvSpPr>
-          <p:cNvPr id="3" name="TextBox 2"/>
-          <p:cNvSpPr txBox="1"/>
-          <p:nvPr/>
-        </p:nvSpPr>
-        <p:spPr>
-          <a:xfrm>
-            <a:off x="640080" y="411480"/>
-            <a:ext cx="10972800" cy="822960"/>
-          </a:xfrm>
-          <a:prstGeom prst="rect">
-            <a:avLst/>
-          </a:prstGeom>
-          <a:noFill/>
-        </p:spPr>
-        <p:txBody>
-          <a:bodyPr wrap="square">
-            <a:spAutoFit/>
-          </a:bodyPr>
-          <a:lstStyle/>
-          <a:p>
-            <a:pPr>
-              <a:defRPr sz="2800" b="1">
-                <a:solidFill>
-                  <a:srgbClr val="1F3864"/>
-                </a:solidFill>
-              </a:defRPr>
-            </a:pPr>
-            <a:r>
-              <a:t>Step 3 — the RFM engine (the code is short!)</a:t>
-            </a:r>
-          </a:p>
-        </p:txBody>
-      </p:sp>
-      <p:sp>
-        <p:nvSpPr>
-          <p:cNvPr id="4" name="TextBox 3"/>
-          <p:cNvSpPr txBox="1"/>
-          <p:nvPr/>
-        </p:nvSpPr>
-        <p:spPr>
-          <a:xfrm>
-            <a:off x="731520" y="1463040"/>
-            <a:ext cx="10698480" cy="4937760"/>
-          </a:xfrm>
-          <a:prstGeom prst="rect">
-            <a:avLst/>
-          </a:prstGeom>
-          <a:noFill/>
-        </p:spPr>
-        <p:txBody>
-          <a:bodyPr wrap="square">
-            <a:spAutoFit/>
-          </a:bodyPr>
-          <a:lstStyle/>
-          <a:p>
-            <a:pPr>
-              <a:spcAft>
-                <a:spcPts val="1000"/>
-              </a:spcAft>
-              <a:defRPr sz="1800">
-                <a:solidFill>
-                  <a:srgbClr val="1F3864"/>
-                </a:solidFill>
-              </a:defRPr>
-            </a:pPr>
-            <a:r>
-              <a:t>•  Three aggregations + two functions:</a:t>
-            </a:r>
-          </a:p>
-          <a:p>
-            <a:pPr lvl="1">
-              <a:spcAft>
-                <a:spcPts val="500"/>
-              </a:spcAft>
-              <a:defRPr sz="1600">
-                <a:solidFill>
-                  <a:srgbClr val="5A5A5A"/>
-                </a:solidFill>
-              </a:defRPr>
-            </a:pPr>
-            <a:r>
-              <a:t>–  rfm = df.groupby('customer_id').agg(recency, frequency, monetary)</a:t>
-            </a:r>
-          </a:p>
-          <a:p>
-            <a:pPr lvl="1">
-              <a:spcAft>
-                <a:spcPts val="500"/>
-              </a:spcAft>
-              <a:defRPr sz="1600">
-                <a:solidFill>
-                  <a:srgbClr val="5A5A5A"/>
-                </a:solidFill>
-              </a:defRPr>
-            </a:pPr>
-            <a:r>
-              <a:t>–  score 1–5 by quintile:  pd.qcut(series, q=5)</a:t>
-            </a:r>
-          </a:p>
-          <a:p>
-            <a:pPr lvl="1">
-              <a:spcAft>
-                <a:spcPts val="500"/>
-              </a:spcAft>
-              <a:defRPr sz="1600">
-                <a:solidFill>
-                  <a:srgbClr val="5A5A5A"/>
-                </a:solidFill>
-              </a:defRPr>
-            </a:pPr>
-            <a:r>
-              <a:t>–  segment = compare R/F/M scores to their means</a:t>
-            </a:r>
-          </a:p>
-          <a:p>
-            <a:pPr>
-              <a:spcAft>
-                <a:spcPts val="1000"/>
-              </a:spcAft>
-              <a:defRPr sz="1800">
-                <a:solidFill>
-                  <a:srgbClr val="1F3864"/>
-                </a:solidFill>
-              </a:defRPr>
-            </a:pPr>
-            <a:r>
-              <a:t>•  ~60 lines of pandas — the analytics core is the EASY part</a:t>
-            </a:r>
-          </a:p>
-          <a:p>
-            <a:pPr>
-              <a:spcAft>
-                <a:spcPts val="1000"/>
-              </a:spcAft>
-              <a:defRPr sz="1800">
-                <a:solidFill>
-                  <a:srgbClr val="1F3864"/>
-                </a:solidFill>
-              </a:defRPr>
-            </a:pPr>
-            <a:r>
-              <a:t>•  The value of the agent is everything around it: validation, cleaning, logging, narrative, repeatability</a:t>
-            </a:r>
-          </a:p>
-        </p:txBody>
-      </p:sp>
-    </p:spTree>
-  </p:cSld>
-  <p:clrMapOvr>
-    <a:masterClrMapping/>
-  </p:clrMapOvr>
-</p:sld>
-</file>
-
-<file path=ppt/slides/slide22.xml><?xml version="1.0" encoding="utf-8"?>
+<file path=ppt/slides/slide23.xml><?xml version="1.0" encoding="utf-8"?>
 <p:sld xmlns:a="http://schemas.openxmlformats.org/drawingml/2006/main" xmlns:p="http://schemas.openxmlformats.org/presentationml/2006/main" xmlns:r="http://schemas.openxmlformats.org/officeDocument/2006/relationships">
   <p:cSld>
     <p:bg>
@@ -9767,7 +10399,7 @@
 </p:sld>
 </file>
 
-<file path=ppt/slides/slide23.xml><?xml version="1.0" encoding="utf-8"?>
+<file path=ppt/slides/slide24.xml><?xml version="1.0" encoding="utf-8"?>
 <p:sld xmlns:a="http://schemas.openxmlformats.org/drawingml/2006/main" xmlns:p="http://schemas.openxmlformats.org/presentationml/2006/main" xmlns:r="http://schemas.openxmlformats.org/officeDocument/2006/relationships">
   <p:cSld>
     <p:bg>
@@ -10043,102 +10675,6 @@
 </p:sld>
 </file>
 
-<file path=ppt/slides/slide24.xml><?xml version="1.0" encoding="utf-8"?>
-<p:sld xmlns:a="http://schemas.openxmlformats.org/drawingml/2006/main" xmlns:p="http://schemas.openxmlformats.org/presentationml/2006/main" xmlns:r="http://schemas.openxmlformats.org/officeDocument/2006/relationships">
-  <p:cSld>
-    <p:bg>
-      <p:bgPr>
-        <a:solidFill>
-          <a:srgbClr val="2E86AB"/>
-        </a:solidFill>
-        <a:effectLst/>
-      </p:bgPr>
-    </p:bg>
-    <p:spTree>
-      <p:nvGrpSpPr>
-        <p:cNvPr id="1" name=""/>
-        <p:cNvGrpSpPr/>
-        <p:nvPr/>
-      </p:nvGrpSpPr>
-      <p:grpSpPr/>
-      <p:sp>
-        <p:nvSpPr>
-          <p:cNvPr id="2" name="TextBox 1"/>
-          <p:cNvSpPr txBox="1"/>
-          <p:nvPr/>
-        </p:nvSpPr>
-        <p:spPr>
-          <a:xfrm>
-            <a:off x="822960" y="2011680"/>
-            <a:ext cx="10515600" cy="640080"/>
-          </a:xfrm>
-          <a:prstGeom prst="rect">
-            <a:avLst/>
-          </a:prstGeom>
-          <a:noFill/>
-        </p:spPr>
-        <p:txBody>
-          <a:bodyPr wrap="square">
-            <a:spAutoFit/>
-          </a:bodyPr>
-          <a:lstStyle/>
-          <a:p>
-            <a:pPr>
-              <a:defRPr sz="1800">
-                <a:solidFill>
-                  <a:srgbClr val="D9ECF4"/>
-                </a:solidFill>
-              </a:defRPr>
-            </a:pPr>
-            <a:r>
-              <a:t>☕ Break   ·   ~10 min</a:t>
-            </a:r>
-          </a:p>
-        </p:txBody>
-      </p:sp>
-      <p:sp>
-        <p:nvSpPr>
-          <p:cNvPr id="3" name="TextBox 2"/>
-          <p:cNvSpPr txBox="1"/>
-          <p:nvPr/>
-        </p:nvSpPr>
-        <p:spPr>
-          <a:xfrm>
-            <a:off x="822960" y="2743200"/>
-            <a:ext cx="10515600" cy="1828800"/>
-          </a:xfrm>
-          <a:prstGeom prst="rect">
-            <a:avLst/>
-          </a:prstGeom>
-          <a:noFill/>
-        </p:spPr>
-        <p:txBody>
-          <a:bodyPr wrap="square">
-            <a:spAutoFit/>
-          </a:bodyPr>
-          <a:lstStyle/>
-          <a:p>
-            <a:pPr>
-              <a:defRPr sz="3800" b="1">
-                <a:solidFill>
-                  <a:srgbClr val="FFFFFF"/>
-                </a:solidFill>
-              </a:defRPr>
-            </a:pPr>
-            <a:r>
-              <a:t>Back in 10 minutes</a:t>
-            </a:r>
-          </a:p>
-        </p:txBody>
-      </p:sp>
-    </p:spTree>
-  </p:cSld>
-  <p:clrMapOvr>
-    <a:masterClrMapping/>
-  </p:clrMapOvr>
-</p:sld>
-</file>
-
 <file path=ppt/slides/slide25.xml><?xml version="1.0" encoding="utf-8"?>
 <p:sld xmlns:a="http://schemas.openxmlformats.org/drawingml/2006/main" xmlns:p="http://schemas.openxmlformats.org/presentationml/2006/main" xmlns:r="http://schemas.openxmlformats.org/officeDocument/2006/relationships">
   <p:cSld>
@@ -10187,7 +10723,7 @@
               </a:defRPr>
             </a:pPr>
             <a:r>
-              <a:t>Part 4   ·   ~25 min</a:t>
+              <a:t>☕ Break   ·   ~10 min</a:t>
             </a:r>
           </a:p>
         </p:txBody>
@@ -10222,11 +10758,7 @@
               </a:defRPr>
             </a:pPr>
             <a:r>
-              <a:t>Live demo:</a:t>
-            </a:r>
-            <a:br/>
-            <a:r>
-              <a:t>the RFM agent end-to-end</a:t>
+              <a:t>Back in 10 minutes</a:t>
             </a:r>
           </a:p>
         </p:txBody>
@@ -10240,6 +10772,106 @@
 </file>
 
 <file path=ppt/slides/slide26.xml><?xml version="1.0" encoding="utf-8"?>
+<p:sld xmlns:a="http://schemas.openxmlformats.org/drawingml/2006/main" xmlns:p="http://schemas.openxmlformats.org/presentationml/2006/main" xmlns:r="http://schemas.openxmlformats.org/officeDocument/2006/relationships">
+  <p:cSld>
+    <p:bg>
+      <p:bgPr>
+        <a:solidFill>
+          <a:srgbClr val="2E86AB"/>
+        </a:solidFill>
+        <a:effectLst/>
+      </p:bgPr>
+    </p:bg>
+    <p:spTree>
+      <p:nvGrpSpPr>
+        <p:cNvPr id="1" name=""/>
+        <p:cNvGrpSpPr/>
+        <p:nvPr/>
+      </p:nvGrpSpPr>
+      <p:grpSpPr/>
+      <p:sp>
+        <p:nvSpPr>
+          <p:cNvPr id="2" name="TextBox 1"/>
+          <p:cNvSpPr txBox="1"/>
+          <p:nvPr/>
+        </p:nvSpPr>
+        <p:spPr>
+          <a:xfrm>
+            <a:off x="822960" y="2011680"/>
+            <a:ext cx="10515600" cy="640080"/>
+          </a:xfrm>
+          <a:prstGeom prst="rect">
+            <a:avLst/>
+          </a:prstGeom>
+          <a:noFill/>
+        </p:spPr>
+        <p:txBody>
+          <a:bodyPr wrap="square">
+            <a:spAutoFit/>
+          </a:bodyPr>
+          <a:lstStyle/>
+          <a:p>
+            <a:pPr>
+              <a:defRPr sz="1800">
+                <a:solidFill>
+                  <a:srgbClr val="D9ECF4"/>
+                </a:solidFill>
+              </a:defRPr>
+            </a:pPr>
+            <a:r>
+              <a:t>Part 4   ·   ~25 min</a:t>
+            </a:r>
+          </a:p>
+        </p:txBody>
+      </p:sp>
+      <p:sp>
+        <p:nvSpPr>
+          <p:cNvPr id="3" name="TextBox 2"/>
+          <p:cNvSpPr txBox="1"/>
+          <p:nvPr/>
+        </p:nvSpPr>
+        <p:spPr>
+          <a:xfrm>
+            <a:off x="822960" y="2743200"/>
+            <a:ext cx="10515600" cy="1828800"/>
+          </a:xfrm>
+          <a:prstGeom prst="rect">
+            <a:avLst/>
+          </a:prstGeom>
+          <a:noFill/>
+        </p:spPr>
+        <p:txBody>
+          <a:bodyPr wrap="square">
+            <a:spAutoFit/>
+          </a:bodyPr>
+          <a:lstStyle/>
+          <a:p>
+            <a:pPr>
+              <a:defRPr sz="3800" b="1">
+                <a:solidFill>
+                  <a:srgbClr val="FFFFFF"/>
+                </a:solidFill>
+              </a:defRPr>
+            </a:pPr>
+            <a:r>
+              <a:t>Live demo:</a:t>
+            </a:r>
+            <a:br/>
+            <a:r>
+              <a:t>the RFM agent end-to-end</a:t>
+            </a:r>
+          </a:p>
+        </p:txBody>
+      </p:sp>
+    </p:spTree>
+  </p:cSld>
+  <p:clrMapOvr>
+    <a:masterClrMapping/>
+  </p:clrMapOvr>
+</p:sld>
+</file>
+
+<file path=ppt/slides/slide27.xml><?xml version="1.0" encoding="utf-8"?>
 <p:sld xmlns:a="http://schemas.openxmlformats.org/drawingml/2006/main" xmlns:p="http://schemas.openxmlformats.org/presentationml/2006/main" xmlns:r="http://schemas.openxmlformats.org/officeDocument/2006/relationships">
   <p:cSld>
     <p:bg>
@@ -10456,7 +11088,7 @@
 </p:sld>
 </file>
 
-<file path=ppt/slides/slide27.xml><?xml version="1.0" encoding="utf-8"?>
+<file path=ppt/slides/slide28.xml><?xml version="1.0" encoding="utf-8"?>
 <p:sld xmlns:a="http://schemas.openxmlformats.org/drawingml/2006/main" xmlns:p="http://schemas.openxmlformats.org/presentationml/2006/main" xmlns:r="http://schemas.openxmlformats.org/officeDocument/2006/relationships">
   <p:cSld>
     <p:bg>
@@ -11187,7 +11819,7 @@
 </p:sld>
 </file>
 
-<file path=ppt/slides/slide28.xml><?xml version="1.0" encoding="utf-8"?>
+<file path=ppt/slides/slide29.xml><?xml version="1.0" encoding="utf-8"?>
 <p:sld xmlns:a="http://schemas.openxmlformats.org/drawingml/2006/main" xmlns:p="http://schemas.openxmlformats.org/presentationml/2006/main" xmlns:r="http://schemas.openxmlformats.org/officeDocument/2006/relationships">
   <p:cSld>
     <p:bg>
@@ -11943,7 +12575,269 @@
 </p:sld>
 </file>
 
-<file path=ppt/slides/slide29.xml><?xml version="1.0" encoding="utf-8"?>
+<file path=ppt/slides/slide3.xml><?xml version="1.0" encoding="utf-8"?>
+<p:sld xmlns:a="http://schemas.openxmlformats.org/drawingml/2006/main" xmlns:p="http://schemas.openxmlformats.org/presentationml/2006/main" xmlns:r="http://schemas.openxmlformats.org/officeDocument/2006/relationships">
+  <p:cSld>
+    <p:bg>
+      <p:bgPr>
+        <a:solidFill>
+          <a:srgbClr val="FFFFFF"/>
+        </a:solidFill>
+        <a:effectLst/>
+      </p:bgPr>
+    </p:bg>
+    <p:spTree>
+      <p:nvGrpSpPr>
+        <p:cNvPr id="1" name=""/>
+        <p:cNvGrpSpPr/>
+        <p:nvPr/>
+      </p:nvGrpSpPr>
+      <p:grpSpPr/>
+      <p:sp>
+        <p:nvSpPr>
+          <p:cNvPr id="2" name="Rectangle 1"/>
+          <p:cNvSpPr/>
+          <p:nvPr/>
+        </p:nvSpPr>
+        <p:spPr>
+          <a:xfrm>
+            <a:off x="0" y="0"/>
+            <a:ext cx="12191695" cy="164592"/>
+          </a:xfrm>
+          <a:prstGeom prst="rect">
+            <a:avLst/>
+          </a:prstGeom>
+          <a:solidFill>
+            <a:srgbClr val="2E86AB"/>
+          </a:solidFill>
+          <a:ln>
+            <a:noFill/>
+          </a:ln>
+        </p:spPr>
+        <p:style>
+          <a:lnRef idx="1">
+            <a:schemeClr val="accent1"/>
+          </a:lnRef>
+          <a:fillRef idx="3">
+            <a:schemeClr val="accent1"/>
+          </a:fillRef>
+          <a:effectRef idx="2">
+            <a:schemeClr val="accent1"/>
+          </a:effectRef>
+          <a:fontRef idx="minor">
+            <a:schemeClr val="lt1"/>
+          </a:fontRef>
+        </p:style>
+        <p:txBody>
+          <a:bodyPr rtlCol="0" anchor="ctr"/>
+          <a:lstStyle/>
+          <a:p>
+            <a:pPr algn="ctr"/>
+          </a:p>
+        </p:txBody>
+      </p:sp>
+      <p:sp>
+        <p:nvSpPr>
+          <p:cNvPr id="3" name="TextBox 2"/>
+          <p:cNvSpPr txBox="1"/>
+          <p:nvPr/>
+        </p:nvSpPr>
+        <p:spPr>
+          <a:xfrm>
+            <a:off x="640080" y="411480"/>
+            <a:ext cx="10972800" cy="822960"/>
+          </a:xfrm>
+          <a:prstGeom prst="rect">
+            <a:avLst/>
+          </a:prstGeom>
+          <a:noFill/>
+        </p:spPr>
+        <p:txBody>
+          <a:bodyPr wrap="square">
+            <a:spAutoFit/>
+          </a:bodyPr>
+          <a:lstStyle/>
+          <a:p>
+            <a:pPr>
+              <a:defRPr sz="2800" b="1">
+                <a:solidFill>
+                  <a:srgbClr val="1F3864"/>
+                </a:solidFill>
+              </a:defRPr>
+            </a:pPr>
+            <a:r>
+              <a:t>Background — why this lecture? A real industry scenario</a:t>
+            </a:r>
+          </a:p>
+        </p:txBody>
+      </p:sp>
+      <p:sp>
+        <p:nvSpPr>
+          <p:cNvPr id="4" name="TextBox 3"/>
+          <p:cNvSpPr txBox="1"/>
+          <p:nvPr/>
+        </p:nvSpPr>
+        <p:spPr>
+          <a:xfrm>
+            <a:off x="731520" y="1463040"/>
+            <a:ext cx="10698480" cy="4937760"/>
+          </a:xfrm>
+          <a:prstGeom prst="rect">
+            <a:avLst/>
+          </a:prstGeom>
+          <a:noFill/>
+        </p:spPr>
+        <p:txBody>
+          <a:bodyPr wrap="square">
+            <a:spAutoFit/>
+          </a:bodyPr>
+          <a:lstStyle/>
+          <a:p>
+            <a:pPr>
+              <a:spcAft>
+                <a:spcPts val="1000"/>
+              </a:spcAft>
+              <a:defRPr sz="1700">
+                <a:solidFill>
+                  <a:srgbClr val="1F3864"/>
+                </a:solidFill>
+              </a:defRPr>
+            </a:pPr>
+            <a:r>
+              <a:t>•  This lecture is built around a REAL industry scenario — not a textbook exercise</a:t>
+            </a:r>
+          </a:p>
+          <a:p>
+            <a:pPr lvl="1">
+              <a:spcAft>
+                <a:spcPts val="500"/>
+              </a:spcAft>
+              <a:defRPr sz="1500">
+                <a:solidFill>
+                  <a:srgbClr val="5A5A5A"/>
+                </a:solidFill>
+              </a:defRPr>
+            </a:pPr>
+            <a:r>
+              <a:t>–  The dataset, the pipeline, and the deliverables mirror what analytics teams at tech &amp; retail companies actually do</a:t>
+            </a:r>
+          </a:p>
+          <a:p>
+            <a:pPr>
+              <a:spcAft>
+                <a:spcPts val="1000"/>
+              </a:spcAft>
+              <a:defRPr sz="1700">
+                <a:solidFill>
+                  <a:srgbClr val="1F3864"/>
+                </a:solidFill>
+              </a:defRPr>
+            </a:pPr>
+            <a:r>
+              <a:t>•  In industry, data never arrives clean:</a:t>
+            </a:r>
+          </a:p>
+          <a:p>
+            <a:pPr lvl="1">
+              <a:spcAft>
+                <a:spcPts val="500"/>
+              </a:spcAft>
+              <a:defRPr sz="1500">
+                <a:solidFill>
+                  <a:srgbClr val="5A5A5A"/>
+                </a:solidFill>
+              </a:defRPr>
+            </a:pPr>
+            <a:r>
+              <a:t>–  Duplicates, missing ids, mixed date formats, refunds, fat-finger errors — you will see all of them today</a:t>
+            </a:r>
+          </a:p>
+          <a:p>
+            <a:pPr>
+              <a:spcAft>
+                <a:spcPts val="1000"/>
+              </a:spcAft>
+              <a:defRPr sz="1700">
+                <a:solidFill>
+                  <a:srgbClr val="1F3864"/>
+                </a:solidFill>
+              </a:defRPr>
+            </a:pPr>
+            <a:r>
+              <a:t>•  In industry, analysis is never one-off:</a:t>
+            </a:r>
+          </a:p>
+          <a:p>
+            <a:pPr lvl="1">
+              <a:spcAft>
+                <a:spcPts val="500"/>
+              </a:spcAft>
+              <a:defRPr sz="1500">
+                <a:solidFill>
+                  <a:srgbClr val="5A5A5A"/>
+                </a:solidFill>
+              </a:defRPr>
+            </a:pPr>
+            <a:r>
+              <a:t>–  Marketing asks for the same segmentation every month — which is exactly why automation and agents matter</a:t>
+            </a:r>
+          </a:p>
+          <a:p>
+            <a:pPr>
+              <a:spcAft>
+                <a:spcPts val="1000"/>
+              </a:spcAft>
+              <a:defRPr sz="1700">
+                <a:solidFill>
+                  <a:srgbClr val="1F3864"/>
+                </a:solidFill>
+              </a:defRPr>
+            </a:pPr>
+            <a:r>
+              <a:t>•  In industry, the output is never just numbers:</a:t>
+            </a:r>
+          </a:p>
+          <a:p>
+            <a:pPr lvl="1">
+              <a:spcAft>
+                <a:spcPts val="500"/>
+              </a:spcAft>
+              <a:defRPr sz="1500">
+                <a:solidFill>
+                  <a:srgbClr val="5A5A5A"/>
+                </a:solidFill>
+              </a:defRPr>
+            </a:pPr>
+            <a:r>
+              <a:t>–  Stakeholders need a plain-language strategy report they can act on</a:t>
+            </a:r>
+          </a:p>
+          <a:p>
+            <a:pPr>
+              <a:spcAft>
+                <a:spcPts val="1000"/>
+              </a:spcAft>
+              <a:defRPr sz="1700">
+                <a:solidFill>
+                  <a:srgbClr val="1F3864"/>
+                </a:solidFill>
+              </a:defRPr>
+            </a:pPr>
+            <a:r>
+              <a:t>•  Goal today: experience the COMPLETE workflow a data team runs, end-to-end — so you know what the job really looks like</a:t>
+            </a:r>
+          </a:p>
+        </p:txBody>
+      </p:sp>
+    </p:spTree>
+  </p:cSld>
+  <p:clrMapOvr>
+    <a:masterClrMapping/>
+  </p:clrMapOvr>
+</p:sld>
+</file>
+
+<file path=ppt/slides/slide30.xml><?xml version="1.0" encoding="utf-8"?>
 <p:sld xmlns:a="http://schemas.openxmlformats.org/drawingml/2006/main" xmlns:p="http://schemas.openxmlformats.org/presentationml/2006/main" xmlns:r="http://schemas.openxmlformats.org/officeDocument/2006/relationships">
   <p:cSld>
     <p:bg>
@@ -12039,7 +12933,1948 @@
 </p:sld>
 </file>
 
-<file path=ppt/slides/slide3.xml><?xml version="1.0" encoding="utf-8"?>
+<file path=ppt/slides/slide31.xml><?xml version="1.0" encoding="utf-8"?>
+<p:sld xmlns:a="http://schemas.openxmlformats.org/drawingml/2006/main" xmlns:p="http://schemas.openxmlformats.org/presentationml/2006/main" xmlns:r="http://schemas.openxmlformats.org/officeDocument/2006/relationships">
+  <p:cSld>
+    <p:bg>
+      <p:bgPr>
+        <a:solidFill>
+          <a:srgbClr val="FFFFFF"/>
+        </a:solidFill>
+        <a:effectLst/>
+      </p:bgPr>
+    </p:bg>
+    <p:spTree>
+      <p:nvGrpSpPr>
+        <p:cNvPr id="1" name=""/>
+        <p:cNvGrpSpPr/>
+        <p:nvPr/>
+      </p:nvGrpSpPr>
+      <p:grpSpPr/>
+      <p:sp>
+        <p:nvSpPr>
+          <p:cNvPr id="2" name="Rectangle 1"/>
+          <p:cNvSpPr/>
+          <p:nvPr/>
+        </p:nvSpPr>
+        <p:spPr>
+          <a:xfrm>
+            <a:off x="0" y="0"/>
+            <a:ext cx="12191695" cy="164592"/>
+          </a:xfrm>
+          <a:prstGeom prst="rect">
+            <a:avLst/>
+          </a:prstGeom>
+          <a:solidFill>
+            <a:srgbClr val="2E86AB"/>
+          </a:solidFill>
+          <a:ln>
+            <a:noFill/>
+          </a:ln>
+        </p:spPr>
+        <p:style>
+          <a:lnRef idx="1">
+            <a:schemeClr val="accent1"/>
+          </a:lnRef>
+          <a:fillRef idx="3">
+            <a:schemeClr val="accent1"/>
+          </a:fillRef>
+          <a:effectRef idx="2">
+            <a:schemeClr val="accent1"/>
+          </a:effectRef>
+          <a:fontRef idx="minor">
+            <a:schemeClr val="lt1"/>
+          </a:fontRef>
+        </p:style>
+        <p:txBody>
+          <a:bodyPr rtlCol="0" anchor="ctr"/>
+          <a:lstStyle/>
+          <a:p>
+            <a:pPr algn="ctr"/>
+          </a:p>
+        </p:txBody>
+      </p:sp>
+      <p:sp>
+        <p:nvSpPr>
+          <p:cNvPr id="3" name="TextBox 2"/>
+          <p:cNvSpPr txBox="1"/>
+          <p:nvPr/>
+        </p:nvSpPr>
+        <p:spPr>
+          <a:xfrm>
+            <a:off x="640080" y="411480"/>
+            <a:ext cx="10972800" cy="822960"/>
+          </a:xfrm>
+          <a:prstGeom prst="rect">
+            <a:avLst/>
+          </a:prstGeom>
+          <a:noFill/>
+        </p:spPr>
+        <p:txBody>
+          <a:bodyPr wrap="square">
+            <a:spAutoFit/>
+          </a:bodyPr>
+          <a:lstStyle/>
+          <a:p>
+            <a:pPr>
+              <a:defRPr sz="2800" b="1">
+                <a:solidFill>
+                  <a:srgbClr val="1F3864"/>
+                </a:solidFill>
+              </a:defRPr>
+            </a:pPr>
+            <a:r>
+              <a:t>High Value Customer — retain &amp; grow</a:t>
+            </a:r>
+          </a:p>
+        </p:txBody>
+      </p:sp>
+      <p:sp>
+        <p:nvSpPr>
+          <p:cNvPr id="4" name="TextBox 3"/>
+          <p:cNvSpPr txBox="1"/>
+          <p:nvPr/>
+        </p:nvSpPr>
+        <p:spPr>
+          <a:xfrm>
+            <a:off x="731520" y="1463040"/>
+            <a:ext cx="10698480" cy="4937760"/>
+          </a:xfrm>
+          <a:prstGeom prst="rect">
+            <a:avLst/>
+          </a:prstGeom>
+          <a:noFill/>
+        </p:spPr>
+        <p:txBody>
+          <a:bodyPr wrap="square">
+            <a:spAutoFit/>
+          </a:bodyPr>
+          <a:lstStyle/>
+          <a:p>
+            <a:pPr>
+              <a:spcAft>
+                <a:spcPts val="1000"/>
+              </a:spcAft>
+              <a:defRPr sz="1800">
+                <a:solidFill>
+                  <a:srgbClr val="1F3864"/>
+                </a:solidFill>
+              </a:defRPr>
+            </a:pPr>
+            <a:r>
+              <a:t>•  Diagnosis: recent, frequent, top spend — the engine of the business</a:t>
+            </a:r>
+          </a:p>
+          <a:p>
+            <a:pPr>
+              <a:spcAft>
+                <a:spcPts val="1000"/>
+              </a:spcAft>
+              <a:defRPr sz="1800">
+                <a:solidFill>
+                  <a:srgbClr val="1F3864"/>
+                </a:solidFill>
+              </a:defRPr>
+            </a:pPr>
+            <a:r>
+              <a:t>•  Goal: retention + advocacy (NOT discounts — they buy on value)</a:t>
+            </a:r>
+          </a:p>
+          <a:p>
+            <a:pPr>
+              <a:spcAft>
+                <a:spcPts val="1000"/>
+              </a:spcAft>
+              <a:defRPr sz="1800">
+                <a:solidFill>
+                  <a:srgbClr val="1F3864"/>
+                </a:solidFill>
+              </a:defRPr>
+            </a:pPr>
+            <a:r>
+              <a:t>•  Plays:</a:t>
+            </a:r>
+          </a:p>
+          <a:p>
+            <a:pPr lvl="1">
+              <a:spcAft>
+                <a:spcPts val="500"/>
+              </a:spcAft>
+              <a:defRPr sz="1600">
+                <a:solidFill>
+                  <a:srgbClr val="5A5A5A"/>
+                </a:solidFill>
+              </a:defRPr>
+            </a:pPr>
+            <a:r>
+              <a:t>–  VIP loyalty tier, exclusive perks, early product access</a:t>
+            </a:r>
+          </a:p>
+          <a:p>
+            <a:pPr lvl="1">
+              <a:spcAft>
+                <a:spcPts val="500"/>
+              </a:spcAft>
+              <a:defRPr sz="1600">
+                <a:solidFill>
+                  <a:srgbClr val="5A5A5A"/>
+                </a:solidFill>
+              </a:defRPr>
+            </a:pPr>
+            <a:r>
+              <a:t>–  Personalised service: dedicated support, birthday gifts</a:t>
+            </a:r>
+          </a:p>
+          <a:p>
+            <a:pPr lvl="1">
+              <a:spcAft>
+                <a:spcPts val="500"/>
+              </a:spcAft>
+              <a:defRPr sz="1600">
+                <a:solidFill>
+                  <a:srgbClr val="5A5A5A"/>
+                </a:solidFill>
+              </a:defRPr>
+            </a:pPr>
+            <a:r>
+              <a:t>–  Referral rewards — they bring in customers like themselves</a:t>
+            </a:r>
+          </a:p>
+          <a:p>
+            <a:pPr>
+              <a:spcAft>
+                <a:spcPts val="1000"/>
+              </a:spcAft>
+              <a:defRPr sz="1800">
+                <a:solidFill>
+                  <a:srgbClr val="1F3864"/>
+                </a:solidFill>
+              </a:defRPr>
+            </a:pPr>
+            <a:r>
+              <a:t>•  KPIs: repeat rate · share of wallet · NPS / referrals</a:t>
+            </a:r>
+          </a:p>
+        </p:txBody>
+      </p:sp>
+    </p:spTree>
+  </p:cSld>
+  <p:clrMapOvr>
+    <a:masterClrMapping/>
+  </p:clrMapOvr>
+</p:sld>
+</file>
+
+<file path=ppt/slides/slide32.xml><?xml version="1.0" encoding="utf-8"?>
+<p:sld xmlns:a="http://schemas.openxmlformats.org/drawingml/2006/main" xmlns:p="http://schemas.openxmlformats.org/presentationml/2006/main" xmlns:r="http://schemas.openxmlformats.org/officeDocument/2006/relationships">
+  <p:cSld>
+    <p:bg>
+      <p:bgPr>
+        <a:solidFill>
+          <a:srgbClr val="FFFFFF"/>
+        </a:solidFill>
+        <a:effectLst/>
+      </p:bgPr>
+    </p:bg>
+    <p:spTree>
+      <p:nvGrpSpPr>
+        <p:cNvPr id="1" name=""/>
+        <p:cNvGrpSpPr/>
+        <p:nvPr/>
+      </p:nvGrpSpPr>
+      <p:grpSpPr/>
+      <p:sp>
+        <p:nvSpPr>
+          <p:cNvPr id="2" name="Rectangle 1"/>
+          <p:cNvSpPr/>
+          <p:nvPr/>
+        </p:nvSpPr>
+        <p:spPr>
+          <a:xfrm>
+            <a:off x="0" y="0"/>
+            <a:ext cx="12191695" cy="164592"/>
+          </a:xfrm>
+          <a:prstGeom prst="rect">
+            <a:avLst/>
+          </a:prstGeom>
+          <a:solidFill>
+            <a:srgbClr val="2E86AB"/>
+          </a:solidFill>
+          <a:ln>
+            <a:noFill/>
+          </a:ln>
+        </p:spPr>
+        <p:style>
+          <a:lnRef idx="1">
+            <a:schemeClr val="accent1"/>
+          </a:lnRef>
+          <a:fillRef idx="3">
+            <a:schemeClr val="accent1"/>
+          </a:fillRef>
+          <a:effectRef idx="2">
+            <a:schemeClr val="accent1"/>
+          </a:effectRef>
+          <a:fontRef idx="minor">
+            <a:schemeClr val="lt1"/>
+          </a:fontRef>
+        </p:style>
+        <p:txBody>
+          <a:bodyPr rtlCol="0" anchor="ctr"/>
+          <a:lstStyle/>
+          <a:p>
+            <a:pPr algn="ctr"/>
+          </a:p>
+        </p:txBody>
+      </p:sp>
+      <p:sp>
+        <p:nvSpPr>
+          <p:cNvPr id="3" name="TextBox 2"/>
+          <p:cNvSpPr txBox="1"/>
+          <p:nvPr/>
+        </p:nvSpPr>
+        <p:spPr>
+          <a:xfrm>
+            <a:off x="640080" y="411480"/>
+            <a:ext cx="10972800" cy="822960"/>
+          </a:xfrm>
+          <a:prstGeom prst="rect">
+            <a:avLst/>
+          </a:prstGeom>
+          <a:noFill/>
+        </p:spPr>
+        <p:txBody>
+          <a:bodyPr wrap="square">
+            <a:spAutoFit/>
+          </a:bodyPr>
+          <a:lstStyle/>
+          <a:p>
+            <a:pPr>
+              <a:defRPr sz="2800" b="1">
+                <a:solidFill>
+                  <a:srgbClr val="1F3864"/>
+                </a:solidFill>
+              </a:defRPr>
+            </a:pPr>
+            <a:r>
+              <a:t>Important Customer — build the habit</a:t>
+            </a:r>
+          </a:p>
+        </p:txBody>
+      </p:sp>
+      <p:sp>
+        <p:nvSpPr>
+          <p:cNvPr id="4" name="TextBox 3"/>
+          <p:cNvSpPr txBox="1"/>
+          <p:nvPr/>
+        </p:nvSpPr>
+        <p:spPr>
+          <a:xfrm>
+            <a:off x="731520" y="1463040"/>
+            <a:ext cx="10698480" cy="4937760"/>
+          </a:xfrm>
+          <a:prstGeom prst="rect">
+            <a:avLst/>
+          </a:prstGeom>
+          <a:noFill/>
+        </p:spPr>
+        <p:txBody>
+          <a:bodyPr wrap="square">
+            <a:spAutoFit/>
+          </a:bodyPr>
+          <a:lstStyle/>
+          <a:p>
+            <a:pPr>
+              <a:spcAft>
+                <a:spcPts val="1000"/>
+              </a:spcAft>
+              <a:defRPr sz="1800">
+                <a:solidFill>
+                  <a:srgbClr val="1F3864"/>
+                </a:solidFill>
+              </a:defRPr>
+            </a:pPr>
+            <a:r>
+              <a:t>•  Diagnosis: recent + big baskets, but only 1–2 orders → no habit yet</a:t>
+            </a:r>
+          </a:p>
+          <a:p>
+            <a:pPr>
+              <a:spcAft>
+                <a:spcPts val="1000"/>
+              </a:spcAft>
+              <a:defRPr sz="1800">
+                <a:solidFill>
+                  <a:srgbClr val="1F3864"/>
+                </a:solidFill>
+              </a:defRPr>
+            </a:pPr>
+            <a:r>
+              <a:t>•  The highest-UPSIDE segment: spend is proven, frequency is not</a:t>
+            </a:r>
+          </a:p>
+          <a:p>
+            <a:pPr>
+              <a:spcAft>
+                <a:spcPts val="1000"/>
+              </a:spcAft>
+              <a:defRPr sz="1800">
+                <a:solidFill>
+                  <a:srgbClr val="1F3864"/>
+                </a:solidFill>
+              </a:defRPr>
+            </a:pPr>
+            <a:r>
+              <a:t>•  Plays:</a:t>
+            </a:r>
+          </a:p>
+          <a:p>
+            <a:pPr lvl="1">
+              <a:spcAft>
+                <a:spcPts val="500"/>
+              </a:spcAft>
+              <a:defRPr sz="1600">
+                <a:solidFill>
+                  <a:srgbClr val="5A5A5A"/>
+                </a:solidFill>
+              </a:defRPr>
+            </a:pPr>
+            <a:r>
+              <a:t>–  Cross-sell complements to the first purchase</a:t>
+            </a:r>
+          </a:p>
+          <a:p>
+            <a:pPr lvl="1">
+              <a:spcAft>
+                <a:spcPts val="500"/>
+              </a:spcAft>
+              <a:defRPr sz="1600">
+                <a:solidFill>
+                  <a:srgbClr val="5A5A5A"/>
+                </a:solidFill>
+              </a:defRPr>
+            </a:pPr>
+            <a:r>
+              <a:t>–  Time-boxed “come back in 30 days” incentives</a:t>
+            </a:r>
+          </a:p>
+          <a:p>
+            <a:pPr lvl="1">
+              <a:spcAft>
+                <a:spcPts val="500"/>
+              </a:spcAft>
+              <a:defRPr sz="1600">
+                <a:solidFill>
+                  <a:srgbClr val="5A5A5A"/>
+                </a:solidFill>
+              </a:defRPr>
+            </a:pPr>
+            <a:r>
+              <a:t>–  Points programmes where frequency earns the reward</a:t>
+            </a:r>
+          </a:p>
+          <a:p>
+            <a:pPr>
+              <a:spcAft>
+                <a:spcPts val="1000"/>
+              </a:spcAft>
+              <a:defRPr sz="1800">
+                <a:solidFill>
+                  <a:srgbClr val="1F3864"/>
+                </a:solidFill>
+              </a:defRPr>
+            </a:pPr>
+            <a:r>
+              <a:t>•  KPIs: purchase frequency · days between orders · 60-day repeat rate</a:t>
+            </a:r>
+          </a:p>
+        </p:txBody>
+      </p:sp>
+    </p:spTree>
+  </p:cSld>
+  <p:clrMapOvr>
+    <a:masterClrMapping/>
+  </p:clrMapOvr>
+</p:sld>
+</file>
+
+<file path=ppt/slides/slide33.xml><?xml version="1.0" encoding="utf-8"?>
+<p:sld xmlns:a="http://schemas.openxmlformats.org/drawingml/2006/main" xmlns:p="http://schemas.openxmlformats.org/presentationml/2006/main" xmlns:r="http://schemas.openxmlformats.org/officeDocument/2006/relationships">
+  <p:cSld>
+    <p:bg>
+      <p:bgPr>
+        <a:solidFill>
+          <a:srgbClr val="FFFFFF"/>
+        </a:solidFill>
+        <a:effectLst/>
+      </p:bgPr>
+    </p:bg>
+    <p:spTree>
+      <p:nvGrpSpPr>
+        <p:cNvPr id="1" name=""/>
+        <p:cNvGrpSpPr/>
+        <p:nvPr/>
+      </p:nvGrpSpPr>
+      <p:grpSpPr/>
+      <p:sp>
+        <p:nvSpPr>
+          <p:cNvPr id="2" name="Rectangle 1"/>
+          <p:cNvSpPr/>
+          <p:nvPr/>
+        </p:nvSpPr>
+        <p:spPr>
+          <a:xfrm>
+            <a:off x="0" y="0"/>
+            <a:ext cx="12191695" cy="164592"/>
+          </a:xfrm>
+          <a:prstGeom prst="rect">
+            <a:avLst/>
+          </a:prstGeom>
+          <a:solidFill>
+            <a:srgbClr val="2E86AB"/>
+          </a:solidFill>
+          <a:ln>
+            <a:noFill/>
+          </a:ln>
+        </p:spPr>
+        <p:style>
+          <a:lnRef idx="1">
+            <a:schemeClr val="accent1"/>
+          </a:lnRef>
+          <a:fillRef idx="3">
+            <a:schemeClr val="accent1"/>
+          </a:fillRef>
+          <a:effectRef idx="2">
+            <a:schemeClr val="accent1"/>
+          </a:effectRef>
+          <a:fontRef idx="minor">
+            <a:schemeClr val="lt1"/>
+          </a:fontRef>
+        </p:style>
+        <p:txBody>
+          <a:bodyPr rtlCol="0" anchor="ctr"/>
+          <a:lstStyle/>
+          <a:p>
+            <a:pPr algn="ctr"/>
+          </a:p>
+        </p:txBody>
+      </p:sp>
+      <p:sp>
+        <p:nvSpPr>
+          <p:cNvPr id="3" name="TextBox 2"/>
+          <p:cNvSpPr txBox="1"/>
+          <p:nvPr/>
+        </p:nvSpPr>
+        <p:spPr>
+          <a:xfrm>
+            <a:off x="640080" y="411480"/>
+            <a:ext cx="10972800" cy="822960"/>
+          </a:xfrm>
+          <a:prstGeom prst="rect">
+            <a:avLst/>
+          </a:prstGeom>
+          <a:noFill/>
+        </p:spPr>
+        <p:txBody>
+          <a:bodyPr wrap="square">
+            <a:spAutoFit/>
+          </a:bodyPr>
+          <a:lstStyle/>
+          <a:p>
+            <a:pPr>
+              <a:defRPr sz="2800" b="1">
+                <a:solidFill>
+                  <a:srgbClr val="1F3864"/>
+                </a:solidFill>
+              </a:defRPr>
+            </a:pPr>
+            <a:r>
+              <a:t>Important Maintaining — win back · Normal — nurture</a:t>
+            </a:r>
+          </a:p>
+        </p:txBody>
+      </p:sp>
+      <p:sp>
+        <p:nvSpPr>
+          <p:cNvPr id="4" name="TextBox 3"/>
+          <p:cNvSpPr txBox="1"/>
+          <p:nvPr/>
+        </p:nvSpPr>
+        <p:spPr>
+          <a:xfrm>
+            <a:off x="731520" y="1463040"/>
+            <a:ext cx="10698480" cy="4937760"/>
+          </a:xfrm>
+          <a:prstGeom prst="rect">
+            <a:avLst/>
+          </a:prstGeom>
+          <a:noFill/>
+        </p:spPr>
+        <p:txBody>
+          <a:bodyPr wrap="square">
+            <a:spAutoFit/>
+          </a:bodyPr>
+          <a:lstStyle/>
+          <a:p>
+            <a:pPr>
+              <a:spcAft>
+                <a:spcPts val="1000"/>
+              </a:spcAft>
+              <a:defRPr sz="1700">
+                <a:solidFill>
+                  <a:srgbClr val="1F3864"/>
+                </a:solidFill>
+              </a:defRPr>
+            </a:pPr>
+            <a:r>
+              <a:t>•  Important Maintaining (loyal but lapsing):</a:t>
+            </a:r>
+          </a:p>
+          <a:p>
+            <a:pPr lvl="1">
+              <a:spcAft>
+                <a:spcPts val="500"/>
+              </a:spcAft>
+              <a:defRPr sz="1500">
+                <a:solidFill>
+                  <a:srgbClr val="5A5A5A"/>
+                </a:solidFill>
+              </a:defRPr>
+            </a:pPr>
+            <a:r>
+              <a:t>–  Win-back campaign with a meaningful incentive + churn survey</a:t>
+            </a:r>
+          </a:p>
+          <a:p>
+            <a:pPr lvl="1">
+              <a:spcAft>
+                <a:spcPts val="500"/>
+              </a:spcAft>
+              <a:defRPr sz="1500">
+                <a:solidFill>
+                  <a:srgbClr val="5A5A5A"/>
+                </a:solidFill>
+              </a:defRPr>
+            </a:pPr>
+            <a:r>
+              <a:t>–  Retarget their historical favourite categories</a:t>
+            </a:r>
+          </a:p>
+          <a:p>
+            <a:pPr lvl="1">
+              <a:spcAft>
+                <a:spcPts val="500"/>
+              </a:spcAft>
+              <a:defRPr sz="1500">
+                <a:solidFill>
+                  <a:srgbClr val="5A5A5A"/>
+                </a:solidFill>
+              </a:defRPr>
+            </a:pPr>
+            <a:r>
+              <a:t>–  High-value lapsed accounts → personal outreach, not email blasts</a:t>
+            </a:r>
+          </a:p>
+          <a:p>
+            <a:pPr lvl="1">
+              <a:spcAft>
+                <a:spcPts val="500"/>
+              </a:spcAft>
+              <a:defRPr sz="1500">
+                <a:solidFill>
+                  <a:srgbClr val="5A5A5A"/>
+                </a:solidFill>
+              </a:defRPr>
+            </a:pPr>
+            <a:r>
+              <a:t>–  KPIs: reactivation rate, win-back ROI</a:t>
+            </a:r>
+          </a:p>
+          <a:p>
+            <a:pPr>
+              <a:spcAft>
+                <a:spcPts val="1000"/>
+              </a:spcAft>
+              <a:defRPr sz="1700">
+                <a:solidFill>
+                  <a:srgbClr val="1F3864"/>
+                </a:solidFill>
+              </a:defRPr>
+            </a:pPr>
+            <a:r>
+              <a:t>•  Normal (broad, low-value base):</a:t>
+            </a:r>
+          </a:p>
+          <a:p>
+            <a:pPr lvl="1">
+              <a:spcAft>
+                <a:spcPts val="500"/>
+              </a:spcAft>
+              <a:defRPr sz="1500">
+                <a:solidFill>
+                  <a:srgbClr val="5A5A5A"/>
+                </a:solidFill>
+              </a:defRPr>
+            </a:pPr>
+            <a:r>
+              <a:t>–  Low-cost automated channels only; broad seasonal promos</a:t>
+            </a:r>
+          </a:p>
+          <a:p>
+            <a:pPr lvl="1">
+              <a:spcAft>
+                <a:spcPts val="500"/>
+              </a:spcAft>
+              <a:defRPr sz="1500">
+                <a:solidFill>
+                  <a:srgbClr val="5A5A5A"/>
+                </a:solidFill>
+              </a:defRPr>
+            </a:pPr>
+            <a:r>
+              <a:t>–  Watch for risers — promote them to higher-touch journeys</a:t>
+            </a:r>
+          </a:p>
+          <a:p>
+            <a:pPr lvl="1">
+              <a:spcAft>
+                <a:spcPts val="500"/>
+              </a:spcAft>
+              <a:defRPr sz="1500">
+                <a:solidFill>
+                  <a:srgbClr val="5A5A5A"/>
+                </a:solidFill>
+              </a:defRPr>
+            </a:pPr>
+            <a:r>
+              <a:t>–  KPIs: engagement, upgrade rate to better segments</a:t>
+            </a:r>
+          </a:p>
+        </p:txBody>
+      </p:sp>
+    </p:spTree>
+  </p:cSld>
+  <p:clrMapOvr>
+    <a:masterClrMapping/>
+  </p:clrMapOvr>
+</p:sld>
+</file>
+
+<file path=ppt/slides/slide34.xml><?xml version="1.0" encoding="utf-8"?>
+<p:sld xmlns:a="http://schemas.openxmlformats.org/drawingml/2006/main" xmlns:p="http://schemas.openxmlformats.org/presentationml/2006/main" xmlns:r="http://schemas.openxmlformats.org/officeDocument/2006/relationships">
+  <p:cSld>
+    <p:bg>
+      <p:bgPr>
+        <a:solidFill>
+          <a:srgbClr val="FFFFFF"/>
+        </a:solidFill>
+        <a:effectLst/>
+      </p:bgPr>
+    </p:bg>
+    <p:spTree>
+      <p:nvGrpSpPr>
+        <p:cNvPr id="1" name=""/>
+        <p:cNvGrpSpPr/>
+        <p:nvPr/>
+      </p:nvGrpSpPr>
+      <p:grpSpPr/>
+      <p:sp>
+        <p:nvSpPr>
+          <p:cNvPr id="2" name="Rectangle 1"/>
+          <p:cNvSpPr/>
+          <p:nvPr/>
+        </p:nvSpPr>
+        <p:spPr>
+          <a:xfrm>
+            <a:off x="0" y="0"/>
+            <a:ext cx="12191695" cy="164592"/>
+          </a:xfrm>
+          <a:prstGeom prst="rect">
+            <a:avLst/>
+          </a:prstGeom>
+          <a:solidFill>
+            <a:srgbClr val="2E86AB"/>
+          </a:solidFill>
+          <a:ln>
+            <a:noFill/>
+          </a:ln>
+        </p:spPr>
+        <p:style>
+          <a:lnRef idx="1">
+            <a:schemeClr val="accent1"/>
+          </a:lnRef>
+          <a:fillRef idx="3">
+            <a:schemeClr val="accent1"/>
+          </a:fillRef>
+          <a:effectRef idx="2">
+            <a:schemeClr val="accent1"/>
+          </a:effectRef>
+          <a:fontRef idx="minor">
+            <a:schemeClr val="lt1"/>
+          </a:fontRef>
+        </p:style>
+        <p:txBody>
+          <a:bodyPr rtlCol="0" anchor="ctr"/>
+          <a:lstStyle/>
+          <a:p>
+            <a:pPr algn="ctr"/>
+          </a:p>
+        </p:txBody>
+      </p:sp>
+      <p:sp>
+        <p:nvSpPr>
+          <p:cNvPr id="3" name="TextBox 2"/>
+          <p:cNvSpPr txBox="1"/>
+          <p:nvPr/>
+        </p:nvSpPr>
+        <p:spPr>
+          <a:xfrm>
+            <a:off x="640080" y="411480"/>
+            <a:ext cx="10972800" cy="822960"/>
+          </a:xfrm>
+          <a:prstGeom prst="rect">
+            <a:avLst/>
+          </a:prstGeom>
+          <a:noFill/>
+        </p:spPr>
+        <p:txBody>
+          <a:bodyPr wrap="square">
+            <a:spAutoFit/>
+          </a:bodyPr>
+          <a:lstStyle/>
+          <a:p>
+            <a:pPr>
+              <a:defRPr sz="2800" b="1">
+                <a:solidFill>
+                  <a:srgbClr val="1F3864"/>
+                </a:solidFill>
+              </a:defRPr>
+            </a:pPr>
+            <a:r>
+              <a:t>How would we know the strategies WORK?</a:t>
+            </a:r>
+          </a:p>
+        </p:txBody>
+      </p:sp>
+      <p:sp>
+        <p:nvSpPr>
+          <p:cNvPr id="4" name="TextBox 3"/>
+          <p:cNvSpPr txBox="1"/>
+          <p:nvPr/>
+        </p:nvSpPr>
+        <p:spPr>
+          <a:xfrm>
+            <a:off x="731520" y="1463040"/>
+            <a:ext cx="10698480" cy="4937760"/>
+          </a:xfrm>
+          <a:prstGeom prst="rect">
+            <a:avLst/>
+          </a:prstGeom>
+          <a:noFill/>
+        </p:spPr>
+        <p:txBody>
+          <a:bodyPr wrap="square">
+            <a:spAutoFit/>
+          </a:bodyPr>
+          <a:lstStyle/>
+          <a:p>
+            <a:pPr>
+              <a:spcAft>
+                <a:spcPts val="1000"/>
+              </a:spcAft>
+              <a:defRPr sz="1800">
+                <a:solidFill>
+                  <a:srgbClr val="1F3864"/>
+                </a:solidFill>
+              </a:defRPr>
+            </a:pPr>
+            <a:r>
+              <a:t>•  Segmentation is a hypothesis — campaigns are the experiment</a:t>
+            </a:r>
+          </a:p>
+          <a:p>
+            <a:pPr>
+              <a:spcAft>
+                <a:spcPts val="1000"/>
+              </a:spcAft>
+              <a:defRPr sz="1800">
+                <a:solidFill>
+                  <a:srgbClr val="1F3864"/>
+                </a:solidFill>
+              </a:defRPr>
+            </a:pPr>
+            <a:r>
+              <a:t>•  A/B test inside each segment:</a:t>
+            </a:r>
+          </a:p>
+          <a:p>
+            <a:pPr lvl="1">
+              <a:spcAft>
+                <a:spcPts val="500"/>
+              </a:spcAft>
+              <a:defRPr sz="1600">
+                <a:solidFill>
+                  <a:srgbClr val="5A5A5A"/>
+                </a:solidFill>
+              </a:defRPr>
+            </a:pPr>
+            <a:r>
+              <a:t>–  Half of 'Important Maintaining' gets the win-back offer, half doesn't</a:t>
+            </a:r>
+          </a:p>
+          <a:p>
+            <a:pPr lvl="1">
+              <a:spcAft>
+                <a:spcPts val="500"/>
+              </a:spcAft>
+              <a:defRPr sz="1600">
+                <a:solidFill>
+                  <a:srgbClr val="5A5A5A"/>
+                </a:solidFill>
+              </a:defRPr>
+            </a:pPr>
+            <a:r>
+              <a:t>–  Compare reactivation rate → causal evidence, not vibes</a:t>
+            </a:r>
+          </a:p>
+          <a:p>
+            <a:pPr>
+              <a:spcAft>
+                <a:spcPts val="1000"/>
+              </a:spcAft>
+              <a:defRPr sz="1800">
+                <a:solidFill>
+                  <a:srgbClr val="1F3864"/>
+                </a:solidFill>
+              </a:defRPr>
+            </a:pPr>
+            <a:r>
+              <a:t>•  Re-run the agent monthly and track segment MIGRATION:</a:t>
+            </a:r>
+          </a:p>
+          <a:p>
+            <a:pPr lvl="1">
+              <a:spcAft>
+                <a:spcPts val="500"/>
+              </a:spcAft>
+              <a:defRPr sz="1600">
+                <a:solidFill>
+                  <a:srgbClr val="5A5A5A"/>
+                </a:solidFill>
+              </a:defRPr>
+            </a:pPr>
+            <a:r>
+              <a:t>–  Are Important customers becoming High Value? (good)</a:t>
+            </a:r>
+          </a:p>
+          <a:p>
+            <a:pPr lvl="1">
+              <a:spcAft>
+                <a:spcPts val="500"/>
+              </a:spcAft>
+              <a:defRPr sz="1600">
+                <a:solidFill>
+                  <a:srgbClr val="5A5A5A"/>
+                </a:solidFill>
+              </a:defRPr>
+            </a:pPr>
+            <a:r>
+              <a:t>–  Are High Value sliding into Maintaining? (alarm)</a:t>
+            </a:r>
+          </a:p>
+          <a:p>
+            <a:pPr>
+              <a:spcAft>
+                <a:spcPts val="1000"/>
+              </a:spcAft>
+              <a:defRPr sz="1800">
+                <a:solidFill>
+                  <a:srgbClr val="1F3864"/>
+                </a:solidFill>
+              </a:defRPr>
+            </a:pPr>
+            <a:r>
+              <a:t>•  This is where automation pays off: the analysis is free to repeat</a:t>
+            </a:r>
+          </a:p>
+        </p:txBody>
+      </p:sp>
+    </p:spTree>
+  </p:cSld>
+  <p:clrMapOvr>
+    <a:masterClrMapping/>
+  </p:clrMapOvr>
+</p:sld>
+</file>
+
+<file path=ppt/slides/slide35.xml><?xml version="1.0" encoding="utf-8"?>
+<p:sld xmlns:a="http://schemas.openxmlformats.org/drawingml/2006/main" xmlns:p="http://schemas.openxmlformats.org/presentationml/2006/main" xmlns:r="http://schemas.openxmlformats.org/officeDocument/2006/relationships">
+  <p:cSld>
+    <p:bg>
+      <p:bgPr>
+        <a:solidFill>
+          <a:srgbClr val="2E86AB"/>
+        </a:solidFill>
+        <a:effectLst/>
+      </p:bgPr>
+    </p:bg>
+    <p:spTree>
+      <p:nvGrpSpPr>
+        <p:cNvPr id="1" name=""/>
+        <p:cNvGrpSpPr/>
+        <p:nvPr/>
+      </p:nvGrpSpPr>
+      <p:grpSpPr/>
+      <p:sp>
+        <p:nvSpPr>
+          <p:cNvPr id="2" name="TextBox 1"/>
+          <p:cNvSpPr txBox="1"/>
+          <p:nvPr/>
+        </p:nvSpPr>
+        <p:spPr>
+          <a:xfrm>
+            <a:off x="822960" y="2011680"/>
+            <a:ext cx="10515600" cy="640080"/>
+          </a:xfrm>
+          <a:prstGeom prst="rect">
+            <a:avLst/>
+          </a:prstGeom>
+          <a:noFill/>
+        </p:spPr>
+        <p:txBody>
+          <a:bodyPr wrap="square">
+            <a:spAutoFit/>
+          </a:bodyPr>
+          <a:lstStyle/>
+          <a:p>
+            <a:pPr>
+              <a:defRPr sz="1800">
+                <a:solidFill>
+                  <a:srgbClr val="D9ECF4"/>
+                </a:solidFill>
+              </a:defRPr>
+            </a:pPr>
+            <a:r>
+              <a:t>Part 6   ·   ~10 min</a:t>
+            </a:r>
+          </a:p>
+        </p:txBody>
+      </p:sp>
+      <p:sp>
+        <p:nvSpPr>
+          <p:cNvPr id="3" name="TextBox 2"/>
+          <p:cNvSpPr txBox="1"/>
+          <p:nvPr/>
+        </p:nvSpPr>
+        <p:spPr>
+          <a:xfrm>
+            <a:off x="822960" y="2743200"/>
+            <a:ext cx="10515600" cy="1828800"/>
+          </a:xfrm>
+          <a:prstGeom prst="rect">
+            <a:avLst/>
+          </a:prstGeom>
+          <a:noFill/>
+        </p:spPr>
+        <p:txBody>
+          <a:bodyPr wrap="square">
+            <a:spAutoFit/>
+          </a:bodyPr>
+          <a:lstStyle/>
+          <a:p>
+            <a:pPr>
+              <a:defRPr sz="3800" b="1">
+                <a:solidFill>
+                  <a:srgbClr val="FFFFFF"/>
+                </a:solidFill>
+              </a:defRPr>
+            </a:pPr>
+            <a:r>
+              <a:t>Limits, ethics &amp; what's next</a:t>
+            </a:r>
+          </a:p>
+        </p:txBody>
+      </p:sp>
+    </p:spTree>
+  </p:cSld>
+  <p:clrMapOvr>
+    <a:masterClrMapping/>
+  </p:clrMapOvr>
+</p:sld>
+</file>
+
+<file path=ppt/slides/slide36.xml><?xml version="1.0" encoding="utf-8"?>
+<p:sld xmlns:a="http://schemas.openxmlformats.org/drawingml/2006/main" xmlns:p="http://schemas.openxmlformats.org/presentationml/2006/main" xmlns:r="http://schemas.openxmlformats.org/officeDocument/2006/relationships">
+  <p:cSld>
+    <p:bg>
+      <p:bgPr>
+        <a:solidFill>
+          <a:srgbClr val="FFFFFF"/>
+        </a:solidFill>
+        <a:effectLst/>
+      </p:bgPr>
+    </p:bg>
+    <p:spTree>
+      <p:nvGrpSpPr>
+        <p:cNvPr id="1" name=""/>
+        <p:cNvGrpSpPr/>
+        <p:nvPr/>
+      </p:nvGrpSpPr>
+      <p:grpSpPr/>
+      <p:sp>
+        <p:nvSpPr>
+          <p:cNvPr id="2" name="Rectangle 1"/>
+          <p:cNvSpPr/>
+          <p:nvPr/>
+        </p:nvSpPr>
+        <p:spPr>
+          <a:xfrm>
+            <a:off x="0" y="0"/>
+            <a:ext cx="12191695" cy="164592"/>
+          </a:xfrm>
+          <a:prstGeom prst="rect">
+            <a:avLst/>
+          </a:prstGeom>
+          <a:solidFill>
+            <a:srgbClr val="2E86AB"/>
+          </a:solidFill>
+          <a:ln>
+            <a:noFill/>
+          </a:ln>
+        </p:spPr>
+        <p:style>
+          <a:lnRef idx="1">
+            <a:schemeClr val="accent1"/>
+          </a:lnRef>
+          <a:fillRef idx="3">
+            <a:schemeClr val="accent1"/>
+          </a:fillRef>
+          <a:effectRef idx="2">
+            <a:schemeClr val="accent1"/>
+          </a:effectRef>
+          <a:fontRef idx="minor">
+            <a:schemeClr val="lt1"/>
+          </a:fontRef>
+        </p:style>
+        <p:txBody>
+          <a:bodyPr rtlCol="0" anchor="ctr"/>
+          <a:lstStyle/>
+          <a:p>
+            <a:pPr algn="ctr"/>
+          </a:p>
+        </p:txBody>
+      </p:sp>
+      <p:sp>
+        <p:nvSpPr>
+          <p:cNvPr id="3" name="TextBox 2"/>
+          <p:cNvSpPr txBox="1"/>
+          <p:nvPr/>
+        </p:nvSpPr>
+        <p:spPr>
+          <a:xfrm>
+            <a:off x="640080" y="411480"/>
+            <a:ext cx="10972800" cy="822960"/>
+          </a:xfrm>
+          <a:prstGeom prst="rect">
+            <a:avLst/>
+          </a:prstGeom>
+          <a:noFill/>
+        </p:spPr>
+        <p:txBody>
+          <a:bodyPr wrap="square">
+            <a:spAutoFit/>
+          </a:bodyPr>
+          <a:lstStyle/>
+          <a:p>
+            <a:pPr>
+              <a:defRPr sz="2800" b="1">
+                <a:solidFill>
+                  <a:srgbClr val="1F3864"/>
+                </a:solidFill>
+              </a:defRPr>
+            </a:pPr>
+            <a:r>
+              <a:t>Limitations &amp; ethics — be a responsible analyst</a:t>
+            </a:r>
+          </a:p>
+        </p:txBody>
+      </p:sp>
+      <p:sp>
+        <p:nvSpPr>
+          <p:cNvPr id="4" name="TextBox 3"/>
+          <p:cNvSpPr txBox="1"/>
+          <p:nvPr/>
+        </p:nvSpPr>
+        <p:spPr>
+          <a:xfrm>
+            <a:off x="731520" y="1463040"/>
+            <a:ext cx="10698480" cy="4937760"/>
+          </a:xfrm>
+          <a:prstGeom prst="rect">
+            <a:avLst/>
+          </a:prstGeom>
+          <a:noFill/>
+        </p:spPr>
+        <p:txBody>
+          <a:bodyPr wrap="square">
+            <a:spAutoFit/>
+          </a:bodyPr>
+          <a:lstStyle/>
+          <a:p>
+            <a:pPr>
+              <a:spcAft>
+                <a:spcPts val="1000"/>
+              </a:spcAft>
+              <a:defRPr sz="1700">
+                <a:solidFill>
+                  <a:srgbClr val="1F3864"/>
+                </a:solidFill>
+              </a:defRPr>
+            </a:pPr>
+            <a:r>
+              <a:t>•  RFM limits:</a:t>
+            </a:r>
+          </a:p>
+          <a:p>
+            <a:pPr lvl="1">
+              <a:spcAft>
+                <a:spcPts val="500"/>
+              </a:spcAft>
+              <a:defRPr sz="1500">
+                <a:solidFill>
+                  <a:srgbClr val="5A5A5A"/>
+                </a:solidFill>
+              </a:defRPr>
+            </a:pPr>
+            <a:r>
+              <a:t>–  Backward-looking; blind to margins, categories, seasonality</a:t>
+            </a:r>
+          </a:p>
+          <a:p>
+            <a:pPr lvl="1">
+              <a:spcAft>
+                <a:spcPts val="500"/>
+              </a:spcAft>
+              <a:defRPr sz="1500">
+                <a:solidFill>
+                  <a:srgbClr val="5A5A5A"/>
+                </a:solidFill>
+              </a:defRPr>
+            </a:pPr>
+            <a:r>
+              <a:t>–  New customers always look 'low value' — don't starve them</a:t>
+            </a:r>
+          </a:p>
+          <a:p>
+            <a:pPr>
+              <a:spcAft>
+                <a:spcPts val="1000"/>
+              </a:spcAft>
+              <a:defRPr sz="1700">
+                <a:solidFill>
+                  <a:srgbClr val="1F3864"/>
+                </a:solidFill>
+              </a:defRPr>
+            </a:pPr>
+            <a:r>
+              <a:t>•  LLM-in-the-loop limits:</a:t>
+            </a:r>
+          </a:p>
+          <a:p>
+            <a:pPr lvl="1">
+              <a:spcAft>
+                <a:spcPts val="500"/>
+              </a:spcAft>
+              <a:defRPr sz="1500">
+                <a:solidFill>
+                  <a:srgbClr val="5A5A5A"/>
+                </a:solidFill>
+              </a:defRPr>
+            </a:pPr>
+            <a:r>
+              <a:t>–  Hallucination: always validate generated numbers against the data</a:t>
+            </a:r>
+          </a:p>
+          <a:p>
+            <a:pPr lvl="1">
+              <a:spcAft>
+                <a:spcPts val="500"/>
+              </a:spcAft>
+              <a:defRPr sz="1500">
+                <a:solidFill>
+                  <a:srgbClr val="5A5A5A"/>
+                </a:solidFill>
+              </a:defRPr>
+            </a:pPr>
+            <a:r>
+              <a:t>–  Same input ≠ same output — log prompts &amp; responses for audit</a:t>
+            </a:r>
+          </a:p>
+          <a:p>
+            <a:pPr>
+              <a:spcAft>
+                <a:spcPts val="1000"/>
+              </a:spcAft>
+              <a:defRPr sz="1700">
+                <a:solidFill>
+                  <a:srgbClr val="1F3864"/>
+                </a:solidFill>
+              </a:defRPr>
+            </a:pPr>
+            <a:r>
+              <a:t>•  Ethics:</a:t>
+            </a:r>
+          </a:p>
+          <a:p>
+            <a:pPr lvl="1">
+              <a:spcAft>
+                <a:spcPts val="500"/>
+              </a:spcAft>
+              <a:defRPr sz="1500">
+                <a:solidFill>
+                  <a:srgbClr val="5A5A5A"/>
+                </a:solidFill>
+              </a:defRPr>
+            </a:pPr>
+            <a:r>
+              <a:t>–  Price/offer discrimination across segments can cross legal lines</a:t>
+            </a:r>
+          </a:p>
+          <a:p>
+            <a:pPr lvl="1">
+              <a:spcAft>
+                <a:spcPts val="500"/>
+              </a:spcAft>
+              <a:defRPr sz="1500">
+                <a:solidFill>
+                  <a:srgbClr val="5A5A5A"/>
+                </a:solidFill>
+              </a:defRPr>
+            </a:pPr>
+            <a:r>
+              <a:t>–  PDPA (SG): purchase histories are personal data — minimise, secure</a:t>
+            </a:r>
+          </a:p>
+          <a:p>
+            <a:pPr lvl="1">
+              <a:spcAft>
+                <a:spcPts val="500"/>
+              </a:spcAft>
+              <a:defRPr sz="1500">
+                <a:solidFill>
+                  <a:srgbClr val="5A5A5A"/>
+                </a:solidFill>
+              </a:defRPr>
+            </a:pPr>
+            <a:r>
+              <a:t>–  'Normal customer' ≠ a person who deserves worse service</a:t>
+            </a:r>
+          </a:p>
+        </p:txBody>
+      </p:sp>
+    </p:spTree>
+  </p:cSld>
+  <p:clrMapOvr>
+    <a:masterClrMapping/>
+  </p:clrMapOvr>
+</p:sld>
+</file>
+
+<file path=ppt/slides/slide37.xml><?xml version="1.0" encoding="utf-8"?>
+<p:sld xmlns:a="http://schemas.openxmlformats.org/drawingml/2006/main" xmlns:p="http://schemas.openxmlformats.org/presentationml/2006/main" xmlns:r="http://schemas.openxmlformats.org/officeDocument/2006/relationships">
+  <p:cSld>
+    <p:bg>
+      <p:bgPr>
+        <a:solidFill>
+          <a:srgbClr val="FFFFFF"/>
+        </a:solidFill>
+        <a:effectLst/>
+      </p:bgPr>
+    </p:bg>
+    <p:spTree>
+      <p:nvGrpSpPr>
+        <p:cNvPr id="1" name=""/>
+        <p:cNvGrpSpPr/>
+        <p:nvPr/>
+      </p:nvGrpSpPr>
+      <p:grpSpPr/>
+      <p:sp>
+        <p:nvSpPr>
+          <p:cNvPr id="2" name="Rectangle 1"/>
+          <p:cNvSpPr/>
+          <p:nvPr/>
+        </p:nvSpPr>
+        <p:spPr>
+          <a:xfrm>
+            <a:off x="0" y="0"/>
+            <a:ext cx="12191695" cy="164592"/>
+          </a:xfrm>
+          <a:prstGeom prst="rect">
+            <a:avLst/>
+          </a:prstGeom>
+          <a:solidFill>
+            <a:srgbClr val="2E86AB"/>
+          </a:solidFill>
+          <a:ln>
+            <a:noFill/>
+          </a:ln>
+        </p:spPr>
+        <p:style>
+          <a:lnRef idx="1">
+            <a:schemeClr val="accent1"/>
+          </a:lnRef>
+          <a:fillRef idx="3">
+            <a:schemeClr val="accent1"/>
+          </a:fillRef>
+          <a:effectRef idx="2">
+            <a:schemeClr val="accent1"/>
+          </a:effectRef>
+          <a:fontRef idx="minor">
+            <a:schemeClr val="lt1"/>
+          </a:fontRef>
+        </p:style>
+        <p:txBody>
+          <a:bodyPr rtlCol="0" anchor="ctr"/>
+          <a:lstStyle/>
+          <a:p>
+            <a:pPr algn="ctr"/>
+          </a:p>
+        </p:txBody>
+      </p:sp>
+      <p:sp>
+        <p:nvSpPr>
+          <p:cNvPr id="3" name="TextBox 2"/>
+          <p:cNvSpPr txBox="1"/>
+          <p:nvPr/>
+        </p:nvSpPr>
+        <p:spPr>
+          <a:xfrm>
+            <a:off x="640080" y="411480"/>
+            <a:ext cx="10972800" cy="822960"/>
+          </a:xfrm>
+          <a:prstGeom prst="rect">
+            <a:avLst/>
+          </a:prstGeom>
+          <a:noFill/>
+        </p:spPr>
+        <p:txBody>
+          <a:bodyPr wrap="square">
+            <a:spAutoFit/>
+          </a:bodyPr>
+          <a:lstStyle/>
+          <a:p>
+            <a:pPr>
+              <a:defRPr sz="2800" b="1">
+                <a:solidFill>
+                  <a:srgbClr val="1F3864"/>
+                </a:solidFill>
+              </a:defRPr>
+            </a:pPr>
+            <a:r>
+              <a:t>Beyond this lecture</a:t>
+            </a:r>
+          </a:p>
+        </p:txBody>
+      </p:sp>
+      <p:sp>
+        <p:nvSpPr>
+          <p:cNvPr id="4" name="TextBox 3"/>
+          <p:cNvSpPr txBox="1"/>
+          <p:nvPr/>
+        </p:nvSpPr>
+        <p:spPr>
+          <a:xfrm>
+            <a:off x="731520" y="1463040"/>
+            <a:ext cx="10698480" cy="4937760"/>
+          </a:xfrm>
+          <a:prstGeom prst="rect">
+            <a:avLst/>
+          </a:prstGeom>
+          <a:noFill/>
+        </p:spPr>
+        <p:txBody>
+          <a:bodyPr wrap="square">
+            <a:spAutoFit/>
+          </a:bodyPr>
+          <a:lstStyle/>
+          <a:p>
+            <a:pPr>
+              <a:spcAft>
+                <a:spcPts val="1000"/>
+              </a:spcAft>
+              <a:defRPr sz="1800">
+                <a:solidFill>
+                  <a:srgbClr val="1F3864"/>
+                </a:solidFill>
+              </a:defRPr>
+            </a:pPr>
+            <a:r>
+              <a:t>•  Upgrades to the analytics:</a:t>
+            </a:r>
+          </a:p>
+          <a:p>
+            <a:pPr lvl="1">
+              <a:spcAft>
+                <a:spcPts val="500"/>
+              </a:spcAft>
+              <a:defRPr sz="1600">
+                <a:solidFill>
+                  <a:srgbClr val="5A5A5A"/>
+                </a:solidFill>
+              </a:defRPr>
+            </a:pPr>
+            <a:r>
+              <a:t>–  RFM → CLV (customer lifetime value) prediction; BG/NBD models</a:t>
+            </a:r>
+          </a:p>
+          <a:p>
+            <a:pPr lvl="1">
+              <a:spcAft>
+                <a:spcPts val="500"/>
+              </a:spcAft>
+              <a:defRPr sz="1600">
+                <a:solidFill>
+                  <a:srgbClr val="5A5A5A"/>
+                </a:solidFill>
+              </a:defRPr>
+            </a:pPr>
+            <a:r>
+              <a:t>–  K-means clustering on R/F/M instead of fixed rules</a:t>
+            </a:r>
+          </a:p>
+          <a:p>
+            <a:pPr>
+              <a:spcAft>
+                <a:spcPts val="1000"/>
+              </a:spcAft>
+              <a:defRPr sz="1800">
+                <a:solidFill>
+                  <a:srgbClr val="1F3864"/>
+                </a:solidFill>
+              </a:defRPr>
+            </a:pPr>
+            <a:r>
+              <a:t>•  Upgrades to the agent:</a:t>
+            </a:r>
+          </a:p>
+          <a:p>
+            <a:pPr lvl="1">
+              <a:spcAft>
+                <a:spcPts val="500"/>
+              </a:spcAft>
+              <a:defRPr sz="1600">
+                <a:solidFill>
+                  <a:srgbClr val="5A5A5A"/>
+                </a:solidFill>
+              </a:defRPr>
+            </a:pPr>
+            <a:r>
+              <a:t>–  Schedule it monthly; let it email the report automatically</a:t>
+            </a:r>
+          </a:p>
+          <a:p>
+            <a:pPr lvl="1">
+              <a:spcAft>
+                <a:spcPts val="500"/>
+              </a:spcAft>
+              <a:defRPr sz="1600">
+                <a:solidFill>
+                  <a:srgbClr val="5A5A5A"/>
+                </a:solidFill>
+              </a:defRPr>
+            </a:pPr>
+            <a:r>
+              <a:t>–  Tool-using LLM agents: let the model decide which analysis to run</a:t>
+            </a:r>
+          </a:p>
+          <a:p>
+            <a:pPr>
+              <a:spcAft>
+                <a:spcPts val="1000"/>
+              </a:spcAft>
+              <a:defRPr sz="1800">
+                <a:solidFill>
+                  <a:srgbClr val="1F3864"/>
+                </a:solidFill>
+              </a:defRPr>
+            </a:pPr>
+            <a:r>
+              <a:t>•  Try it yourself — the full project is yours:</a:t>
+            </a:r>
+          </a:p>
+          <a:p>
+            <a:pPr lvl="1">
+              <a:spcAft>
+                <a:spcPts val="500"/>
+              </a:spcAft>
+              <a:defRPr sz="1600">
+                <a:solidFill>
+                  <a:srgbClr val="5A5A5A"/>
+                </a:solidFill>
+              </a:defRPr>
+            </a:pPr>
+            <a:r>
+              <a:t>–  agent/ (≈300 lines of pandas) + app.py (Streamlit) + sample data</a:t>
+            </a:r>
+          </a:p>
+          <a:p>
+            <a:pPr lvl="1">
+              <a:spcAft>
+                <a:spcPts val="500"/>
+              </a:spcAft>
+              <a:defRPr sz="1600">
+                <a:solidFill>
+                  <a:srgbClr val="5A5A5A"/>
+                </a:solidFill>
+              </a:defRPr>
+            </a:pPr>
+            <a:r>
+              <a:t>–  Swap in any transaction CSV — your e-commerce side project counts!</a:t>
+            </a:r>
+          </a:p>
+        </p:txBody>
+      </p:sp>
+    </p:spTree>
+  </p:cSld>
+  <p:clrMapOvr>
+    <a:masterClrMapping/>
+  </p:clrMapOvr>
+</p:sld>
+</file>
+
+<file path=ppt/slides/slide38.xml><?xml version="1.0" encoding="utf-8"?>
+<p:sld xmlns:a="http://schemas.openxmlformats.org/drawingml/2006/main" xmlns:p="http://schemas.openxmlformats.org/presentationml/2006/main" xmlns:r="http://schemas.openxmlformats.org/officeDocument/2006/relationships">
+  <p:cSld>
+    <p:bg>
+      <p:bgPr>
+        <a:solidFill>
+          <a:srgbClr val="FFFFFF"/>
+        </a:solidFill>
+        <a:effectLst/>
+      </p:bgPr>
+    </p:bg>
+    <p:spTree>
+      <p:nvGrpSpPr>
+        <p:cNvPr id="1" name=""/>
+        <p:cNvGrpSpPr/>
+        <p:nvPr/>
+      </p:nvGrpSpPr>
+      <p:grpSpPr/>
+      <p:sp>
+        <p:nvSpPr>
+          <p:cNvPr id="2" name="Rectangle 1"/>
+          <p:cNvSpPr/>
+          <p:nvPr/>
+        </p:nvSpPr>
+        <p:spPr>
+          <a:xfrm>
+            <a:off x="0" y="0"/>
+            <a:ext cx="12191695" cy="164592"/>
+          </a:xfrm>
+          <a:prstGeom prst="rect">
+            <a:avLst/>
+          </a:prstGeom>
+          <a:solidFill>
+            <a:srgbClr val="2E86AB"/>
+          </a:solidFill>
+          <a:ln>
+            <a:noFill/>
+          </a:ln>
+        </p:spPr>
+        <p:style>
+          <a:lnRef idx="1">
+            <a:schemeClr val="accent1"/>
+          </a:lnRef>
+          <a:fillRef idx="3">
+            <a:schemeClr val="accent1"/>
+          </a:fillRef>
+          <a:effectRef idx="2">
+            <a:schemeClr val="accent1"/>
+          </a:effectRef>
+          <a:fontRef idx="minor">
+            <a:schemeClr val="lt1"/>
+          </a:fontRef>
+        </p:style>
+        <p:txBody>
+          <a:bodyPr rtlCol="0" anchor="ctr"/>
+          <a:lstStyle/>
+          <a:p>
+            <a:pPr algn="ctr"/>
+          </a:p>
+        </p:txBody>
+      </p:sp>
+      <p:sp>
+        <p:nvSpPr>
+          <p:cNvPr id="3" name="TextBox 2"/>
+          <p:cNvSpPr txBox="1"/>
+          <p:nvPr/>
+        </p:nvSpPr>
+        <p:spPr>
+          <a:xfrm>
+            <a:off x="640080" y="411480"/>
+            <a:ext cx="10972800" cy="822960"/>
+          </a:xfrm>
+          <a:prstGeom prst="rect">
+            <a:avLst/>
+          </a:prstGeom>
+          <a:noFill/>
+        </p:spPr>
+        <p:txBody>
+          <a:bodyPr wrap="square">
+            <a:spAutoFit/>
+          </a:bodyPr>
+          <a:lstStyle/>
+          <a:p>
+            <a:pPr>
+              <a:defRPr sz="2800" b="1">
+                <a:solidFill>
+                  <a:srgbClr val="1F3864"/>
+                </a:solidFill>
+              </a:defRPr>
+            </a:pPr>
+            <a:r>
+              <a:t>Key takeaways</a:t>
+            </a:r>
+          </a:p>
+        </p:txBody>
+      </p:sp>
+      <p:sp>
+        <p:nvSpPr>
+          <p:cNvPr id="4" name="TextBox 3"/>
+          <p:cNvSpPr txBox="1"/>
+          <p:nvPr/>
+        </p:nvSpPr>
+        <p:spPr>
+          <a:xfrm>
+            <a:off x="731520" y="1463040"/>
+            <a:ext cx="10698480" cy="4937760"/>
+          </a:xfrm>
+          <a:prstGeom prst="rect">
+            <a:avLst/>
+          </a:prstGeom>
+          <a:noFill/>
+        </p:spPr>
+        <p:txBody>
+          <a:bodyPr wrap="square">
+            <a:spAutoFit/>
+          </a:bodyPr>
+          <a:lstStyle/>
+          <a:p>
+            <a:pPr>
+              <a:spcAft>
+                <a:spcPts val="1000"/>
+              </a:spcAft>
+              <a:defRPr sz="2000">
+                <a:solidFill>
+                  <a:srgbClr val="1F3864"/>
+                </a:solidFill>
+              </a:defRPr>
+            </a:pPr>
+            <a:r>
+              <a:t>•  1.  Customers are not equal — revenue concentrates; act on it</a:t>
+            </a:r>
+          </a:p>
+          <a:p>
+            <a:pPr>
+              <a:spcAft>
+                <a:spcPts val="1000"/>
+              </a:spcAft>
+              <a:defRPr sz="2000">
+                <a:solidFill>
+                  <a:srgbClr val="1F3864"/>
+                </a:solidFill>
+              </a:defRPr>
+            </a:pPr>
+            <a:r>
+              <a:t>•  2.  RFM turns a transaction log into 4 actionable segments with three GROUP BYs</a:t>
+            </a:r>
+          </a:p>
+          <a:p>
+            <a:pPr>
+              <a:spcAft>
+                <a:spcPts val="1000"/>
+              </a:spcAft>
+              <a:defRPr sz="2000">
+                <a:solidFill>
+                  <a:srgbClr val="1F3864"/>
+                </a:solidFill>
+              </a:defRPr>
+            </a:pPr>
+            <a:r>
+              <a:t>•  3.  An AI agent = deterministic pipeline for correctness + LLM for judgement &amp; language</a:t>
+            </a:r>
+          </a:p>
+          <a:p>
+            <a:pPr>
+              <a:spcAft>
+                <a:spcPts val="1000"/>
+              </a:spcAft>
+              <a:defRPr sz="2000">
+                <a:solidFill>
+                  <a:srgbClr val="1F3864"/>
+                </a:solidFill>
+              </a:defRPr>
+            </a:pPr>
+            <a:r>
+              <a:t>•  4.  Always keep the audit trail: logs make agents trustworthy</a:t>
+            </a:r>
+          </a:p>
+          <a:p>
+            <a:pPr>
+              <a:spcAft>
+                <a:spcPts val="1000"/>
+              </a:spcAft>
+              <a:defRPr sz="2000">
+                <a:solidFill>
+                  <a:srgbClr val="1F3864"/>
+                </a:solidFill>
+              </a:defRPr>
+            </a:pPr>
+            <a:r>
+              <a:t>•  5.  Strategy without measurement is decoration — A/B test per segment</a:t>
+            </a:r>
+          </a:p>
+        </p:txBody>
+      </p:sp>
+    </p:spTree>
+  </p:cSld>
+  <p:clrMapOvr>
+    <a:masterClrMapping/>
+  </p:clrMapOvr>
+</p:sld>
+</file>
+
+<file path=ppt/slides/slide39.xml><?xml version="1.0" encoding="utf-8"?>
+<p:sld xmlns:a="http://schemas.openxmlformats.org/drawingml/2006/main" xmlns:p="http://schemas.openxmlformats.org/presentationml/2006/main" xmlns:r="http://schemas.openxmlformats.org/officeDocument/2006/relationships">
+  <p:cSld>
+    <p:bg>
+      <p:bgPr>
+        <a:solidFill>
+          <a:srgbClr val="1F3864"/>
+        </a:solidFill>
+        <a:effectLst/>
+      </p:bgPr>
+    </p:bg>
+    <p:spTree>
+      <p:nvGrpSpPr>
+        <p:cNvPr id="1" name=""/>
+        <p:cNvGrpSpPr/>
+        <p:nvPr/>
+      </p:nvGrpSpPr>
+      <p:grpSpPr/>
+      <p:sp>
+        <p:nvSpPr>
+          <p:cNvPr id="2" name="TextBox 1"/>
+          <p:cNvSpPr txBox="1"/>
+          <p:nvPr/>
+        </p:nvSpPr>
+        <p:spPr>
+          <a:xfrm>
+            <a:off x="822960" y="2194560"/>
+            <a:ext cx="10515600" cy="1645920"/>
+          </a:xfrm>
+          <a:prstGeom prst="rect">
+            <a:avLst/>
+          </a:prstGeom>
+          <a:noFill/>
+        </p:spPr>
+        <p:txBody>
+          <a:bodyPr wrap="square">
+            <a:spAutoFit/>
+          </a:bodyPr>
+          <a:lstStyle/>
+          <a:p>
+            <a:pPr>
+              <a:defRPr sz="4000" b="1">
+                <a:solidFill>
+                  <a:srgbClr val="FFFFFF"/>
+                </a:solidFill>
+              </a:defRPr>
+            </a:pPr>
+            <a:r>
+              <a:t>Thank you — questions?</a:t>
+            </a:r>
+          </a:p>
+        </p:txBody>
+      </p:sp>
+      <p:sp>
+        <p:nvSpPr>
+          <p:cNvPr id="3" name="TextBox 2"/>
+          <p:cNvSpPr txBox="1"/>
+          <p:nvPr/>
+        </p:nvSpPr>
+        <p:spPr>
+          <a:xfrm>
+            <a:off x="822960" y="3931920"/>
+            <a:ext cx="10515600" cy="914400"/>
+          </a:xfrm>
+          <a:prstGeom prst="rect">
+            <a:avLst/>
+          </a:prstGeom>
+          <a:noFill/>
+        </p:spPr>
+        <p:txBody>
+          <a:bodyPr wrap="square">
+            <a:spAutoFit/>
+          </a:bodyPr>
+          <a:lstStyle/>
+          <a:p>
+            <a:pPr>
+              <a:defRPr sz="2000">
+                <a:solidFill>
+                  <a:srgbClr val="BFD7EA"/>
+                </a:solidFill>
+              </a:defRPr>
+            </a:pPr>
+            <a:r>
+              <a:t>Slides, code and dataset: Documents/nus_lecture</a:t>
+            </a:r>
+          </a:p>
+        </p:txBody>
+      </p:sp>
+      <p:sp>
+        <p:nvSpPr>
+          <p:cNvPr id="4" name="TextBox 3"/>
+          <p:cNvSpPr txBox="1"/>
+          <p:nvPr/>
+        </p:nvSpPr>
+        <p:spPr>
+          <a:xfrm>
+            <a:off x="822960" y="5943600"/>
+            <a:ext cx="10515600" cy="548640"/>
+          </a:xfrm>
+          <a:prstGeom prst="rect">
+            <a:avLst/>
+          </a:prstGeom>
+          <a:noFill/>
+        </p:spPr>
+        <p:txBody>
+          <a:bodyPr wrap="square">
+            <a:spAutoFit/>
+          </a:bodyPr>
+          <a:lstStyle/>
+          <a:p>
+            <a:pPr>
+              <a:defRPr sz="1400">
+                <a:solidFill>
+                  <a:srgbClr val="9FB7CA"/>
+                </a:solidFill>
+              </a:defRPr>
+            </a:pPr>
+            <a:r>
+              <a:t>Software Engineer @ TikTok (AI) · Part-time PhD Student, NTU Singapore</a:t>
+            </a:r>
+          </a:p>
+        </p:txBody>
+      </p:sp>
+    </p:spTree>
+  </p:cSld>
+  <p:clrMapOvr>
+    <a:masterClrMapping/>
+  </p:clrMapOvr>
+</p:sld>
+</file>
+
+<file path=ppt/slides/slide4.xml><?xml version="1.0" encoding="utf-8"?>
 <p:sld xmlns:a="http://schemas.openxmlformats.org/drawingml/2006/main" xmlns:p="http://schemas.openxmlformats.org/presentationml/2006/main" xmlns:r="http://schemas.openxmlformats.org/officeDocument/2006/relationships">
   <p:cSld>
     <p:bg>
@@ -12738,7 +15573,107 @@
 </p:sld>
 </file>
 
-<file path=ppt/slides/slide30.xml><?xml version="1.0" encoding="utf-8"?>
+<file path=ppt/slides/slide5.xml><?xml version="1.0" encoding="utf-8"?>
+<p:sld xmlns:a="http://schemas.openxmlformats.org/drawingml/2006/main" xmlns:p="http://schemas.openxmlformats.org/presentationml/2006/main" xmlns:r="http://schemas.openxmlformats.org/officeDocument/2006/relationships">
+  <p:cSld>
+    <p:bg>
+      <p:bgPr>
+        <a:solidFill>
+          <a:srgbClr val="2E86AB"/>
+        </a:solidFill>
+        <a:effectLst/>
+      </p:bgPr>
+    </p:bg>
+    <p:spTree>
+      <p:nvGrpSpPr>
+        <p:cNvPr id="1" name=""/>
+        <p:cNvGrpSpPr/>
+        <p:nvPr/>
+      </p:nvGrpSpPr>
+      <p:grpSpPr/>
+      <p:sp>
+        <p:nvSpPr>
+          <p:cNvPr id="2" name="TextBox 1"/>
+          <p:cNvSpPr txBox="1"/>
+          <p:nvPr/>
+        </p:nvSpPr>
+        <p:spPr>
+          <a:xfrm>
+            <a:off x="822960" y="2011680"/>
+            <a:ext cx="10515600" cy="640080"/>
+          </a:xfrm>
+          <a:prstGeom prst="rect">
+            <a:avLst/>
+          </a:prstGeom>
+          <a:noFill/>
+        </p:spPr>
+        <p:txBody>
+          <a:bodyPr wrap="square">
+            <a:spAutoFit/>
+          </a:bodyPr>
+          <a:lstStyle/>
+          <a:p>
+            <a:pPr>
+              <a:defRPr sz="1800">
+                <a:solidFill>
+                  <a:srgbClr val="D9ECF4"/>
+                </a:solidFill>
+              </a:defRPr>
+            </a:pPr>
+            <a:r>
+              <a:t>Part 1   ·   ~15 min</a:t>
+            </a:r>
+          </a:p>
+        </p:txBody>
+      </p:sp>
+      <p:sp>
+        <p:nvSpPr>
+          <p:cNvPr id="3" name="TextBox 2"/>
+          <p:cNvSpPr txBox="1"/>
+          <p:nvPr/>
+        </p:nvSpPr>
+        <p:spPr>
+          <a:xfrm>
+            <a:off x="822960" y="2743200"/>
+            <a:ext cx="10515600" cy="1828800"/>
+          </a:xfrm>
+          <a:prstGeom prst="rect">
+            <a:avLst/>
+          </a:prstGeom>
+          <a:noFill/>
+        </p:spPr>
+        <p:txBody>
+          <a:bodyPr wrap="square">
+            <a:spAutoFit/>
+          </a:bodyPr>
+          <a:lstStyle/>
+          <a:p>
+            <a:pPr>
+              <a:defRPr sz="3800" b="1">
+                <a:solidFill>
+                  <a:srgbClr val="FFFFFF"/>
+                </a:solidFill>
+              </a:defRPr>
+            </a:pPr>
+            <a:r>
+              <a:t>The business problem:</a:t>
+            </a:r>
+            <a:br/>
+            <a:r>
+              <a:t>why segment customers?</a:t>
+            </a:r>
+          </a:p>
+        </p:txBody>
+      </p:sp>
+    </p:spTree>
+  </p:cSld>
+  <p:clrMapOvr>
+    <a:masterClrMapping/>
+  </p:clrMapOvr>
+</p:sld>
+</file>
+
+<file path=ppt/slides/slide6.xml><?xml version="1.0" encoding="utf-8"?>
 <p:sld xmlns:a="http://schemas.openxmlformats.org/drawingml/2006/main" xmlns:p="http://schemas.openxmlformats.org/presentationml/2006/main" xmlns:r="http://schemas.openxmlformats.org/officeDocument/2006/relationships">
   <p:cSld>
     <p:bg>
@@ -12829,7 +15764,7 @@
               </a:defRPr>
             </a:pPr>
             <a:r>
-              <a:t>High Value Customer — retain &amp; grow</a:t>
+              <a:t>Retail's oldest marketing mistake</a:t>
             </a:r>
           </a:p>
         </p:txBody>
@@ -12867,7 +15802,22 @@
               </a:defRPr>
             </a:pPr>
             <a:r>
-              <a:t>•  Diagnosis: recent, frequent, top spend — the engine of the business</a:t>
+              <a:t>•  “Blast” marketing: the same email, discount, and ad for every customer</a:t>
+            </a:r>
+          </a:p>
+          <a:p>
+            <a:pPr lvl="1">
+              <a:spcAft>
+                <a:spcPts val="500"/>
+              </a:spcAft>
+              <a:defRPr sz="1600">
+                <a:solidFill>
+                  <a:srgbClr val="5A5A5A"/>
+                </a:solidFill>
+              </a:defRPr>
+            </a:pPr>
+            <a:r>
+              <a:t>–  A loyal VIP gets the same 10% coupon as someone who bought once in 2023</a:t>
             </a:r>
           </a:p>
           <a:p>
@@ -12882,7 +15832,52 @@
               </a:defRPr>
             </a:pPr>
             <a:r>
-              <a:t>•  Goal: retention + advocacy (NOT discounts — they buy on value)</a:t>
+              <a:t>•  Three predictable failures:</a:t>
+            </a:r>
+          </a:p>
+          <a:p>
+            <a:pPr lvl="1">
+              <a:spcAft>
+                <a:spcPts val="500"/>
+              </a:spcAft>
+              <a:defRPr sz="1600">
+                <a:solidFill>
+                  <a:srgbClr val="5A5A5A"/>
+                </a:solidFill>
+              </a:defRPr>
+            </a:pPr>
+            <a:r>
+              <a:t>–  Wasted spend — discounts given to people who would buy anyway</a:t>
+            </a:r>
+          </a:p>
+          <a:p>
+            <a:pPr lvl="1">
+              <a:spcAft>
+                <a:spcPts val="500"/>
+              </a:spcAft>
+              <a:defRPr sz="1600">
+                <a:solidFill>
+                  <a:srgbClr val="5A5A5A"/>
+                </a:solidFill>
+              </a:defRPr>
+            </a:pPr>
+            <a:r>
+              <a:t>–  Churn — your best customers feel like strangers</a:t>
+            </a:r>
+          </a:p>
+          <a:p>
+            <a:pPr lvl="1">
+              <a:spcAft>
+                <a:spcPts val="500"/>
+              </a:spcAft>
+              <a:defRPr sz="1600">
+                <a:solidFill>
+                  <a:srgbClr val="5A5A5A"/>
+                </a:solidFill>
+              </a:defRPr>
+            </a:pPr>
+            <a:r>
+              <a:t>–  Spam fatigue — low-intent customers unsubscribe</a:t>
             </a:r>
           </a:p>
           <a:p>
@@ -12897,67 +15892,7 @@
               </a:defRPr>
             </a:pPr>
             <a:r>
-              <a:t>•  Plays:</a:t>
-            </a:r>
-          </a:p>
-          <a:p>
-            <a:pPr lvl="1">
-              <a:spcAft>
-                <a:spcPts val="500"/>
-              </a:spcAft>
-              <a:defRPr sz="1600">
-                <a:solidFill>
-                  <a:srgbClr val="5A5A5A"/>
-                </a:solidFill>
-              </a:defRPr>
-            </a:pPr>
-            <a:r>
-              <a:t>–  VIP loyalty tier, exclusive perks, early product access</a:t>
-            </a:r>
-          </a:p>
-          <a:p>
-            <a:pPr lvl="1">
-              <a:spcAft>
-                <a:spcPts val="500"/>
-              </a:spcAft>
-              <a:defRPr sz="1600">
-                <a:solidFill>
-                  <a:srgbClr val="5A5A5A"/>
-                </a:solidFill>
-              </a:defRPr>
-            </a:pPr>
-            <a:r>
-              <a:t>–  Personalised service: dedicated support, birthday gifts</a:t>
-            </a:r>
-          </a:p>
-          <a:p>
-            <a:pPr lvl="1">
-              <a:spcAft>
-                <a:spcPts val="500"/>
-              </a:spcAft>
-              <a:defRPr sz="1600">
-                <a:solidFill>
-                  <a:srgbClr val="5A5A5A"/>
-                </a:solidFill>
-              </a:defRPr>
-            </a:pPr>
-            <a:r>
-              <a:t>–  Referral rewards — they bring in customers like themselves</a:t>
-            </a:r>
-          </a:p>
-          <a:p>
-            <a:pPr>
-              <a:spcAft>
-                <a:spcPts val="1000"/>
-              </a:spcAft>
-              <a:defRPr sz="1800">
-                <a:solidFill>
-                  <a:srgbClr val="1F3864"/>
-                </a:solidFill>
-              </a:defRPr>
-            </a:pPr>
-            <a:r>
-              <a:t>•  KPIs: repeat rate · share of wallet · NPS / referrals</a:t>
+              <a:t>•  Marketing budgets are finite → you must decide WHO gets WHAT</a:t>
             </a:r>
           </a:p>
         </p:txBody>
@@ -12970,7 +15905,7 @@
 </p:sld>
 </file>
 
-<file path=ppt/slides/slide31.xml><?xml version="1.0" encoding="utf-8"?>
+<file path=ppt/slides/slide7.xml><?xml version="1.0" encoding="utf-8"?>
 <p:sld xmlns:a="http://schemas.openxmlformats.org/drawingml/2006/main" xmlns:p="http://schemas.openxmlformats.org/presentationml/2006/main" xmlns:r="http://schemas.openxmlformats.org/officeDocument/2006/relationships">
   <p:cSld>
     <p:bg>
@@ -13061,7 +15996,7 @@
               </a:defRPr>
             </a:pPr>
             <a:r>
-              <a:t>Important Customer — build the habit</a:t>
+              <a:t>Not all customers are equal</a:t>
             </a:r>
           </a:p>
         </p:txBody>
@@ -13099,7 +16034,37 @@
               </a:defRPr>
             </a:pPr>
             <a:r>
-              <a:t>•  Diagnosis: recent + big baskets, but only 1–2 orders → no habit yet</a:t>
+              <a:t>•  A small share of customers usually drives most of the revenue</a:t>
+            </a:r>
+          </a:p>
+          <a:p>
+            <a:pPr lvl="1">
+              <a:spcAft>
+                <a:spcPts val="500"/>
+              </a:spcAft>
+              <a:defRPr sz="1600">
+                <a:solidFill>
+                  <a:srgbClr val="5A5A5A"/>
+                </a:solidFill>
+              </a:defRPr>
+            </a:pPr>
+            <a:r>
+              <a:t>–  In our demo dataset: ~13% of customers generate ~40% of revenue</a:t>
+            </a:r>
+          </a:p>
+          <a:p>
+            <a:pPr lvl="1">
+              <a:spcAft>
+                <a:spcPts val="500"/>
+              </a:spcAft>
+              <a:defRPr sz="1600">
+                <a:solidFill>
+                  <a:srgbClr val="5A5A5A"/>
+                </a:solidFill>
+              </a:defRPr>
+            </a:pPr>
+            <a:r>
+              <a:t>–  Industry rule of thumb: the 'Pareto' 80/20 pattern</a:t>
             </a:r>
           </a:p>
           <a:p>
@@ -13114,7 +16079,7 @@
               </a:defRPr>
             </a:pPr>
             <a:r>
-              <a:t>•  The highest-UPSIDE segment: spend is proven, frequency is not</a:t>
+              <a:t>•  Acquiring a new customer costs 5–7× more than retaining one</a:t>
             </a:r>
           </a:p>
           <a:p>
@@ -13129,7 +16094,7 @@
               </a:defRPr>
             </a:pPr>
             <a:r>
-              <a:t>•  Plays:</a:t>
+              <a:t>•  Implication: treat customers differently, deliberately</a:t>
             </a:r>
           </a:p>
           <a:p>
@@ -13144,52 +16109,7 @@
               </a:defRPr>
             </a:pPr>
             <a:r>
-              <a:t>–  Cross-sell complements to the first purchase</a:t>
-            </a:r>
-          </a:p>
-          <a:p>
-            <a:pPr lvl="1">
-              <a:spcAft>
-                <a:spcPts val="500"/>
-              </a:spcAft>
-              <a:defRPr sz="1600">
-                <a:solidFill>
-                  <a:srgbClr val="5A5A5A"/>
-                </a:solidFill>
-              </a:defRPr>
-            </a:pPr>
-            <a:r>
-              <a:t>–  Time-boxed “come back in 30 days” incentives</a:t>
-            </a:r>
-          </a:p>
-          <a:p>
-            <a:pPr lvl="1">
-              <a:spcAft>
-                <a:spcPts val="500"/>
-              </a:spcAft>
-              <a:defRPr sz="1600">
-                <a:solidFill>
-                  <a:srgbClr val="5A5A5A"/>
-                </a:solidFill>
-              </a:defRPr>
-            </a:pPr>
-            <a:r>
-              <a:t>–  Points programmes where frequency earns the reward</a:t>
-            </a:r>
-          </a:p>
-          <a:p>
-            <a:pPr>
-              <a:spcAft>
-                <a:spcPts val="1000"/>
-              </a:spcAft>
-              <a:defRPr sz="1800">
-                <a:solidFill>
-                  <a:srgbClr val="1F3864"/>
-                </a:solidFill>
-              </a:defRPr>
-            </a:pPr>
-            <a:r>
-              <a:t>•  KPIs: purchase frequency · days between orders · 60-day repeat rate</a:t>
+              <a:t>–  → that requires a way to GROUP customers by behaviour</a:t>
             </a:r>
           </a:p>
         </p:txBody>
@@ -13202,7 +16122,7 @@
 </p:sld>
 </file>
 
-<file path=ppt/slides/slide32.xml><?xml version="1.0" encoding="utf-8"?>
+<file path=ppt/slides/slide8.xml><?xml version="1.0" encoding="utf-8"?>
 <p:sld xmlns:a="http://schemas.openxmlformats.org/drawingml/2006/main" xmlns:p="http://schemas.openxmlformats.org/presentationml/2006/main" xmlns:r="http://schemas.openxmlformats.org/officeDocument/2006/relationships">
   <p:cSld>
     <p:bg>
@@ -13293,7 +16213,7 @@
               </a:defRPr>
             </a:pPr>
             <a:r>
-              <a:t>Important Maintaining — win back · Normal — nurture</a:t>
+              <a:t>Customer segmentation in one sentence</a:t>
             </a:r>
           </a:p>
         </p:txBody>
@@ -13324,14 +16244,29 @@
               <a:spcAft>
                 <a:spcPts val="1000"/>
               </a:spcAft>
-              <a:defRPr sz="1700">
+              <a:defRPr sz="1800">
                 <a:solidFill>
                   <a:srgbClr val="1F3864"/>
                 </a:solidFill>
               </a:defRPr>
             </a:pPr>
             <a:r>
-              <a:t>•  Important Maintaining (loyal but lapsing):</a:t>
+              <a:t>•  Segmentation = splitting your customer base into groups that behave similarly, so each group can be served differently</a:t>
+            </a:r>
+          </a:p>
+          <a:p>
+            <a:pPr>
+              <a:spcAft>
+                <a:spcPts val="1000"/>
+              </a:spcAft>
+              <a:defRPr sz="1800">
+                <a:solidFill>
+                  <a:srgbClr val="1F3864"/>
+                </a:solidFill>
+              </a:defRPr>
+            </a:pPr>
+            <a:r>
+              <a:t>•  Common bases for segmentation:</a:t>
             </a:r>
           </a:p>
           <a:p>
@@ -13339,14 +16274,14 @@
               <a:spcAft>
                 <a:spcPts val="500"/>
               </a:spcAft>
-              <a:defRPr sz="1500">
+              <a:defRPr sz="1600">
                 <a:solidFill>
                   <a:srgbClr val="5A5A5A"/>
                 </a:solidFill>
               </a:defRPr>
             </a:pPr>
             <a:r>
-              <a:t>–  Win-back campaign with a meaningful incentive + churn survey</a:t>
+              <a:t>–  Demographic — age, location, income</a:t>
             </a:r>
           </a:p>
           <a:p>
@@ -13354,14 +16289,14 @@
               <a:spcAft>
                 <a:spcPts val="500"/>
               </a:spcAft>
-              <a:defRPr sz="1500">
+              <a:defRPr sz="1600">
                 <a:solidFill>
                   <a:srgbClr val="5A5A5A"/>
                 </a:solidFill>
               </a:defRPr>
             </a:pPr>
             <a:r>
-              <a:t>–  Retarget their historical favourite categories</a:t>
+              <a:t>–  Psychographic — lifestyle, values</a:t>
             </a:r>
           </a:p>
           <a:p>
@@ -13369,29 +16304,14 @@
               <a:spcAft>
                 <a:spcPts val="500"/>
               </a:spcAft>
-              <a:defRPr sz="1500">
+              <a:defRPr sz="1600">
                 <a:solidFill>
                   <a:srgbClr val="5A5A5A"/>
                 </a:solidFill>
               </a:defRPr>
             </a:pPr>
             <a:r>
-              <a:t>–  High-value lapsed accounts → personal outreach, not email blasts</a:t>
-            </a:r>
-          </a:p>
-          <a:p>
-            <a:pPr lvl="1">
-              <a:spcAft>
-                <a:spcPts val="500"/>
-              </a:spcAft>
-              <a:defRPr sz="1500">
-                <a:solidFill>
-                  <a:srgbClr val="5A5A5A"/>
-                </a:solidFill>
-              </a:defRPr>
-            </a:pPr>
-            <a:r>
-              <a:t>–  KPIs: reactivation rate, win-back ROI</a:t>
+              <a:t>–  Behavioural — what people actually DO (purchases, visits, clicks)</a:t>
             </a:r>
           </a:p>
           <a:p>
@@ -13399,59 +16319,29 @@
               <a:spcAft>
                 <a:spcPts val="1000"/>
               </a:spcAft>
-              <a:defRPr sz="1700">
+              <a:defRPr sz="1800">
                 <a:solidFill>
                   <a:srgbClr val="1F3864"/>
                 </a:solidFill>
               </a:defRPr>
             </a:pPr>
             <a:r>
-              <a:t>•  Normal (broad, low-value base):</a:t>
-            </a:r>
-          </a:p>
-          <a:p>
-            <a:pPr lvl="1">
+              <a:t>•  Behavioural data wins in retail: it is objective, abundant, and already in your order database</a:t>
+            </a:r>
+          </a:p>
+          <a:p>
+            <a:pPr>
               <a:spcAft>
-                <a:spcPts val="500"/>
+                <a:spcPts val="1000"/>
               </a:spcAft>
-              <a:defRPr sz="1500">
-                <a:solidFill>
-                  <a:srgbClr val="5A5A5A"/>
-                </a:solidFill>
-              </a:defRPr>
-            </a:pPr>
-            <a:r>
-              <a:t>–  Low-cost automated channels only; broad seasonal promos</a:t>
-            </a:r>
-          </a:p>
-          <a:p>
-            <a:pPr lvl="1">
-              <a:spcAft>
-                <a:spcPts val="500"/>
-              </a:spcAft>
-              <a:defRPr sz="1500">
-                <a:solidFill>
-                  <a:srgbClr val="5A5A5A"/>
-                </a:solidFill>
-              </a:defRPr>
-            </a:pPr>
-            <a:r>
-              <a:t>–  Watch for risers — promote them to higher-touch journeys</a:t>
-            </a:r>
-          </a:p>
-          <a:p>
-            <a:pPr lvl="1">
-              <a:spcAft>
-                <a:spcPts val="500"/>
-              </a:spcAft>
-              <a:defRPr sz="1500">
-                <a:solidFill>
-                  <a:srgbClr val="5A5A5A"/>
-                </a:solidFill>
-              </a:defRPr>
-            </a:pPr>
-            <a:r>
-              <a:t>–  KPIs: engagement, upgrade rate to better segments</a:t>
+              <a:defRPr sz="1800">
+                <a:solidFill>
+                  <a:srgbClr val="1F3864"/>
+                </a:solidFill>
+              </a:defRPr>
+            </a:pPr>
+            <a:r>
+              <a:t>•  RFM is the classic behavioural segmentation — invented for catalogue mail-order in the 1990s, still everywhere today</a:t>
             </a:r>
           </a:p>
         </p:txBody>
@@ -13464,254 +16354,7 @@
 </p:sld>
 </file>
 
-<file path=ppt/slides/slide33.xml><?xml version="1.0" encoding="utf-8"?>
-<p:sld xmlns:a="http://schemas.openxmlformats.org/drawingml/2006/main" xmlns:p="http://schemas.openxmlformats.org/presentationml/2006/main" xmlns:r="http://schemas.openxmlformats.org/officeDocument/2006/relationships">
-  <p:cSld>
-    <p:bg>
-      <p:bgPr>
-        <a:solidFill>
-          <a:srgbClr val="FFFFFF"/>
-        </a:solidFill>
-        <a:effectLst/>
-      </p:bgPr>
-    </p:bg>
-    <p:spTree>
-      <p:nvGrpSpPr>
-        <p:cNvPr id="1" name=""/>
-        <p:cNvGrpSpPr/>
-        <p:nvPr/>
-      </p:nvGrpSpPr>
-      <p:grpSpPr/>
-      <p:sp>
-        <p:nvSpPr>
-          <p:cNvPr id="2" name="Rectangle 1"/>
-          <p:cNvSpPr/>
-          <p:nvPr/>
-        </p:nvSpPr>
-        <p:spPr>
-          <a:xfrm>
-            <a:off x="0" y="0"/>
-            <a:ext cx="12191695" cy="164592"/>
-          </a:xfrm>
-          <a:prstGeom prst="rect">
-            <a:avLst/>
-          </a:prstGeom>
-          <a:solidFill>
-            <a:srgbClr val="2E86AB"/>
-          </a:solidFill>
-          <a:ln>
-            <a:noFill/>
-          </a:ln>
-        </p:spPr>
-        <p:style>
-          <a:lnRef idx="1">
-            <a:schemeClr val="accent1"/>
-          </a:lnRef>
-          <a:fillRef idx="3">
-            <a:schemeClr val="accent1"/>
-          </a:fillRef>
-          <a:effectRef idx="2">
-            <a:schemeClr val="accent1"/>
-          </a:effectRef>
-          <a:fontRef idx="minor">
-            <a:schemeClr val="lt1"/>
-          </a:fontRef>
-        </p:style>
-        <p:txBody>
-          <a:bodyPr rtlCol="0" anchor="ctr"/>
-          <a:lstStyle/>
-          <a:p>
-            <a:pPr algn="ctr"/>
-          </a:p>
-        </p:txBody>
-      </p:sp>
-      <p:sp>
-        <p:nvSpPr>
-          <p:cNvPr id="3" name="TextBox 2"/>
-          <p:cNvSpPr txBox="1"/>
-          <p:nvPr/>
-        </p:nvSpPr>
-        <p:spPr>
-          <a:xfrm>
-            <a:off x="640080" y="411480"/>
-            <a:ext cx="10972800" cy="822960"/>
-          </a:xfrm>
-          <a:prstGeom prst="rect">
-            <a:avLst/>
-          </a:prstGeom>
-          <a:noFill/>
-        </p:spPr>
-        <p:txBody>
-          <a:bodyPr wrap="square">
-            <a:spAutoFit/>
-          </a:bodyPr>
-          <a:lstStyle/>
-          <a:p>
-            <a:pPr>
-              <a:defRPr sz="2800" b="1">
-                <a:solidFill>
-                  <a:srgbClr val="1F3864"/>
-                </a:solidFill>
-              </a:defRPr>
-            </a:pPr>
-            <a:r>
-              <a:t>How would we know the strategies WORK?</a:t>
-            </a:r>
-          </a:p>
-        </p:txBody>
-      </p:sp>
-      <p:sp>
-        <p:nvSpPr>
-          <p:cNvPr id="4" name="TextBox 3"/>
-          <p:cNvSpPr txBox="1"/>
-          <p:nvPr/>
-        </p:nvSpPr>
-        <p:spPr>
-          <a:xfrm>
-            <a:off x="731520" y="1463040"/>
-            <a:ext cx="10698480" cy="4937760"/>
-          </a:xfrm>
-          <a:prstGeom prst="rect">
-            <a:avLst/>
-          </a:prstGeom>
-          <a:noFill/>
-        </p:spPr>
-        <p:txBody>
-          <a:bodyPr wrap="square">
-            <a:spAutoFit/>
-          </a:bodyPr>
-          <a:lstStyle/>
-          <a:p>
-            <a:pPr>
-              <a:spcAft>
-                <a:spcPts val="1000"/>
-              </a:spcAft>
-              <a:defRPr sz="1800">
-                <a:solidFill>
-                  <a:srgbClr val="1F3864"/>
-                </a:solidFill>
-              </a:defRPr>
-            </a:pPr>
-            <a:r>
-              <a:t>•  Segmentation is a hypothesis — campaigns are the experiment</a:t>
-            </a:r>
-          </a:p>
-          <a:p>
-            <a:pPr>
-              <a:spcAft>
-                <a:spcPts val="1000"/>
-              </a:spcAft>
-              <a:defRPr sz="1800">
-                <a:solidFill>
-                  <a:srgbClr val="1F3864"/>
-                </a:solidFill>
-              </a:defRPr>
-            </a:pPr>
-            <a:r>
-              <a:t>•  A/B test inside each segment:</a:t>
-            </a:r>
-          </a:p>
-          <a:p>
-            <a:pPr lvl="1">
-              <a:spcAft>
-                <a:spcPts val="500"/>
-              </a:spcAft>
-              <a:defRPr sz="1600">
-                <a:solidFill>
-                  <a:srgbClr val="5A5A5A"/>
-                </a:solidFill>
-              </a:defRPr>
-            </a:pPr>
-            <a:r>
-              <a:t>–  Half of 'Important Maintaining' gets the win-back offer, half doesn't</a:t>
-            </a:r>
-          </a:p>
-          <a:p>
-            <a:pPr lvl="1">
-              <a:spcAft>
-                <a:spcPts val="500"/>
-              </a:spcAft>
-              <a:defRPr sz="1600">
-                <a:solidFill>
-                  <a:srgbClr val="5A5A5A"/>
-                </a:solidFill>
-              </a:defRPr>
-            </a:pPr>
-            <a:r>
-              <a:t>–  Compare reactivation rate → causal evidence, not vibes</a:t>
-            </a:r>
-          </a:p>
-          <a:p>
-            <a:pPr>
-              <a:spcAft>
-                <a:spcPts val="1000"/>
-              </a:spcAft>
-              <a:defRPr sz="1800">
-                <a:solidFill>
-                  <a:srgbClr val="1F3864"/>
-                </a:solidFill>
-              </a:defRPr>
-            </a:pPr>
-            <a:r>
-              <a:t>•  Re-run the agent monthly and track segment MIGRATION:</a:t>
-            </a:r>
-          </a:p>
-          <a:p>
-            <a:pPr lvl="1">
-              <a:spcAft>
-                <a:spcPts val="500"/>
-              </a:spcAft>
-              <a:defRPr sz="1600">
-                <a:solidFill>
-                  <a:srgbClr val="5A5A5A"/>
-                </a:solidFill>
-              </a:defRPr>
-            </a:pPr>
-            <a:r>
-              <a:t>–  Are Important customers becoming High Value? (good)</a:t>
-            </a:r>
-          </a:p>
-          <a:p>
-            <a:pPr lvl="1">
-              <a:spcAft>
-                <a:spcPts val="500"/>
-              </a:spcAft>
-              <a:defRPr sz="1600">
-                <a:solidFill>
-                  <a:srgbClr val="5A5A5A"/>
-                </a:solidFill>
-              </a:defRPr>
-            </a:pPr>
-            <a:r>
-              <a:t>–  Are High Value sliding into Maintaining? (alarm)</a:t>
-            </a:r>
-          </a:p>
-          <a:p>
-            <a:pPr>
-              <a:spcAft>
-                <a:spcPts val="1000"/>
-              </a:spcAft>
-              <a:defRPr sz="1800">
-                <a:solidFill>
-                  <a:srgbClr val="1F3864"/>
-                </a:solidFill>
-              </a:defRPr>
-            </a:pPr>
-            <a:r>
-              <a:t>•  This is where automation pays off: the analysis is free to repeat</a:t>
-            </a:r>
-          </a:p>
-        </p:txBody>
-      </p:sp>
-    </p:spTree>
-  </p:cSld>
-  <p:clrMapOvr>
-    <a:masterClrMapping/>
-  </p:clrMapOvr>
-</p:sld>
-</file>
-
-<file path=ppt/slides/slide34.xml><?xml version="1.0" encoding="utf-8"?>
+<file path=ppt/slides/slide9.xml><?xml version="1.0" encoding="utf-8"?>
 <p:sld xmlns:a="http://schemas.openxmlformats.org/drawingml/2006/main" xmlns:p="http://schemas.openxmlformats.org/presentationml/2006/main" xmlns:r="http://schemas.openxmlformats.org/officeDocument/2006/relationships">
   <p:cSld>
     <p:bg>
@@ -13759,7 +16402,7 @@
               </a:defRPr>
             </a:pPr>
             <a:r>
-              <a:t>Part 6   ·   ~10 min</a:t>
+              <a:t>Part 2   ·   ~25 min</a:t>
             </a:r>
           </a:p>
         </p:txBody>
@@ -13794,2302 +16437,7 @@
               </a:defRPr>
             </a:pPr>
             <a:r>
-              <a:t>Limits, ethics &amp; what's next</a:t>
-            </a:r>
-          </a:p>
-        </p:txBody>
-      </p:sp>
-    </p:spTree>
-  </p:cSld>
-  <p:clrMapOvr>
-    <a:masterClrMapping/>
-  </p:clrMapOvr>
-</p:sld>
-</file>
-
-<file path=ppt/slides/slide35.xml><?xml version="1.0" encoding="utf-8"?>
-<p:sld xmlns:a="http://schemas.openxmlformats.org/drawingml/2006/main" xmlns:p="http://schemas.openxmlformats.org/presentationml/2006/main" xmlns:r="http://schemas.openxmlformats.org/officeDocument/2006/relationships">
-  <p:cSld>
-    <p:bg>
-      <p:bgPr>
-        <a:solidFill>
-          <a:srgbClr val="FFFFFF"/>
-        </a:solidFill>
-        <a:effectLst/>
-      </p:bgPr>
-    </p:bg>
-    <p:spTree>
-      <p:nvGrpSpPr>
-        <p:cNvPr id="1" name=""/>
-        <p:cNvGrpSpPr/>
-        <p:nvPr/>
-      </p:nvGrpSpPr>
-      <p:grpSpPr/>
-      <p:sp>
-        <p:nvSpPr>
-          <p:cNvPr id="2" name="Rectangle 1"/>
-          <p:cNvSpPr/>
-          <p:nvPr/>
-        </p:nvSpPr>
-        <p:spPr>
-          <a:xfrm>
-            <a:off x="0" y="0"/>
-            <a:ext cx="12191695" cy="164592"/>
-          </a:xfrm>
-          <a:prstGeom prst="rect">
-            <a:avLst/>
-          </a:prstGeom>
-          <a:solidFill>
-            <a:srgbClr val="2E86AB"/>
-          </a:solidFill>
-          <a:ln>
-            <a:noFill/>
-          </a:ln>
-        </p:spPr>
-        <p:style>
-          <a:lnRef idx="1">
-            <a:schemeClr val="accent1"/>
-          </a:lnRef>
-          <a:fillRef idx="3">
-            <a:schemeClr val="accent1"/>
-          </a:fillRef>
-          <a:effectRef idx="2">
-            <a:schemeClr val="accent1"/>
-          </a:effectRef>
-          <a:fontRef idx="minor">
-            <a:schemeClr val="lt1"/>
-          </a:fontRef>
-        </p:style>
-        <p:txBody>
-          <a:bodyPr rtlCol="0" anchor="ctr"/>
-          <a:lstStyle/>
-          <a:p>
-            <a:pPr algn="ctr"/>
-          </a:p>
-        </p:txBody>
-      </p:sp>
-      <p:sp>
-        <p:nvSpPr>
-          <p:cNvPr id="3" name="TextBox 2"/>
-          <p:cNvSpPr txBox="1"/>
-          <p:nvPr/>
-        </p:nvSpPr>
-        <p:spPr>
-          <a:xfrm>
-            <a:off x="640080" y="411480"/>
-            <a:ext cx="10972800" cy="822960"/>
-          </a:xfrm>
-          <a:prstGeom prst="rect">
-            <a:avLst/>
-          </a:prstGeom>
-          <a:noFill/>
-        </p:spPr>
-        <p:txBody>
-          <a:bodyPr wrap="square">
-            <a:spAutoFit/>
-          </a:bodyPr>
-          <a:lstStyle/>
-          <a:p>
-            <a:pPr>
-              <a:defRPr sz="2800" b="1">
-                <a:solidFill>
-                  <a:srgbClr val="1F3864"/>
-                </a:solidFill>
-              </a:defRPr>
-            </a:pPr>
-            <a:r>
-              <a:t>Limitations &amp; ethics — be a responsible analyst</a:t>
-            </a:r>
-          </a:p>
-        </p:txBody>
-      </p:sp>
-      <p:sp>
-        <p:nvSpPr>
-          <p:cNvPr id="4" name="TextBox 3"/>
-          <p:cNvSpPr txBox="1"/>
-          <p:nvPr/>
-        </p:nvSpPr>
-        <p:spPr>
-          <a:xfrm>
-            <a:off x="731520" y="1463040"/>
-            <a:ext cx="10698480" cy="4937760"/>
-          </a:xfrm>
-          <a:prstGeom prst="rect">
-            <a:avLst/>
-          </a:prstGeom>
-          <a:noFill/>
-        </p:spPr>
-        <p:txBody>
-          <a:bodyPr wrap="square">
-            <a:spAutoFit/>
-          </a:bodyPr>
-          <a:lstStyle/>
-          <a:p>
-            <a:pPr>
-              <a:spcAft>
-                <a:spcPts val="1000"/>
-              </a:spcAft>
-              <a:defRPr sz="1700">
-                <a:solidFill>
-                  <a:srgbClr val="1F3864"/>
-                </a:solidFill>
-              </a:defRPr>
-            </a:pPr>
-            <a:r>
-              <a:t>•  RFM limits:</a:t>
-            </a:r>
-          </a:p>
-          <a:p>
-            <a:pPr lvl="1">
-              <a:spcAft>
-                <a:spcPts val="500"/>
-              </a:spcAft>
-              <a:defRPr sz="1500">
-                <a:solidFill>
-                  <a:srgbClr val="5A5A5A"/>
-                </a:solidFill>
-              </a:defRPr>
-            </a:pPr>
-            <a:r>
-              <a:t>–  Backward-looking; blind to margins, categories, seasonality</a:t>
-            </a:r>
-          </a:p>
-          <a:p>
-            <a:pPr lvl="1">
-              <a:spcAft>
-                <a:spcPts val="500"/>
-              </a:spcAft>
-              <a:defRPr sz="1500">
-                <a:solidFill>
-                  <a:srgbClr val="5A5A5A"/>
-                </a:solidFill>
-              </a:defRPr>
-            </a:pPr>
-            <a:r>
-              <a:t>–  New customers always look 'low value' — don't starve them</a:t>
-            </a:r>
-          </a:p>
-          <a:p>
-            <a:pPr>
-              <a:spcAft>
-                <a:spcPts val="1000"/>
-              </a:spcAft>
-              <a:defRPr sz="1700">
-                <a:solidFill>
-                  <a:srgbClr val="1F3864"/>
-                </a:solidFill>
-              </a:defRPr>
-            </a:pPr>
-            <a:r>
-              <a:t>•  LLM-in-the-loop limits:</a:t>
-            </a:r>
-          </a:p>
-          <a:p>
-            <a:pPr lvl="1">
-              <a:spcAft>
-                <a:spcPts val="500"/>
-              </a:spcAft>
-              <a:defRPr sz="1500">
-                <a:solidFill>
-                  <a:srgbClr val="5A5A5A"/>
-                </a:solidFill>
-              </a:defRPr>
-            </a:pPr>
-            <a:r>
-              <a:t>–  Hallucination: always validate generated numbers against the data</a:t>
-            </a:r>
-          </a:p>
-          <a:p>
-            <a:pPr lvl="1">
-              <a:spcAft>
-                <a:spcPts val="500"/>
-              </a:spcAft>
-              <a:defRPr sz="1500">
-                <a:solidFill>
-                  <a:srgbClr val="5A5A5A"/>
-                </a:solidFill>
-              </a:defRPr>
-            </a:pPr>
-            <a:r>
-              <a:t>–  Same input ≠ same output — log prompts &amp; responses for audit</a:t>
-            </a:r>
-          </a:p>
-          <a:p>
-            <a:pPr>
-              <a:spcAft>
-                <a:spcPts val="1000"/>
-              </a:spcAft>
-              <a:defRPr sz="1700">
-                <a:solidFill>
-                  <a:srgbClr val="1F3864"/>
-                </a:solidFill>
-              </a:defRPr>
-            </a:pPr>
-            <a:r>
-              <a:t>•  Ethics:</a:t>
-            </a:r>
-          </a:p>
-          <a:p>
-            <a:pPr lvl="1">
-              <a:spcAft>
-                <a:spcPts val="500"/>
-              </a:spcAft>
-              <a:defRPr sz="1500">
-                <a:solidFill>
-                  <a:srgbClr val="5A5A5A"/>
-                </a:solidFill>
-              </a:defRPr>
-            </a:pPr>
-            <a:r>
-              <a:t>–  Price/offer discrimination across segments can cross legal lines</a:t>
-            </a:r>
-          </a:p>
-          <a:p>
-            <a:pPr lvl="1">
-              <a:spcAft>
-                <a:spcPts val="500"/>
-              </a:spcAft>
-              <a:defRPr sz="1500">
-                <a:solidFill>
-                  <a:srgbClr val="5A5A5A"/>
-                </a:solidFill>
-              </a:defRPr>
-            </a:pPr>
-            <a:r>
-              <a:t>–  PDPA (SG): purchase histories are personal data — minimise, secure</a:t>
-            </a:r>
-          </a:p>
-          <a:p>
-            <a:pPr lvl="1">
-              <a:spcAft>
-                <a:spcPts val="500"/>
-              </a:spcAft>
-              <a:defRPr sz="1500">
-                <a:solidFill>
-                  <a:srgbClr val="5A5A5A"/>
-                </a:solidFill>
-              </a:defRPr>
-            </a:pPr>
-            <a:r>
-              <a:t>–  'Normal customer' ≠ a person who deserves worse service</a:t>
-            </a:r>
-          </a:p>
-        </p:txBody>
-      </p:sp>
-    </p:spTree>
-  </p:cSld>
-  <p:clrMapOvr>
-    <a:masterClrMapping/>
-  </p:clrMapOvr>
-</p:sld>
-</file>
-
-<file path=ppt/slides/slide36.xml><?xml version="1.0" encoding="utf-8"?>
-<p:sld xmlns:a="http://schemas.openxmlformats.org/drawingml/2006/main" xmlns:p="http://schemas.openxmlformats.org/presentationml/2006/main" xmlns:r="http://schemas.openxmlformats.org/officeDocument/2006/relationships">
-  <p:cSld>
-    <p:bg>
-      <p:bgPr>
-        <a:solidFill>
-          <a:srgbClr val="FFFFFF"/>
-        </a:solidFill>
-        <a:effectLst/>
-      </p:bgPr>
-    </p:bg>
-    <p:spTree>
-      <p:nvGrpSpPr>
-        <p:cNvPr id="1" name=""/>
-        <p:cNvGrpSpPr/>
-        <p:nvPr/>
-      </p:nvGrpSpPr>
-      <p:grpSpPr/>
-      <p:sp>
-        <p:nvSpPr>
-          <p:cNvPr id="2" name="Rectangle 1"/>
-          <p:cNvSpPr/>
-          <p:nvPr/>
-        </p:nvSpPr>
-        <p:spPr>
-          <a:xfrm>
-            <a:off x="0" y="0"/>
-            <a:ext cx="12191695" cy="164592"/>
-          </a:xfrm>
-          <a:prstGeom prst="rect">
-            <a:avLst/>
-          </a:prstGeom>
-          <a:solidFill>
-            <a:srgbClr val="2E86AB"/>
-          </a:solidFill>
-          <a:ln>
-            <a:noFill/>
-          </a:ln>
-        </p:spPr>
-        <p:style>
-          <a:lnRef idx="1">
-            <a:schemeClr val="accent1"/>
-          </a:lnRef>
-          <a:fillRef idx="3">
-            <a:schemeClr val="accent1"/>
-          </a:fillRef>
-          <a:effectRef idx="2">
-            <a:schemeClr val="accent1"/>
-          </a:effectRef>
-          <a:fontRef idx="minor">
-            <a:schemeClr val="lt1"/>
-          </a:fontRef>
-        </p:style>
-        <p:txBody>
-          <a:bodyPr rtlCol="0" anchor="ctr"/>
-          <a:lstStyle/>
-          <a:p>
-            <a:pPr algn="ctr"/>
-          </a:p>
-        </p:txBody>
-      </p:sp>
-      <p:sp>
-        <p:nvSpPr>
-          <p:cNvPr id="3" name="TextBox 2"/>
-          <p:cNvSpPr txBox="1"/>
-          <p:nvPr/>
-        </p:nvSpPr>
-        <p:spPr>
-          <a:xfrm>
-            <a:off x="640080" y="411480"/>
-            <a:ext cx="10972800" cy="822960"/>
-          </a:xfrm>
-          <a:prstGeom prst="rect">
-            <a:avLst/>
-          </a:prstGeom>
-          <a:noFill/>
-        </p:spPr>
-        <p:txBody>
-          <a:bodyPr wrap="square">
-            <a:spAutoFit/>
-          </a:bodyPr>
-          <a:lstStyle/>
-          <a:p>
-            <a:pPr>
-              <a:defRPr sz="2800" b="1">
-                <a:solidFill>
-                  <a:srgbClr val="1F3864"/>
-                </a:solidFill>
-              </a:defRPr>
-            </a:pPr>
-            <a:r>
-              <a:t>Beyond this lecture</a:t>
-            </a:r>
-          </a:p>
-        </p:txBody>
-      </p:sp>
-      <p:sp>
-        <p:nvSpPr>
-          <p:cNvPr id="4" name="TextBox 3"/>
-          <p:cNvSpPr txBox="1"/>
-          <p:nvPr/>
-        </p:nvSpPr>
-        <p:spPr>
-          <a:xfrm>
-            <a:off x="731520" y="1463040"/>
-            <a:ext cx="10698480" cy="4937760"/>
-          </a:xfrm>
-          <a:prstGeom prst="rect">
-            <a:avLst/>
-          </a:prstGeom>
-          <a:noFill/>
-        </p:spPr>
-        <p:txBody>
-          <a:bodyPr wrap="square">
-            <a:spAutoFit/>
-          </a:bodyPr>
-          <a:lstStyle/>
-          <a:p>
-            <a:pPr>
-              <a:spcAft>
-                <a:spcPts val="1000"/>
-              </a:spcAft>
-              <a:defRPr sz="1800">
-                <a:solidFill>
-                  <a:srgbClr val="1F3864"/>
-                </a:solidFill>
-              </a:defRPr>
-            </a:pPr>
-            <a:r>
-              <a:t>•  Upgrades to the analytics:</a:t>
-            </a:r>
-          </a:p>
-          <a:p>
-            <a:pPr lvl="1">
-              <a:spcAft>
-                <a:spcPts val="500"/>
-              </a:spcAft>
-              <a:defRPr sz="1600">
-                <a:solidFill>
-                  <a:srgbClr val="5A5A5A"/>
-                </a:solidFill>
-              </a:defRPr>
-            </a:pPr>
-            <a:r>
-              <a:t>–  RFM → CLV (customer lifetime value) prediction; BG/NBD models</a:t>
-            </a:r>
-          </a:p>
-          <a:p>
-            <a:pPr lvl="1">
-              <a:spcAft>
-                <a:spcPts val="500"/>
-              </a:spcAft>
-              <a:defRPr sz="1600">
-                <a:solidFill>
-                  <a:srgbClr val="5A5A5A"/>
-                </a:solidFill>
-              </a:defRPr>
-            </a:pPr>
-            <a:r>
-              <a:t>–  K-means clustering on R/F/M instead of fixed rules</a:t>
-            </a:r>
-          </a:p>
-          <a:p>
-            <a:pPr>
-              <a:spcAft>
-                <a:spcPts val="1000"/>
-              </a:spcAft>
-              <a:defRPr sz="1800">
-                <a:solidFill>
-                  <a:srgbClr val="1F3864"/>
-                </a:solidFill>
-              </a:defRPr>
-            </a:pPr>
-            <a:r>
-              <a:t>•  Upgrades to the agent:</a:t>
-            </a:r>
-          </a:p>
-          <a:p>
-            <a:pPr lvl="1">
-              <a:spcAft>
-                <a:spcPts val="500"/>
-              </a:spcAft>
-              <a:defRPr sz="1600">
-                <a:solidFill>
-                  <a:srgbClr val="5A5A5A"/>
-                </a:solidFill>
-              </a:defRPr>
-            </a:pPr>
-            <a:r>
-              <a:t>–  Schedule it monthly; let it email the report automatically</a:t>
-            </a:r>
-          </a:p>
-          <a:p>
-            <a:pPr lvl="1">
-              <a:spcAft>
-                <a:spcPts val="500"/>
-              </a:spcAft>
-              <a:defRPr sz="1600">
-                <a:solidFill>
-                  <a:srgbClr val="5A5A5A"/>
-                </a:solidFill>
-              </a:defRPr>
-            </a:pPr>
-            <a:r>
-              <a:t>–  Tool-using LLM agents: let the model decide which analysis to run</a:t>
-            </a:r>
-          </a:p>
-          <a:p>
-            <a:pPr>
-              <a:spcAft>
-                <a:spcPts val="1000"/>
-              </a:spcAft>
-              <a:defRPr sz="1800">
-                <a:solidFill>
-                  <a:srgbClr val="1F3864"/>
-                </a:solidFill>
-              </a:defRPr>
-            </a:pPr>
-            <a:r>
-              <a:t>•  Try it yourself — the full project is yours:</a:t>
-            </a:r>
-          </a:p>
-          <a:p>
-            <a:pPr lvl="1">
-              <a:spcAft>
-                <a:spcPts val="500"/>
-              </a:spcAft>
-              <a:defRPr sz="1600">
-                <a:solidFill>
-                  <a:srgbClr val="5A5A5A"/>
-                </a:solidFill>
-              </a:defRPr>
-            </a:pPr>
-            <a:r>
-              <a:t>–  agent/ (≈300 lines of pandas) + app.py (Streamlit) + sample data</a:t>
-            </a:r>
-          </a:p>
-          <a:p>
-            <a:pPr lvl="1">
-              <a:spcAft>
-                <a:spcPts val="500"/>
-              </a:spcAft>
-              <a:defRPr sz="1600">
-                <a:solidFill>
-                  <a:srgbClr val="5A5A5A"/>
-                </a:solidFill>
-              </a:defRPr>
-            </a:pPr>
-            <a:r>
-              <a:t>–  Swap in any transaction CSV — your e-commerce side project counts!</a:t>
-            </a:r>
-          </a:p>
-        </p:txBody>
-      </p:sp>
-    </p:spTree>
-  </p:cSld>
-  <p:clrMapOvr>
-    <a:masterClrMapping/>
-  </p:clrMapOvr>
-</p:sld>
-</file>
-
-<file path=ppt/slides/slide37.xml><?xml version="1.0" encoding="utf-8"?>
-<p:sld xmlns:a="http://schemas.openxmlformats.org/drawingml/2006/main" xmlns:p="http://schemas.openxmlformats.org/presentationml/2006/main" xmlns:r="http://schemas.openxmlformats.org/officeDocument/2006/relationships">
-  <p:cSld>
-    <p:bg>
-      <p:bgPr>
-        <a:solidFill>
-          <a:srgbClr val="FFFFFF"/>
-        </a:solidFill>
-        <a:effectLst/>
-      </p:bgPr>
-    </p:bg>
-    <p:spTree>
-      <p:nvGrpSpPr>
-        <p:cNvPr id="1" name=""/>
-        <p:cNvGrpSpPr/>
-        <p:nvPr/>
-      </p:nvGrpSpPr>
-      <p:grpSpPr/>
-      <p:sp>
-        <p:nvSpPr>
-          <p:cNvPr id="2" name="Rectangle 1"/>
-          <p:cNvSpPr/>
-          <p:nvPr/>
-        </p:nvSpPr>
-        <p:spPr>
-          <a:xfrm>
-            <a:off x="0" y="0"/>
-            <a:ext cx="12191695" cy="164592"/>
-          </a:xfrm>
-          <a:prstGeom prst="rect">
-            <a:avLst/>
-          </a:prstGeom>
-          <a:solidFill>
-            <a:srgbClr val="2E86AB"/>
-          </a:solidFill>
-          <a:ln>
-            <a:noFill/>
-          </a:ln>
-        </p:spPr>
-        <p:style>
-          <a:lnRef idx="1">
-            <a:schemeClr val="accent1"/>
-          </a:lnRef>
-          <a:fillRef idx="3">
-            <a:schemeClr val="accent1"/>
-          </a:fillRef>
-          <a:effectRef idx="2">
-            <a:schemeClr val="accent1"/>
-          </a:effectRef>
-          <a:fontRef idx="minor">
-            <a:schemeClr val="lt1"/>
-          </a:fontRef>
-        </p:style>
-        <p:txBody>
-          <a:bodyPr rtlCol="0" anchor="ctr"/>
-          <a:lstStyle/>
-          <a:p>
-            <a:pPr algn="ctr"/>
-          </a:p>
-        </p:txBody>
-      </p:sp>
-      <p:sp>
-        <p:nvSpPr>
-          <p:cNvPr id="3" name="TextBox 2"/>
-          <p:cNvSpPr txBox="1"/>
-          <p:nvPr/>
-        </p:nvSpPr>
-        <p:spPr>
-          <a:xfrm>
-            <a:off x="640080" y="411480"/>
-            <a:ext cx="10972800" cy="822960"/>
-          </a:xfrm>
-          <a:prstGeom prst="rect">
-            <a:avLst/>
-          </a:prstGeom>
-          <a:noFill/>
-        </p:spPr>
-        <p:txBody>
-          <a:bodyPr wrap="square">
-            <a:spAutoFit/>
-          </a:bodyPr>
-          <a:lstStyle/>
-          <a:p>
-            <a:pPr>
-              <a:defRPr sz="2800" b="1">
-                <a:solidFill>
-                  <a:srgbClr val="1F3864"/>
-                </a:solidFill>
-              </a:defRPr>
-            </a:pPr>
-            <a:r>
-              <a:t>Key takeaways</a:t>
-            </a:r>
-          </a:p>
-        </p:txBody>
-      </p:sp>
-      <p:sp>
-        <p:nvSpPr>
-          <p:cNvPr id="4" name="TextBox 3"/>
-          <p:cNvSpPr txBox="1"/>
-          <p:nvPr/>
-        </p:nvSpPr>
-        <p:spPr>
-          <a:xfrm>
-            <a:off x="731520" y="1463040"/>
-            <a:ext cx="10698480" cy="4937760"/>
-          </a:xfrm>
-          <a:prstGeom prst="rect">
-            <a:avLst/>
-          </a:prstGeom>
-          <a:noFill/>
-        </p:spPr>
-        <p:txBody>
-          <a:bodyPr wrap="square">
-            <a:spAutoFit/>
-          </a:bodyPr>
-          <a:lstStyle/>
-          <a:p>
-            <a:pPr>
-              <a:spcAft>
-                <a:spcPts val="1000"/>
-              </a:spcAft>
-              <a:defRPr sz="2000">
-                <a:solidFill>
-                  <a:srgbClr val="1F3864"/>
-                </a:solidFill>
-              </a:defRPr>
-            </a:pPr>
-            <a:r>
-              <a:t>•  1.  Customers are not equal — revenue concentrates; act on it</a:t>
-            </a:r>
-          </a:p>
-          <a:p>
-            <a:pPr>
-              <a:spcAft>
-                <a:spcPts val="1000"/>
-              </a:spcAft>
-              <a:defRPr sz="2000">
-                <a:solidFill>
-                  <a:srgbClr val="1F3864"/>
-                </a:solidFill>
-              </a:defRPr>
-            </a:pPr>
-            <a:r>
-              <a:t>•  2.  RFM turns a transaction log into 4 actionable segments with three GROUP BYs</a:t>
-            </a:r>
-          </a:p>
-          <a:p>
-            <a:pPr>
-              <a:spcAft>
-                <a:spcPts val="1000"/>
-              </a:spcAft>
-              <a:defRPr sz="2000">
-                <a:solidFill>
-                  <a:srgbClr val="1F3864"/>
-                </a:solidFill>
-              </a:defRPr>
-            </a:pPr>
-            <a:r>
-              <a:t>•  3.  An AI agent = deterministic pipeline for correctness + LLM for judgement &amp; language</a:t>
-            </a:r>
-          </a:p>
-          <a:p>
-            <a:pPr>
-              <a:spcAft>
-                <a:spcPts val="1000"/>
-              </a:spcAft>
-              <a:defRPr sz="2000">
-                <a:solidFill>
-                  <a:srgbClr val="1F3864"/>
-                </a:solidFill>
-              </a:defRPr>
-            </a:pPr>
-            <a:r>
-              <a:t>•  4.  Always keep the audit trail: logs make agents trustworthy</a:t>
-            </a:r>
-          </a:p>
-          <a:p>
-            <a:pPr>
-              <a:spcAft>
-                <a:spcPts val="1000"/>
-              </a:spcAft>
-              <a:defRPr sz="2000">
-                <a:solidFill>
-                  <a:srgbClr val="1F3864"/>
-                </a:solidFill>
-              </a:defRPr>
-            </a:pPr>
-            <a:r>
-              <a:t>•  5.  Strategy without measurement is decoration — A/B test per segment</a:t>
-            </a:r>
-          </a:p>
-        </p:txBody>
-      </p:sp>
-    </p:spTree>
-  </p:cSld>
-  <p:clrMapOvr>
-    <a:masterClrMapping/>
-  </p:clrMapOvr>
-</p:sld>
-</file>
-
-<file path=ppt/slides/slide38.xml><?xml version="1.0" encoding="utf-8"?>
-<p:sld xmlns:a="http://schemas.openxmlformats.org/drawingml/2006/main" xmlns:p="http://schemas.openxmlformats.org/presentationml/2006/main" xmlns:r="http://schemas.openxmlformats.org/officeDocument/2006/relationships">
-  <p:cSld>
-    <p:bg>
-      <p:bgPr>
-        <a:solidFill>
-          <a:srgbClr val="1F3864"/>
-        </a:solidFill>
-        <a:effectLst/>
-      </p:bgPr>
-    </p:bg>
-    <p:spTree>
-      <p:nvGrpSpPr>
-        <p:cNvPr id="1" name=""/>
-        <p:cNvGrpSpPr/>
-        <p:nvPr/>
-      </p:nvGrpSpPr>
-      <p:grpSpPr/>
-      <p:sp>
-        <p:nvSpPr>
-          <p:cNvPr id="2" name="TextBox 1"/>
-          <p:cNvSpPr txBox="1"/>
-          <p:nvPr/>
-        </p:nvSpPr>
-        <p:spPr>
-          <a:xfrm>
-            <a:off x="822960" y="2194560"/>
-            <a:ext cx="10515600" cy="1645920"/>
-          </a:xfrm>
-          <a:prstGeom prst="rect">
-            <a:avLst/>
-          </a:prstGeom>
-          <a:noFill/>
-        </p:spPr>
-        <p:txBody>
-          <a:bodyPr wrap="square">
-            <a:spAutoFit/>
-          </a:bodyPr>
-          <a:lstStyle/>
-          <a:p>
-            <a:pPr>
-              <a:defRPr sz="4000" b="1">
-                <a:solidFill>
-                  <a:srgbClr val="FFFFFF"/>
-                </a:solidFill>
-              </a:defRPr>
-            </a:pPr>
-            <a:r>
-              <a:t>Thank you — questions?</a:t>
-            </a:r>
-          </a:p>
-        </p:txBody>
-      </p:sp>
-      <p:sp>
-        <p:nvSpPr>
-          <p:cNvPr id="3" name="TextBox 2"/>
-          <p:cNvSpPr txBox="1"/>
-          <p:nvPr/>
-        </p:nvSpPr>
-        <p:spPr>
-          <a:xfrm>
-            <a:off x="822960" y="3931920"/>
-            <a:ext cx="10515600" cy="914400"/>
-          </a:xfrm>
-          <a:prstGeom prst="rect">
-            <a:avLst/>
-          </a:prstGeom>
-          <a:noFill/>
-        </p:spPr>
-        <p:txBody>
-          <a:bodyPr wrap="square">
-            <a:spAutoFit/>
-          </a:bodyPr>
-          <a:lstStyle/>
-          <a:p>
-            <a:pPr>
-              <a:defRPr sz="2000">
-                <a:solidFill>
-                  <a:srgbClr val="BFD7EA"/>
-                </a:solidFill>
-              </a:defRPr>
-            </a:pPr>
-            <a:r>
-              <a:t>Slides, code and dataset: Documents/nus_lecture</a:t>
-            </a:r>
-          </a:p>
-        </p:txBody>
-      </p:sp>
-      <p:sp>
-        <p:nvSpPr>
-          <p:cNvPr id="4" name="TextBox 3"/>
-          <p:cNvSpPr txBox="1"/>
-          <p:nvPr/>
-        </p:nvSpPr>
-        <p:spPr>
-          <a:xfrm>
-            <a:off x="822960" y="5943600"/>
-            <a:ext cx="10515600" cy="548640"/>
-          </a:xfrm>
-          <a:prstGeom prst="rect">
-            <a:avLst/>
-          </a:prstGeom>
-          <a:noFill/>
-        </p:spPr>
-        <p:txBody>
-          <a:bodyPr wrap="square">
-            <a:spAutoFit/>
-          </a:bodyPr>
-          <a:lstStyle/>
-          <a:p>
-            <a:pPr>
-              <a:defRPr sz="1400">
-                <a:solidFill>
-                  <a:srgbClr val="9FB7CA"/>
-                </a:solidFill>
-              </a:defRPr>
-            </a:pPr>
-            <a:r>
-              <a:t>TikTok Engineer (AI Agents) · PhD Student, NTU Singapore</a:t>
-            </a:r>
-          </a:p>
-        </p:txBody>
-      </p:sp>
-    </p:spTree>
-  </p:cSld>
-  <p:clrMapOvr>
-    <a:masterClrMapping/>
-  </p:clrMapOvr>
-</p:sld>
-</file>
-
-<file path=ppt/slides/slide4.xml><?xml version="1.0" encoding="utf-8"?>
-<p:sld xmlns:a="http://schemas.openxmlformats.org/drawingml/2006/main" xmlns:p="http://schemas.openxmlformats.org/presentationml/2006/main" xmlns:r="http://schemas.openxmlformats.org/officeDocument/2006/relationships">
-  <p:cSld>
-    <p:bg>
-      <p:bgPr>
-        <a:solidFill>
-          <a:srgbClr val="2E86AB"/>
-        </a:solidFill>
-        <a:effectLst/>
-      </p:bgPr>
-    </p:bg>
-    <p:spTree>
-      <p:nvGrpSpPr>
-        <p:cNvPr id="1" name=""/>
-        <p:cNvGrpSpPr/>
-        <p:nvPr/>
-      </p:nvGrpSpPr>
-      <p:grpSpPr/>
-      <p:sp>
-        <p:nvSpPr>
-          <p:cNvPr id="2" name="TextBox 1"/>
-          <p:cNvSpPr txBox="1"/>
-          <p:nvPr/>
-        </p:nvSpPr>
-        <p:spPr>
-          <a:xfrm>
-            <a:off x="822960" y="2011680"/>
-            <a:ext cx="10515600" cy="640080"/>
-          </a:xfrm>
-          <a:prstGeom prst="rect">
-            <a:avLst/>
-          </a:prstGeom>
-          <a:noFill/>
-        </p:spPr>
-        <p:txBody>
-          <a:bodyPr wrap="square">
-            <a:spAutoFit/>
-          </a:bodyPr>
-          <a:lstStyle/>
-          <a:p>
-            <a:pPr>
-              <a:defRPr sz="1800">
-                <a:solidFill>
-                  <a:srgbClr val="D9ECF4"/>
-                </a:solidFill>
-              </a:defRPr>
-            </a:pPr>
-            <a:r>
-              <a:t>Part 1   ·   ~15 min</a:t>
-            </a:r>
-          </a:p>
-        </p:txBody>
-      </p:sp>
-      <p:sp>
-        <p:nvSpPr>
-          <p:cNvPr id="3" name="TextBox 2"/>
-          <p:cNvSpPr txBox="1"/>
-          <p:nvPr/>
-        </p:nvSpPr>
-        <p:spPr>
-          <a:xfrm>
-            <a:off x="822960" y="2743200"/>
-            <a:ext cx="10515600" cy="1828800"/>
-          </a:xfrm>
-          <a:prstGeom prst="rect">
-            <a:avLst/>
-          </a:prstGeom>
-          <a:noFill/>
-        </p:spPr>
-        <p:txBody>
-          <a:bodyPr wrap="square">
-            <a:spAutoFit/>
-          </a:bodyPr>
-          <a:lstStyle/>
-          <a:p>
-            <a:pPr>
-              <a:defRPr sz="3800" b="1">
-                <a:solidFill>
-                  <a:srgbClr val="FFFFFF"/>
-                </a:solidFill>
-              </a:defRPr>
-            </a:pPr>
-            <a:r>
-              <a:t>The business problem:</a:t>
-            </a:r>
-            <a:br/>
-            <a:r>
-              <a:t>why segment customers?</a:t>
-            </a:r>
-          </a:p>
-        </p:txBody>
-      </p:sp>
-    </p:spTree>
-  </p:cSld>
-  <p:clrMapOvr>
-    <a:masterClrMapping/>
-  </p:clrMapOvr>
-</p:sld>
-</file>
-
-<file path=ppt/slides/slide5.xml><?xml version="1.0" encoding="utf-8"?>
-<p:sld xmlns:a="http://schemas.openxmlformats.org/drawingml/2006/main" xmlns:p="http://schemas.openxmlformats.org/presentationml/2006/main" xmlns:r="http://schemas.openxmlformats.org/officeDocument/2006/relationships">
-  <p:cSld>
-    <p:bg>
-      <p:bgPr>
-        <a:solidFill>
-          <a:srgbClr val="FFFFFF"/>
-        </a:solidFill>
-        <a:effectLst/>
-      </p:bgPr>
-    </p:bg>
-    <p:spTree>
-      <p:nvGrpSpPr>
-        <p:cNvPr id="1" name=""/>
-        <p:cNvGrpSpPr/>
-        <p:nvPr/>
-      </p:nvGrpSpPr>
-      <p:grpSpPr/>
-      <p:sp>
-        <p:nvSpPr>
-          <p:cNvPr id="2" name="Rectangle 1"/>
-          <p:cNvSpPr/>
-          <p:nvPr/>
-        </p:nvSpPr>
-        <p:spPr>
-          <a:xfrm>
-            <a:off x="0" y="0"/>
-            <a:ext cx="12191695" cy="164592"/>
-          </a:xfrm>
-          <a:prstGeom prst="rect">
-            <a:avLst/>
-          </a:prstGeom>
-          <a:solidFill>
-            <a:srgbClr val="2E86AB"/>
-          </a:solidFill>
-          <a:ln>
-            <a:noFill/>
-          </a:ln>
-        </p:spPr>
-        <p:style>
-          <a:lnRef idx="1">
-            <a:schemeClr val="accent1"/>
-          </a:lnRef>
-          <a:fillRef idx="3">
-            <a:schemeClr val="accent1"/>
-          </a:fillRef>
-          <a:effectRef idx="2">
-            <a:schemeClr val="accent1"/>
-          </a:effectRef>
-          <a:fontRef idx="minor">
-            <a:schemeClr val="lt1"/>
-          </a:fontRef>
-        </p:style>
-        <p:txBody>
-          <a:bodyPr rtlCol="0" anchor="ctr"/>
-          <a:lstStyle/>
-          <a:p>
-            <a:pPr algn="ctr"/>
-          </a:p>
-        </p:txBody>
-      </p:sp>
-      <p:sp>
-        <p:nvSpPr>
-          <p:cNvPr id="3" name="TextBox 2"/>
-          <p:cNvSpPr txBox="1"/>
-          <p:nvPr/>
-        </p:nvSpPr>
-        <p:spPr>
-          <a:xfrm>
-            <a:off x="640080" y="411480"/>
-            <a:ext cx="10972800" cy="822960"/>
-          </a:xfrm>
-          <a:prstGeom prst="rect">
-            <a:avLst/>
-          </a:prstGeom>
-          <a:noFill/>
-        </p:spPr>
-        <p:txBody>
-          <a:bodyPr wrap="square">
-            <a:spAutoFit/>
-          </a:bodyPr>
-          <a:lstStyle/>
-          <a:p>
-            <a:pPr>
-              <a:defRPr sz="2800" b="1">
-                <a:solidFill>
-                  <a:srgbClr val="1F3864"/>
-                </a:solidFill>
-              </a:defRPr>
-            </a:pPr>
-            <a:r>
-              <a:t>Retail's oldest marketing mistake</a:t>
-            </a:r>
-          </a:p>
-        </p:txBody>
-      </p:sp>
-      <p:sp>
-        <p:nvSpPr>
-          <p:cNvPr id="4" name="TextBox 3"/>
-          <p:cNvSpPr txBox="1"/>
-          <p:nvPr/>
-        </p:nvSpPr>
-        <p:spPr>
-          <a:xfrm>
-            <a:off x="731520" y="1463040"/>
-            <a:ext cx="10698480" cy="4937760"/>
-          </a:xfrm>
-          <a:prstGeom prst="rect">
-            <a:avLst/>
-          </a:prstGeom>
-          <a:noFill/>
-        </p:spPr>
-        <p:txBody>
-          <a:bodyPr wrap="square">
-            <a:spAutoFit/>
-          </a:bodyPr>
-          <a:lstStyle/>
-          <a:p>
-            <a:pPr>
-              <a:spcAft>
-                <a:spcPts val="1000"/>
-              </a:spcAft>
-              <a:defRPr sz="1800">
-                <a:solidFill>
-                  <a:srgbClr val="1F3864"/>
-                </a:solidFill>
-              </a:defRPr>
-            </a:pPr>
-            <a:r>
-              <a:t>•  “Blast” marketing: the same email, discount, and ad for every customer</a:t>
-            </a:r>
-          </a:p>
-          <a:p>
-            <a:pPr lvl="1">
-              <a:spcAft>
-                <a:spcPts val="500"/>
-              </a:spcAft>
-              <a:defRPr sz="1600">
-                <a:solidFill>
-                  <a:srgbClr val="5A5A5A"/>
-                </a:solidFill>
-              </a:defRPr>
-            </a:pPr>
-            <a:r>
-              <a:t>–  A loyal VIP gets the same 10% coupon as someone who bought once in 2023</a:t>
-            </a:r>
-          </a:p>
-          <a:p>
-            <a:pPr>
-              <a:spcAft>
-                <a:spcPts val="1000"/>
-              </a:spcAft>
-              <a:defRPr sz="1800">
-                <a:solidFill>
-                  <a:srgbClr val="1F3864"/>
-                </a:solidFill>
-              </a:defRPr>
-            </a:pPr>
-            <a:r>
-              <a:t>•  Three predictable failures:</a:t>
-            </a:r>
-          </a:p>
-          <a:p>
-            <a:pPr lvl="1">
-              <a:spcAft>
-                <a:spcPts val="500"/>
-              </a:spcAft>
-              <a:defRPr sz="1600">
-                <a:solidFill>
-                  <a:srgbClr val="5A5A5A"/>
-                </a:solidFill>
-              </a:defRPr>
-            </a:pPr>
-            <a:r>
-              <a:t>–  Wasted spend — discounts given to people who would buy anyway</a:t>
-            </a:r>
-          </a:p>
-          <a:p>
-            <a:pPr lvl="1">
-              <a:spcAft>
-                <a:spcPts val="500"/>
-              </a:spcAft>
-              <a:defRPr sz="1600">
-                <a:solidFill>
-                  <a:srgbClr val="5A5A5A"/>
-                </a:solidFill>
-              </a:defRPr>
-            </a:pPr>
-            <a:r>
-              <a:t>–  Churn — your best customers feel like strangers</a:t>
-            </a:r>
-          </a:p>
-          <a:p>
-            <a:pPr lvl="1">
-              <a:spcAft>
-                <a:spcPts val="500"/>
-              </a:spcAft>
-              <a:defRPr sz="1600">
-                <a:solidFill>
-                  <a:srgbClr val="5A5A5A"/>
-                </a:solidFill>
-              </a:defRPr>
-            </a:pPr>
-            <a:r>
-              <a:t>–  Spam fatigue — low-intent customers unsubscribe</a:t>
-            </a:r>
-          </a:p>
-          <a:p>
-            <a:pPr>
-              <a:spcAft>
-                <a:spcPts val="1000"/>
-              </a:spcAft>
-              <a:defRPr sz="1800">
-                <a:solidFill>
-                  <a:srgbClr val="1F3864"/>
-                </a:solidFill>
-              </a:defRPr>
-            </a:pPr>
-            <a:r>
-              <a:t>•  Marketing budgets are finite → you must decide WHO gets WHAT</a:t>
-            </a:r>
-          </a:p>
-        </p:txBody>
-      </p:sp>
-    </p:spTree>
-  </p:cSld>
-  <p:clrMapOvr>
-    <a:masterClrMapping/>
-  </p:clrMapOvr>
-</p:sld>
-</file>
-
-<file path=ppt/slides/slide6.xml><?xml version="1.0" encoding="utf-8"?>
-<p:sld xmlns:a="http://schemas.openxmlformats.org/drawingml/2006/main" xmlns:p="http://schemas.openxmlformats.org/presentationml/2006/main" xmlns:r="http://schemas.openxmlformats.org/officeDocument/2006/relationships">
-  <p:cSld>
-    <p:bg>
-      <p:bgPr>
-        <a:solidFill>
-          <a:srgbClr val="FFFFFF"/>
-        </a:solidFill>
-        <a:effectLst/>
-      </p:bgPr>
-    </p:bg>
-    <p:spTree>
-      <p:nvGrpSpPr>
-        <p:cNvPr id="1" name=""/>
-        <p:cNvGrpSpPr/>
-        <p:nvPr/>
-      </p:nvGrpSpPr>
-      <p:grpSpPr/>
-      <p:sp>
-        <p:nvSpPr>
-          <p:cNvPr id="2" name="Rectangle 1"/>
-          <p:cNvSpPr/>
-          <p:nvPr/>
-        </p:nvSpPr>
-        <p:spPr>
-          <a:xfrm>
-            <a:off x="0" y="0"/>
-            <a:ext cx="12191695" cy="164592"/>
-          </a:xfrm>
-          <a:prstGeom prst="rect">
-            <a:avLst/>
-          </a:prstGeom>
-          <a:solidFill>
-            <a:srgbClr val="2E86AB"/>
-          </a:solidFill>
-          <a:ln>
-            <a:noFill/>
-          </a:ln>
-        </p:spPr>
-        <p:style>
-          <a:lnRef idx="1">
-            <a:schemeClr val="accent1"/>
-          </a:lnRef>
-          <a:fillRef idx="3">
-            <a:schemeClr val="accent1"/>
-          </a:fillRef>
-          <a:effectRef idx="2">
-            <a:schemeClr val="accent1"/>
-          </a:effectRef>
-          <a:fontRef idx="minor">
-            <a:schemeClr val="lt1"/>
-          </a:fontRef>
-        </p:style>
-        <p:txBody>
-          <a:bodyPr rtlCol="0" anchor="ctr"/>
-          <a:lstStyle/>
-          <a:p>
-            <a:pPr algn="ctr"/>
-          </a:p>
-        </p:txBody>
-      </p:sp>
-      <p:sp>
-        <p:nvSpPr>
-          <p:cNvPr id="3" name="TextBox 2"/>
-          <p:cNvSpPr txBox="1"/>
-          <p:nvPr/>
-        </p:nvSpPr>
-        <p:spPr>
-          <a:xfrm>
-            <a:off x="640080" y="411480"/>
-            <a:ext cx="10972800" cy="822960"/>
-          </a:xfrm>
-          <a:prstGeom prst="rect">
-            <a:avLst/>
-          </a:prstGeom>
-          <a:noFill/>
-        </p:spPr>
-        <p:txBody>
-          <a:bodyPr wrap="square">
-            <a:spAutoFit/>
-          </a:bodyPr>
-          <a:lstStyle/>
-          <a:p>
-            <a:pPr>
-              <a:defRPr sz="2800" b="1">
-                <a:solidFill>
-                  <a:srgbClr val="1F3864"/>
-                </a:solidFill>
-              </a:defRPr>
-            </a:pPr>
-            <a:r>
-              <a:t>Not all customers are equal</a:t>
-            </a:r>
-          </a:p>
-        </p:txBody>
-      </p:sp>
-      <p:sp>
-        <p:nvSpPr>
-          <p:cNvPr id="4" name="TextBox 3"/>
-          <p:cNvSpPr txBox="1"/>
-          <p:nvPr/>
-        </p:nvSpPr>
-        <p:spPr>
-          <a:xfrm>
-            <a:off x="731520" y="1463040"/>
-            <a:ext cx="10698480" cy="4937760"/>
-          </a:xfrm>
-          <a:prstGeom prst="rect">
-            <a:avLst/>
-          </a:prstGeom>
-          <a:noFill/>
-        </p:spPr>
-        <p:txBody>
-          <a:bodyPr wrap="square">
-            <a:spAutoFit/>
-          </a:bodyPr>
-          <a:lstStyle/>
-          <a:p>
-            <a:pPr>
-              <a:spcAft>
-                <a:spcPts val="1000"/>
-              </a:spcAft>
-              <a:defRPr sz="1800">
-                <a:solidFill>
-                  <a:srgbClr val="1F3864"/>
-                </a:solidFill>
-              </a:defRPr>
-            </a:pPr>
-            <a:r>
-              <a:t>•  A small share of customers usually drives most of the revenue</a:t>
-            </a:r>
-          </a:p>
-          <a:p>
-            <a:pPr lvl="1">
-              <a:spcAft>
-                <a:spcPts val="500"/>
-              </a:spcAft>
-              <a:defRPr sz="1600">
-                <a:solidFill>
-                  <a:srgbClr val="5A5A5A"/>
-                </a:solidFill>
-              </a:defRPr>
-            </a:pPr>
-            <a:r>
-              <a:t>–  In our demo dataset: ~13% of customers generate ~40% of revenue</a:t>
-            </a:r>
-          </a:p>
-          <a:p>
-            <a:pPr lvl="1">
-              <a:spcAft>
-                <a:spcPts val="500"/>
-              </a:spcAft>
-              <a:defRPr sz="1600">
-                <a:solidFill>
-                  <a:srgbClr val="5A5A5A"/>
-                </a:solidFill>
-              </a:defRPr>
-            </a:pPr>
-            <a:r>
-              <a:t>–  Industry rule of thumb: the 'Pareto' 80/20 pattern</a:t>
-            </a:r>
-          </a:p>
-          <a:p>
-            <a:pPr>
-              <a:spcAft>
-                <a:spcPts val="1000"/>
-              </a:spcAft>
-              <a:defRPr sz="1800">
-                <a:solidFill>
-                  <a:srgbClr val="1F3864"/>
-                </a:solidFill>
-              </a:defRPr>
-            </a:pPr>
-            <a:r>
-              <a:t>•  Acquiring a new customer costs 5–7× more than retaining one</a:t>
-            </a:r>
-          </a:p>
-          <a:p>
-            <a:pPr>
-              <a:spcAft>
-                <a:spcPts val="1000"/>
-              </a:spcAft>
-              <a:defRPr sz="1800">
-                <a:solidFill>
-                  <a:srgbClr val="1F3864"/>
-                </a:solidFill>
-              </a:defRPr>
-            </a:pPr>
-            <a:r>
-              <a:t>•  Implication: treat customers differently, deliberately</a:t>
-            </a:r>
-          </a:p>
-          <a:p>
-            <a:pPr lvl="1">
-              <a:spcAft>
-                <a:spcPts val="500"/>
-              </a:spcAft>
-              <a:defRPr sz="1600">
-                <a:solidFill>
-                  <a:srgbClr val="5A5A5A"/>
-                </a:solidFill>
-              </a:defRPr>
-            </a:pPr>
-            <a:r>
-              <a:t>–  → that requires a way to GROUP customers by behaviour</a:t>
-            </a:r>
-          </a:p>
-        </p:txBody>
-      </p:sp>
-    </p:spTree>
-  </p:cSld>
-  <p:clrMapOvr>
-    <a:masterClrMapping/>
-  </p:clrMapOvr>
-</p:sld>
-</file>
-
-<file path=ppt/slides/slide7.xml><?xml version="1.0" encoding="utf-8"?>
-<p:sld xmlns:a="http://schemas.openxmlformats.org/drawingml/2006/main" xmlns:p="http://schemas.openxmlformats.org/presentationml/2006/main" xmlns:r="http://schemas.openxmlformats.org/officeDocument/2006/relationships">
-  <p:cSld>
-    <p:bg>
-      <p:bgPr>
-        <a:solidFill>
-          <a:srgbClr val="FFFFFF"/>
-        </a:solidFill>
-        <a:effectLst/>
-      </p:bgPr>
-    </p:bg>
-    <p:spTree>
-      <p:nvGrpSpPr>
-        <p:cNvPr id="1" name=""/>
-        <p:cNvGrpSpPr/>
-        <p:nvPr/>
-      </p:nvGrpSpPr>
-      <p:grpSpPr/>
-      <p:sp>
-        <p:nvSpPr>
-          <p:cNvPr id="2" name="Rectangle 1"/>
-          <p:cNvSpPr/>
-          <p:nvPr/>
-        </p:nvSpPr>
-        <p:spPr>
-          <a:xfrm>
-            <a:off x="0" y="0"/>
-            <a:ext cx="12191695" cy="164592"/>
-          </a:xfrm>
-          <a:prstGeom prst="rect">
-            <a:avLst/>
-          </a:prstGeom>
-          <a:solidFill>
-            <a:srgbClr val="2E86AB"/>
-          </a:solidFill>
-          <a:ln>
-            <a:noFill/>
-          </a:ln>
-        </p:spPr>
-        <p:style>
-          <a:lnRef idx="1">
-            <a:schemeClr val="accent1"/>
-          </a:lnRef>
-          <a:fillRef idx="3">
-            <a:schemeClr val="accent1"/>
-          </a:fillRef>
-          <a:effectRef idx="2">
-            <a:schemeClr val="accent1"/>
-          </a:effectRef>
-          <a:fontRef idx="minor">
-            <a:schemeClr val="lt1"/>
-          </a:fontRef>
-        </p:style>
-        <p:txBody>
-          <a:bodyPr rtlCol="0" anchor="ctr"/>
-          <a:lstStyle/>
-          <a:p>
-            <a:pPr algn="ctr"/>
-          </a:p>
-        </p:txBody>
-      </p:sp>
-      <p:sp>
-        <p:nvSpPr>
-          <p:cNvPr id="3" name="TextBox 2"/>
-          <p:cNvSpPr txBox="1"/>
-          <p:nvPr/>
-        </p:nvSpPr>
-        <p:spPr>
-          <a:xfrm>
-            <a:off x="640080" y="411480"/>
-            <a:ext cx="10972800" cy="822960"/>
-          </a:xfrm>
-          <a:prstGeom prst="rect">
-            <a:avLst/>
-          </a:prstGeom>
-          <a:noFill/>
-        </p:spPr>
-        <p:txBody>
-          <a:bodyPr wrap="square">
-            <a:spAutoFit/>
-          </a:bodyPr>
-          <a:lstStyle/>
-          <a:p>
-            <a:pPr>
-              <a:defRPr sz="2800" b="1">
-                <a:solidFill>
-                  <a:srgbClr val="1F3864"/>
-                </a:solidFill>
-              </a:defRPr>
-            </a:pPr>
-            <a:r>
-              <a:t>Customer segmentation in one sentence</a:t>
-            </a:r>
-          </a:p>
-        </p:txBody>
-      </p:sp>
-      <p:sp>
-        <p:nvSpPr>
-          <p:cNvPr id="4" name="TextBox 3"/>
-          <p:cNvSpPr txBox="1"/>
-          <p:nvPr/>
-        </p:nvSpPr>
-        <p:spPr>
-          <a:xfrm>
-            <a:off x="731520" y="1463040"/>
-            <a:ext cx="10698480" cy="4937760"/>
-          </a:xfrm>
-          <a:prstGeom prst="rect">
-            <a:avLst/>
-          </a:prstGeom>
-          <a:noFill/>
-        </p:spPr>
-        <p:txBody>
-          <a:bodyPr wrap="square">
-            <a:spAutoFit/>
-          </a:bodyPr>
-          <a:lstStyle/>
-          <a:p>
-            <a:pPr>
-              <a:spcAft>
-                <a:spcPts val="1000"/>
-              </a:spcAft>
-              <a:defRPr sz="1800">
-                <a:solidFill>
-                  <a:srgbClr val="1F3864"/>
-                </a:solidFill>
-              </a:defRPr>
-            </a:pPr>
-            <a:r>
-              <a:t>•  Segmentation = splitting your customer base into groups that behave similarly, so each group can be served differently</a:t>
-            </a:r>
-          </a:p>
-          <a:p>
-            <a:pPr>
-              <a:spcAft>
-                <a:spcPts val="1000"/>
-              </a:spcAft>
-              <a:defRPr sz="1800">
-                <a:solidFill>
-                  <a:srgbClr val="1F3864"/>
-                </a:solidFill>
-              </a:defRPr>
-            </a:pPr>
-            <a:r>
-              <a:t>•  Common bases for segmentation:</a:t>
-            </a:r>
-          </a:p>
-          <a:p>
-            <a:pPr lvl="1">
-              <a:spcAft>
-                <a:spcPts val="500"/>
-              </a:spcAft>
-              <a:defRPr sz="1600">
-                <a:solidFill>
-                  <a:srgbClr val="5A5A5A"/>
-                </a:solidFill>
-              </a:defRPr>
-            </a:pPr>
-            <a:r>
-              <a:t>–  Demographic — age, location, income</a:t>
-            </a:r>
-          </a:p>
-          <a:p>
-            <a:pPr lvl="1">
-              <a:spcAft>
-                <a:spcPts val="500"/>
-              </a:spcAft>
-              <a:defRPr sz="1600">
-                <a:solidFill>
-                  <a:srgbClr val="5A5A5A"/>
-                </a:solidFill>
-              </a:defRPr>
-            </a:pPr>
-            <a:r>
-              <a:t>–  Psychographic — lifestyle, values</a:t>
-            </a:r>
-          </a:p>
-          <a:p>
-            <a:pPr lvl="1">
-              <a:spcAft>
-                <a:spcPts val="500"/>
-              </a:spcAft>
-              <a:defRPr sz="1600">
-                <a:solidFill>
-                  <a:srgbClr val="5A5A5A"/>
-                </a:solidFill>
-              </a:defRPr>
-            </a:pPr>
-            <a:r>
-              <a:t>–  Behavioural — what people actually DO (purchases, visits, clicks)</a:t>
-            </a:r>
-          </a:p>
-          <a:p>
-            <a:pPr>
-              <a:spcAft>
-                <a:spcPts val="1000"/>
-              </a:spcAft>
-              <a:defRPr sz="1800">
-                <a:solidFill>
-                  <a:srgbClr val="1F3864"/>
-                </a:solidFill>
-              </a:defRPr>
-            </a:pPr>
-            <a:r>
-              <a:t>•  Behavioural data wins in retail: it is objective, abundant, and already in your order database</a:t>
-            </a:r>
-          </a:p>
-          <a:p>
-            <a:pPr>
-              <a:spcAft>
-                <a:spcPts val="1000"/>
-              </a:spcAft>
-              <a:defRPr sz="1800">
-                <a:solidFill>
-                  <a:srgbClr val="1F3864"/>
-                </a:solidFill>
-              </a:defRPr>
-            </a:pPr>
-            <a:r>
-              <a:t>•  RFM is the classic behavioural segmentation — invented for catalogue mail-order in the 1990s, still everywhere today</a:t>
-            </a:r>
-          </a:p>
-        </p:txBody>
-      </p:sp>
-    </p:spTree>
-  </p:cSld>
-  <p:clrMapOvr>
-    <a:masterClrMapping/>
-  </p:clrMapOvr>
-</p:sld>
-</file>
-
-<file path=ppt/slides/slide8.xml><?xml version="1.0" encoding="utf-8"?>
-<p:sld xmlns:a="http://schemas.openxmlformats.org/drawingml/2006/main" xmlns:p="http://schemas.openxmlformats.org/presentationml/2006/main" xmlns:r="http://schemas.openxmlformats.org/officeDocument/2006/relationships">
-  <p:cSld>
-    <p:bg>
-      <p:bgPr>
-        <a:solidFill>
-          <a:srgbClr val="2E86AB"/>
-        </a:solidFill>
-        <a:effectLst/>
-      </p:bgPr>
-    </p:bg>
-    <p:spTree>
-      <p:nvGrpSpPr>
-        <p:cNvPr id="1" name=""/>
-        <p:cNvGrpSpPr/>
-        <p:nvPr/>
-      </p:nvGrpSpPr>
-      <p:grpSpPr/>
-      <p:sp>
-        <p:nvSpPr>
-          <p:cNvPr id="2" name="TextBox 1"/>
-          <p:cNvSpPr txBox="1"/>
-          <p:nvPr/>
-        </p:nvSpPr>
-        <p:spPr>
-          <a:xfrm>
-            <a:off x="822960" y="2011680"/>
-            <a:ext cx="10515600" cy="640080"/>
-          </a:xfrm>
-          <a:prstGeom prst="rect">
-            <a:avLst/>
-          </a:prstGeom>
-          <a:noFill/>
-        </p:spPr>
-        <p:txBody>
-          <a:bodyPr wrap="square">
-            <a:spAutoFit/>
-          </a:bodyPr>
-          <a:lstStyle/>
-          <a:p>
-            <a:pPr>
-              <a:defRPr sz="1800">
-                <a:solidFill>
-                  <a:srgbClr val="D9ECF4"/>
-                </a:solidFill>
-              </a:defRPr>
-            </a:pPr>
-            <a:r>
-              <a:t>Part 2   ·   ~25 min</a:t>
-            </a:r>
-          </a:p>
-        </p:txBody>
-      </p:sp>
-      <p:sp>
-        <p:nvSpPr>
-          <p:cNvPr id="3" name="TextBox 2"/>
-          <p:cNvSpPr txBox="1"/>
-          <p:nvPr/>
-        </p:nvSpPr>
-        <p:spPr>
-          <a:xfrm>
-            <a:off x="822960" y="2743200"/>
-            <a:ext cx="10515600" cy="1828800"/>
-          </a:xfrm>
-          <a:prstGeom prst="rect">
-            <a:avLst/>
-          </a:prstGeom>
-          <a:noFill/>
-        </p:spPr>
-        <p:txBody>
-          <a:bodyPr wrap="square">
-            <a:spAutoFit/>
-          </a:bodyPr>
-          <a:lstStyle/>
-          <a:p>
-            <a:pPr>
-              <a:defRPr sz="3800" b="1">
-                <a:solidFill>
-                  <a:srgbClr val="FFFFFF"/>
-                </a:solidFill>
-              </a:defRPr>
-            </a:pPr>
-            <a:r>
               <a:t>RFM fundamentals</a:t>
-            </a:r>
-          </a:p>
-        </p:txBody>
-      </p:sp>
-    </p:spTree>
-  </p:cSld>
-  <p:clrMapOvr>
-    <a:masterClrMapping/>
-  </p:clrMapOvr>
-</p:sld>
-</file>
-
-<file path=ppt/slides/slide9.xml><?xml version="1.0" encoding="utf-8"?>
-<p:sld xmlns:a="http://schemas.openxmlformats.org/drawingml/2006/main" xmlns:p="http://schemas.openxmlformats.org/presentationml/2006/main" xmlns:r="http://schemas.openxmlformats.org/officeDocument/2006/relationships">
-  <p:cSld>
-    <p:bg>
-      <p:bgPr>
-        <a:solidFill>
-          <a:srgbClr val="FFFFFF"/>
-        </a:solidFill>
-        <a:effectLst/>
-      </p:bgPr>
-    </p:bg>
-    <p:spTree>
-      <p:nvGrpSpPr>
-        <p:cNvPr id="1" name=""/>
-        <p:cNvGrpSpPr/>
-        <p:nvPr/>
-      </p:nvGrpSpPr>
-      <p:grpSpPr/>
-      <p:sp>
-        <p:nvSpPr>
-          <p:cNvPr id="2" name="Rectangle 1"/>
-          <p:cNvSpPr/>
-          <p:nvPr/>
-        </p:nvSpPr>
-        <p:spPr>
-          <a:xfrm>
-            <a:off x="0" y="0"/>
-            <a:ext cx="12191695" cy="164592"/>
-          </a:xfrm>
-          <a:prstGeom prst="rect">
-            <a:avLst/>
-          </a:prstGeom>
-          <a:solidFill>
-            <a:srgbClr val="2E86AB"/>
-          </a:solidFill>
-          <a:ln>
-            <a:noFill/>
-          </a:ln>
-        </p:spPr>
-        <p:style>
-          <a:lnRef idx="1">
-            <a:schemeClr val="accent1"/>
-          </a:lnRef>
-          <a:fillRef idx="3">
-            <a:schemeClr val="accent1"/>
-          </a:fillRef>
-          <a:effectRef idx="2">
-            <a:schemeClr val="accent1"/>
-          </a:effectRef>
-          <a:fontRef idx="minor">
-            <a:schemeClr val="lt1"/>
-          </a:fontRef>
-        </p:style>
-        <p:txBody>
-          <a:bodyPr rtlCol="0" anchor="ctr"/>
-          <a:lstStyle/>
-          <a:p>
-            <a:pPr algn="ctr"/>
-          </a:p>
-        </p:txBody>
-      </p:sp>
-      <p:sp>
-        <p:nvSpPr>
-          <p:cNvPr id="3" name="TextBox 2"/>
-          <p:cNvSpPr txBox="1"/>
-          <p:nvPr/>
-        </p:nvSpPr>
-        <p:spPr>
-          <a:xfrm>
-            <a:off x="640080" y="411480"/>
-            <a:ext cx="10972800" cy="822960"/>
-          </a:xfrm>
-          <a:prstGeom prst="rect">
-            <a:avLst/>
-          </a:prstGeom>
-          <a:noFill/>
-        </p:spPr>
-        <p:txBody>
-          <a:bodyPr wrap="square">
-            <a:spAutoFit/>
-          </a:bodyPr>
-          <a:lstStyle/>
-          <a:p>
-            <a:pPr>
-              <a:defRPr sz="2800" b="1">
-                <a:solidFill>
-                  <a:srgbClr val="1F3864"/>
-                </a:solidFill>
-              </a:defRPr>
-            </a:pPr>
-            <a:r>
-              <a:t>R · F · M — three questions about every customer</a:t>
-            </a:r>
-          </a:p>
-        </p:txBody>
-      </p:sp>
-      <p:graphicFrame>
-        <p:nvGraphicFramePr>
-          <p:cNvPr id="4" name="Table 3"/>
-          <p:cNvGraphicFramePr>
-            <a:graphicFrameLocks noGrp="1"/>
-          </p:cNvGraphicFramePr>
-          <p:nvPr/>
-        </p:nvGraphicFramePr>
-        <p:xfrm>
-          <a:off x="640080" y="1554480"/>
-          <a:ext cx="10972800" cy="3108960"/>
-        </p:xfrm>
-        <a:graphic>
-          <a:graphicData uri="http://schemas.openxmlformats.org/drawingml/2006/table">
-            <a:tbl>
-              <a:tblPr firstRow="1" bandRow="1">
-                <a:tableStyleId>{5C22544A-7EE6-4342-B048-85BDC9FD1C3A}</a:tableStyleId>
-              </a:tblPr>
-              <a:tblGrid>
-                <a:gridCol w="2743200"/>
-                <a:gridCol w="2743200"/>
-                <a:gridCol w="2743200"/>
-                <a:gridCol w="2743200"/>
-              </a:tblGrid>
-              <a:tr h="777240">
-                <a:tc>
-                  <a:txBody>
-                    <a:bodyPr/>
-                    <a:lstStyle/>
-                    <a:p>
-                      <a:pPr>
-                        <a:defRPr sz="1600" b="1">
-                          <a:solidFill>
-                            <a:srgbClr val="FFFFFF"/>
-                          </a:solidFill>
-                        </a:defRPr>
-                      </a:pPr>
-                      <a:r>
-                        <a:t>Letter</a:t>
-                      </a:r>
-                    </a:p>
-                  </a:txBody>
-                  <a:tcPr>
-                    <a:solidFill>
-                      <a:srgbClr val="1F3864"/>
-                    </a:solidFill>
-                  </a:tcPr>
-                </a:tc>
-                <a:tc>
-                  <a:txBody>
-                    <a:bodyPr/>
-                    <a:lstStyle/>
-                    <a:p>
-                      <a:pPr>
-                        <a:defRPr sz="1600" b="1">
-                          <a:solidFill>
-                            <a:srgbClr val="FFFFFF"/>
-                          </a:solidFill>
-                        </a:defRPr>
-                      </a:pPr>
-                      <a:r>
-                        <a:t>Question</a:t>
-                      </a:r>
-                    </a:p>
-                  </a:txBody>
-                  <a:tcPr>
-                    <a:solidFill>
-                      <a:srgbClr val="1F3864"/>
-                    </a:solidFill>
-                  </a:tcPr>
-                </a:tc>
-                <a:tc>
-                  <a:txBody>
-                    <a:bodyPr/>
-                    <a:lstStyle/>
-                    <a:p>
-                      <a:pPr>
-                        <a:defRPr sz="1600" b="1">
-                          <a:solidFill>
-                            <a:srgbClr val="FFFFFF"/>
-                          </a:solidFill>
-                        </a:defRPr>
-                      </a:pPr>
-                      <a:r>
-                        <a:t>Metric</a:t>
-                      </a:r>
-                    </a:p>
-                  </a:txBody>
-                  <a:tcPr>
-                    <a:solidFill>
-                      <a:srgbClr val="1F3864"/>
-                    </a:solidFill>
-                  </a:tcPr>
-                </a:tc>
-                <a:tc>
-                  <a:txBody>
-                    <a:bodyPr/>
-                    <a:lstStyle/>
-                    <a:p>
-                      <a:pPr>
-                        <a:defRPr sz="1600" b="1">
-                          <a:solidFill>
-                            <a:srgbClr val="FFFFFF"/>
-                          </a:solidFill>
-                        </a:defRPr>
-                      </a:pPr>
-                      <a:r>
-                        <a:t>Intuition</a:t>
-                      </a:r>
-                    </a:p>
-                  </a:txBody>
-                  <a:tcPr>
-                    <a:solidFill>
-                      <a:srgbClr val="1F3864"/>
-                    </a:solidFill>
-                  </a:tcPr>
-                </a:tc>
-              </a:tr>
-              <a:tr h="777240">
-                <a:tc>
-                  <a:txBody>
-                    <a:bodyPr/>
-                    <a:lstStyle/>
-                    <a:p>
-                      <a:pPr>
-                        <a:defRPr sz="1600">
-                          <a:solidFill>
-                            <a:srgbClr val="1F3864"/>
-                          </a:solidFill>
-                        </a:defRPr>
-                      </a:pPr>
-                      <a:r>
-                        <a:t>Recency</a:t>
-                      </a:r>
-                    </a:p>
-                  </a:txBody>
-                  <a:tcPr>
-                    <a:solidFill>
-                      <a:srgbClr val="F2F5F9"/>
-                    </a:solidFill>
-                  </a:tcPr>
-                </a:tc>
-                <a:tc>
-                  <a:txBody>
-                    <a:bodyPr/>
-                    <a:lstStyle/>
-                    <a:p>
-                      <a:pPr>
-                        <a:defRPr sz="1600">
-                          <a:solidFill>
-                            <a:srgbClr val="1F3864"/>
-                          </a:solidFill>
-                        </a:defRPr>
-                      </a:pPr>
-                      <a:r>
-                        <a:t>How recently did they buy?</a:t>
-                      </a:r>
-                    </a:p>
-                  </a:txBody>
-                  <a:tcPr>
-                    <a:solidFill>
-                      <a:srgbClr val="F2F5F9"/>
-                    </a:solidFill>
-                  </a:tcPr>
-                </a:tc>
-                <a:tc>
-                  <a:txBody>
-                    <a:bodyPr/>
-                    <a:lstStyle/>
-                    <a:p>
-                      <a:pPr>
-                        <a:defRPr sz="1600">
-                          <a:solidFill>
-                            <a:srgbClr val="1F3864"/>
-                          </a:solidFill>
-                        </a:defRPr>
-                      </a:pPr>
-                      <a:r>
-                        <a:t>Days since last purchase</a:t>
-                      </a:r>
-                    </a:p>
-                  </a:txBody>
-                  <a:tcPr>
-                    <a:solidFill>
-                      <a:srgbClr val="F2F5F9"/>
-                    </a:solidFill>
-                  </a:tcPr>
-                </a:tc>
-                <a:tc>
-                  <a:txBody>
-                    <a:bodyPr/>
-                    <a:lstStyle/>
-                    <a:p>
-                      <a:pPr>
-                        <a:defRPr sz="1600">
-                          <a:solidFill>
-                            <a:srgbClr val="1F3864"/>
-                          </a:solidFill>
-                        </a:defRPr>
-                      </a:pPr>
-                      <a:r>
-                        <a:t>Recent buyers respond best</a:t>
-                      </a:r>
-                    </a:p>
-                  </a:txBody>
-                  <a:tcPr>
-                    <a:solidFill>
-                      <a:srgbClr val="F2F5F9"/>
-                    </a:solidFill>
-                  </a:tcPr>
-                </a:tc>
-              </a:tr>
-              <a:tr h="777240">
-                <a:tc>
-                  <a:txBody>
-                    <a:bodyPr/>
-                    <a:lstStyle/>
-                    <a:p>
-                      <a:pPr>
-                        <a:defRPr sz="1600">
-                          <a:solidFill>
-                            <a:srgbClr val="1F3864"/>
-                          </a:solidFill>
-                        </a:defRPr>
-                      </a:pPr>
-                      <a:r>
-                        <a:t>Frequency</a:t>
-                      </a:r>
-                    </a:p>
-                  </a:txBody>
-                  <a:tcPr>
-                    <a:solidFill>
-                      <a:srgbClr val="FFFFFF"/>
-                    </a:solidFill>
-                  </a:tcPr>
-                </a:tc>
-                <a:tc>
-                  <a:txBody>
-                    <a:bodyPr/>
-                    <a:lstStyle/>
-                    <a:p>
-                      <a:pPr>
-                        <a:defRPr sz="1600">
-                          <a:solidFill>
-                            <a:srgbClr val="1F3864"/>
-                          </a:solidFill>
-                        </a:defRPr>
-                      </a:pPr>
-                      <a:r>
-                        <a:t>How often do they buy?</a:t>
-                      </a:r>
-                    </a:p>
-                  </a:txBody>
-                  <a:tcPr>
-                    <a:solidFill>
-                      <a:srgbClr val="FFFFFF"/>
-                    </a:solidFill>
-                  </a:tcPr>
-                </a:tc>
-                <a:tc>
-                  <a:txBody>
-                    <a:bodyPr/>
-                    <a:lstStyle/>
-                    <a:p>
-                      <a:pPr>
-                        <a:defRPr sz="1600">
-                          <a:solidFill>
-                            <a:srgbClr val="1F3864"/>
-                          </a:solidFill>
-                        </a:defRPr>
-                      </a:pPr>
-                      <a:r>
-                        <a:t>Number of orders</a:t>
-                      </a:r>
-                    </a:p>
-                  </a:txBody>
-                  <a:tcPr>
-                    <a:solidFill>
-                      <a:srgbClr val="FFFFFF"/>
-                    </a:solidFill>
-                  </a:tcPr>
-                </a:tc>
-                <a:tc>
-                  <a:txBody>
-                    <a:bodyPr/>
-                    <a:lstStyle/>
-                    <a:p>
-                      <a:pPr>
-                        <a:defRPr sz="1600">
-                          <a:solidFill>
-                            <a:srgbClr val="1F3864"/>
-                          </a:solidFill>
-                        </a:defRPr>
-                      </a:pPr>
-                      <a:r>
-                        <a:t>Habit predicts future buying</a:t>
-                      </a:r>
-                    </a:p>
-                  </a:txBody>
-                  <a:tcPr>
-                    <a:solidFill>
-                      <a:srgbClr val="FFFFFF"/>
-                    </a:solidFill>
-                  </a:tcPr>
-                </a:tc>
-              </a:tr>
-              <a:tr h="777240">
-                <a:tc>
-                  <a:txBody>
-                    <a:bodyPr/>
-                    <a:lstStyle/>
-                    <a:p>
-                      <a:pPr>
-                        <a:defRPr sz="1600">
-                          <a:solidFill>
-                            <a:srgbClr val="1F3864"/>
-                          </a:solidFill>
-                        </a:defRPr>
-                      </a:pPr>
-                      <a:r>
-                        <a:t>Monetary</a:t>
-                      </a:r>
-                    </a:p>
-                  </a:txBody>
-                  <a:tcPr>
-                    <a:solidFill>
-                      <a:srgbClr val="F2F5F9"/>
-                    </a:solidFill>
-                  </a:tcPr>
-                </a:tc>
-                <a:tc>
-                  <a:txBody>
-                    <a:bodyPr/>
-                    <a:lstStyle/>
-                    <a:p>
-                      <a:pPr>
-                        <a:defRPr sz="1600">
-                          <a:solidFill>
-                            <a:srgbClr val="1F3864"/>
-                          </a:solidFill>
-                        </a:defRPr>
-                      </a:pPr>
-                      <a:r>
-                        <a:t>How much do they spend?</a:t>
-                      </a:r>
-                    </a:p>
-                  </a:txBody>
-                  <a:tcPr>
-                    <a:solidFill>
-                      <a:srgbClr val="F2F5F9"/>
-                    </a:solidFill>
-                  </a:tcPr>
-                </a:tc>
-                <a:tc>
-                  <a:txBody>
-                    <a:bodyPr/>
-                    <a:lstStyle/>
-                    <a:p>
-                      <a:pPr>
-                        <a:defRPr sz="1600">
-                          <a:solidFill>
-                            <a:srgbClr val="1F3864"/>
-                          </a:solidFill>
-                        </a:defRPr>
-                      </a:pPr>
-                      <a:r>
-                        <a:t>Total spend ($)</a:t>
-                      </a:r>
-                    </a:p>
-                  </a:txBody>
-                  <a:tcPr>
-                    <a:solidFill>
-                      <a:srgbClr val="F2F5F9"/>
-                    </a:solidFill>
-                  </a:tcPr>
-                </a:tc>
-                <a:tc>
-                  <a:txBody>
-                    <a:bodyPr/>
-                    <a:lstStyle/>
-                    <a:p>
-                      <a:pPr>
-                        <a:defRPr sz="1600">
-                          <a:solidFill>
-                            <a:srgbClr val="1F3864"/>
-                          </a:solidFill>
-                        </a:defRPr>
-                      </a:pPr>
-                      <a:r>
-                        <a:t>Past spend predicts future value</a:t>
-                      </a:r>
-                    </a:p>
-                  </a:txBody>
-                  <a:tcPr>
-                    <a:solidFill>
-                      <a:srgbClr val="F2F5F9"/>
-                    </a:solidFill>
-                  </a:tcPr>
-                </a:tc>
-              </a:tr>
-            </a:tbl>
-          </a:graphicData>
-        </a:graphic>
-      </p:graphicFrame>
-      <p:sp>
-        <p:nvSpPr>
-          <p:cNvPr id="5" name="TextBox 4"/>
-          <p:cNvSpPr txBox="1"/>
-          <p:nvPr/>
-        </p:nvSpPr>
-        <p:spPr>
-          <a:xfrm>
-            <a:off x="731520" y="4572000"/>
-            <a:ext cx="10698480" cy="4937760"/>
-          </a:xfrm>
-          <a:prstGeom prst="rect">
-            <a:avLst/>
-          </a:prstGeom>
-          <a:noFill/>
-        </p:spPr>
-        <p:txBody>
-          <a:bodyPr wrap="square">
-            <a:spAutoFit/>
-          </a:bodyPr>
-          <a:lstStyle/>
-          <a:p>
-            <a:pPr>
-              <a:spcAft>
-                <a:spcPts val="1000"/>
-              </a:spcAft>
-              <a:defRPr sz="1600">
-                <a:solidFill>
-                  <a:srgbClr val="1F3864"/>
-                </a:solidFill>
-              </a:defRPr>
-            </a:pPr>
-            <a:r>
-              <a:t>•  All three come straight from the transaction log — no surveys, no extra data collection needed</a:t>
             </a:r>
           </a:p>
         </p:txBody>
